--- a/resources/slides/02_applications.pptx
+++ b/resources/slides/02_applications.pptx
@@ -5,7 +5,7 @@
     <p:sldMasterId id="2147483648" r:id="rId1"/>
   </p:sldMasterIdLst>
   <p:notesMasterIdLst>
-    <p:notesMasterId r:id="rId20"/>
+    <p:notesMasterId r:id="rId23"/>
   </p:notesMasterIdLst>
   <p:sldIdLst>
     <p:sldId id="256" r:id="rId2"/>
@@ -15,17 +15,20 @@
     <p:sldId id="260" r:id="rId6"/>
     <p:sldId id="261" r:id="rId7"/>
     <p:sldId id="262" r:id="rId8"/>
-    <p:sldId id="263" r:id="rId9"/>
-    <p:sldId id="264" r:id="rId10"/>
-    <p:sldId id="265" r:id="rId11"/>
-    <p:sldId id="266" r:id="rId12"/>
-    <p:sldId id="267" r:id="rId13"/>
-    <p:sldId id="268" r:id="rId14"/>
-    <p:sldId id="269" r:id="rId15"/>
-    <p:sldId id="270" r:id="rId16"/>
-    <p:sldId id="271" r:id="rId17"/>
-    <p:sldId id="273" r:id="rId18"/>
-    <p:sldId id="274" r:id="rId19"/>
+    <p:sldId id="275" r:id="rId9"/>
+    <p:sldId id="263" r:id="rId10"/>
+    <p:sldId id="264" r:id="rId11"/>
+    <p:sldId id="265" r:id="rId12"/>
+    <p:sldId id="266" r:id="rId13"/>
+    <p:sldId id="267" r:id="rId14"/>
+    <p:sldId id="268" r:id="rId15"/>
+    <p:sldId id="276" r:id="rId16"/>
+    <p:sldId id="269" r:id="rId17"/>
+    <p:sldId id="270" r:id="rId18"/>
+    <p:sldId id="271" r:id="rId19"/>
+    <p:sldId id="277" r:id="rId20"/>
+    <p:sldId id="273" r:id="rId21"/>
+    <p:sldId id="274" r:id="rId22"/>
   </p:sldIdLst>
   <p:sldSz cx="12192000" cy="6858000"/>
   <p:notesSz cx="6858000" cy="9144000"/>
@@ -214,7 +217,7 @@
           <a:p>
             <a:fld id="{D3DF2789-8AA8-B642-BB33-D304F9683406}" type="datetimeFigureOut">
               <a:rPr lang="en-US" smtClean="0"/>
-              <a:t>8/4/26</a:t>
+              <a:t>9/12/26</a:t>
             </a:fld>
             <a:endParaRPr lang="en-US"/>
           </a:p>
@@ -736,7 +739,7 @@
           <a:p>
             <a:fld id="{48083564-4C95-7249-8F3E-E0BAF15EED1F}" type="datetime1">
               <a:rPr lang="en-US" smtClean="0"/>
-              <a:t>8/4/26</a:t>
+              <a:t>9/12/26</a:t>
             </a:fld>
             <a:endParaRPr lang="en-US"/>
           </a:p>
@@ -843,6 +846,260 @@
 </file>
 
 <file path=ppt/slideLayouts/slideLayout2.xml><?xml version="1.0" encoding="utf-8"?>
+<p:sldLayout xmlns:a="http://schemas.openxmlformats.org/drawingml/2006/main" xmlns:r="http://schemas.openxmlformats.org/officeDocument/2006/relationships" xmlns:p="http://schemas.openxmlformats.org/presentationml/2006/main" preserve="1" userDrawn="1">
+  <p:cSld name="1_Title Slide">
+    <p:spTree>
+      <p:nvGrpSpPr>
+        <p:cNvPr id="1" name=""/>
+        <p:cNvGrpSpPr/>
+        <p:nvPr/>
+      </p:nvGrpSpPr>
+      <p:grpSpPr>
+        <a:xfrm>
+          <a:off x="0" y="0"/>
+          <a:ext cx="0" cy="0"/>
+          <a:chOff x="0" y="0"/>
+          <a:chExt cx="0" cy="0"/>
+        </a:xfrm>
+      </p:grpSpPr>
+      <p:sp>
+        <p:nvSpPr>
+          <p:cNvPr id="7" name="Rectangle 6">
+            <a:extLst>
+              <a:ext uri="{FF2B5EF4-FFF2-40B4-BE49-F238E27FC236}">
+                <a16:creationId xmlns:a16="http://schemas.microsoft.com/office/drawing/2014/main" id="{A07BDD6A-1823-8EBE-4339-8BE6A00F709B}"/>
+              </a:ext>
+            </a:extLst>
+          </p:cNvPr>
+          <p:cNvSpPr/>
+          <p:nvPr userDrawn="1"/>
+        </p:nvSpPr>
+        <p:spPr>
+          <a:xfrm>
+            <a:off x="0" y="1600201"/>
+            <a:ext cx="12192000" cy="2412586"/>
+          </a:xfrm>
+          <a:prstGeom prst="rect">
+            <a:avLst/>
+          </a:prstGeom>
+          <a:solidFill>
+            <a:srgbClr val="2F5592"/>
+          </a:solidFill>
+          <a:ln>
+            <a:noFill/>
+          </a:ln>
+        </p:spPr>
+        <p:style>
+          <a:lnRef idx="2">
+            <a:schemeClr val="accent1">
+              <a:shade val="15000"/>
+            </a:schemeClr>
+          </a:lnRef>
+          <a:fillRef idx="1">
+            <a:schemeClr val="accent1"/>
+          </a:fillRef>
+          <a:effectRef idx="0">
+            <a:schemeClr val="accent1"/>
+          </a:effectRef>
+          <a:fontRef idx="minor">
+            <a:schemeClr val="lt1"/>
+          </a:fontRef>
+        </p:style>
+        <p:txBody>
+          <a:bodyPr rtlCol="0" anchor="ctr"/>
+          <a:lstStyle/>
+          <a:p>
+            <a:pPr algn="ctr"/>
+            <a:endParaRPr lang="en-US"/>
+          </a:p>
+        </p:txBody>
+      </p:sp>
+      <p:sp>
+        <p:nvSpPr>
+          <p:cNvPr id="2" name="Title 1">
+            <a:extLst>
+              <a:ext uri="{FF2B5EF4-FFF2-40B4-BE49-F238E27FC236}">
+                <a16:creationId xmlns:a16="http://schemas.microsoft.com/office/drawing/2014/main" id="{906FEA07-9D5A-E087-CD0F-85CD617F7122}"/>
+              </a:ext>
+            </a:extLst>
+          </p:cNvPr>
+          <p:cNvSpPr>
+            <a:spLocks noGrp="1"/>
+          </p:cNvSpPr>
+          <p:nvPr>
+            <p:ph type="ctrTitle"/>
+          </p:nvPr>
+        </p:nvSpPr>
+        <p:spPr>
+          <a:xfrm>
+            <a:off x="1524000" y="1625187"/>
+            <a:ext cx="9144000" cy="2387600"/>
+          </a:xfrm>
+        </p:spPr>
+        <p:txBody>
+          <a:bodyPr anchor="ctr"/>
+          <a:lstStyle>
+            <a:lvl1pPr algn="ctr">
+              <a:defRPr sz="5400"/>
+            </a:lvl1pPr>
+          </a:lstStyle>
+          <a:p>
+            <a:r>
+              <a:rPr lang="en-US" dirty="0"/>
+              <a:t>Click to edit Master title style</a:t>
+            </a:r>
+          </a:p>
+        </p:txBody>
+      </p:sp>
+      <p:sp>
+        <p:nvSpPr>
+          <p:cNvPr id="4" name="Date Placeholder 3">
+            <a:extLst>
+              <a:ext uri="{FF2B5EF4-FFF2-40B4-BE49-F238E27FC236}">
+                <a16:creationId xmlns:a16="http://schemas.microsoft.com/office/drawing/2014/main" id="{27618ECE-1E6D-F8F2-58B1-71D7BE74C0F9}"/>
+              </a:ext>
+            </a:extLst>
+          </p:cNvPr>
+          <p:cNvSpPr>
+            <a:spLocks noGrp="1"/>
+          </p:cNvSpPr>
+          <p:nvPr>
+            <p:ph type="dt" sz="half" idx="10"/>
+          </p:nvPr>
+        </p:nvSpPr>
+        <p:spPr/>
+        <p:txBody>
+          <a:bodyPr/>
+          <a:lstStyle/>
+          <a:p>
+            <a:fld id="{CC015439-64B1-CE4E-8D65-9A05746CEBEF}" type="datetimeFigureOut">
+              <a:rPr lang="en-US" smtClean="0"/>
+              <a:t>9/12/26</a:t>
+            </a:fld>
+            <a:endParaRPr lang="en-US"/>
+          </a:p>
+        </p:txBody>
+      </p:sp>
+      <p:sp>
+        <p:nvSpPr>
+          <p:cNvPr id="5" name="Footer Placeholder 4">
+            <a:extLst>
+              <a:ext uri="{FF2B5EF4-FFF2-40B4-BE49-F238E27FC236}">
+                <a16:creationId xmlns:a16="http://schemas.microsoft.com/office/drawing/2014/main" id="{B6D2AB94-E371-30E1-1464-0D57E5C45DBB}"/>
+              </a:ext>
+            </a:extLst>
+          </p:cNvPr>
+          <p:cNvSpPr>
+            <a:spLocks noGrp="1"/>
+          </p:cNvSpPr>
+          <p:nvPr>
+            <p:ph type="ftr" sz="quarter" idx="11"/>
+          </p:nvPr>
+        </p:nvSpPr>
+        <p:spPr/>
+        <p:txBody>
+          <a:bodyPr/>
+          <a:lstStyle/>
+          <a:p>
+            <a:endParaRPr lang="en-US"/>
+          </a:p>
+        </p:txBody>
+      </p:sp>
+      <p:sp>
+        <p:nvSpPr>
+          <p:cNvPr id="6" name="Slide Number Placeholder 5">
+            <a:extLst>
+              <a:ext uri="{FF2B5EF4-FFF2-40B4-BE49-F238E27FC236}">
+                <a16:creationId xmlns:a16="http://schemas.microsoft.com/office/drawing/2014/main" id="{339C57B5-7F35-E930-6BE6-D1855198237E}"/>
+              </a:ext>
+            </a:extLst>
+          </p:cNvPr>
+          <p:cNvSpPr>
+            <a:spLocks noGrp="1"/>
+          </p:cNvSpPr>
+          <p:nvPr>
+            <p:ph type="sldNum" sz="quarter" idx="12"/>
+          </p:nvPr>
+        </p:nvSpPr>
+        <p:spPr/>
+        <p:txBody>
+          <a:bodyPr/>
+          <a:lstStyle/>
+          <a:p>
+            <a:fld id="{394597B6-99AE-8F4E-8AC4-338DBFD9B0E5}" type="slidenum">
+              <a:rPr lang="en-US" smtClean="0"/>
+              <a:t>‹#›</a:t>
+            </a:fld>
+            <a:endParaRPr lang="en-US"/>
+          </a:p>
+        </p:txBody>
+      </p:sp>
+      <p:sp>
+        <p:nvSpPr>
+          <p:cNvPr id="9" name="Rectangle 8">
+            <a:extLst>
+              <a:ext uri="{FF2B5EF4-FFF2-40B4-BE49-F238E27FC236}">
+                <a16:creationId xmlns:a16="http://schemas.microsoft.com/office/drawing/2014/main" id="{061D39B3-5E5D-0F11-FC35-6F2C9B63E066}"/>
+              </a:ext>
+            </a:extLst>
+          </p:cNvPr>
+          <p:cNvSpPr/>
+          <p:nvPr userDrawn="1"/>
+        </p:nvSpPr>
+        <p:spPr>
+          <a:xfrm>
+            <a:off x="0" y="-1813"/>
+            <a:ext cx="12192000" cy="1400215"/>
+          </a:xfrm>
+          <a:prstGeom prst="rect">
+            <a:avLst/>
+          </a:prstGeom>
+          <a:solidFill>
+            <a:schemeClr val="bg1"/>
+          </a:solidFill>
+          <a:ln>
+            <a:noFill/>
+          </a:ln>
+        </p:spPr>
+        <p:style>
+          <a:lnRef idx="2">
+            <a:schemeClr val="accent1">
+              <a:shade val="15000"/>
+            </a:schemeClr>
+          </a:lnRef>
+          <a:fillRef idx="1">
+            <a:schemeClr val="accent1"/>
+          </a:fillRef>
+          <a:effectRef idx="0">
+            <a:schemeClr val="accent1"/>
+          </a:effectRef>
+          <a:fontRef idx="minor">
+            <a:schemeClr val="lt1"/>
+          </a:fontRef>
+        </p:style>
+        <p:txBody>
+          <a:bodyPr rtlCol="0" anchor="ctr"/>
+          <a:lstStyle/>
+          <a:p>
+            <a:pPr algn="ctr"/>
+            <a:endParaRPr lang="en-US"/>
+          </a:p>
+        </p:txBody>
+      </p:sp>
+    </p:spTree>
+    <p:extLst>
+      <p:ext uri="{BB962C8B-B14F-4D97-AF65-F5344CB8AC3E}">
+        <p14:creationId xmlns:p14="http://schemas.microsoft.com/office/powerpoint/2010/main" val="3617833679"/>
+      </p:ext>
+    </p:extLst>
+  </p:cSld>
+  <p:clrMapOvr>
+    <a:masterClrMapping/>
+  </p:clrMapOvr>
+</p:sldLayout>
+</file>
+
+<file path=ppt/slideLayouts/slideLayout3.xml><?xml version="1.0" encoding="utf-8"?>
 <p:sldLayout xmlns:a="http://schemas.openxmlformats.org/drawingml/2006/main" xmlns:r="http://schemas.openxmlformats.org/officeDocument/2006/relationships" xmlns:p="http://schemas.openxmlformats.org/presentationml/2006/main" type="obj" preserve="1">
   <p:cSld name="Title and Content">
     <p:spTree>
@@ -967,7 +1224,7 @@
           <a:p>
             <a:fld id="{641350B5-1D53-6044-A5E6-B5385B772E16}" type="datetime1">
               <a:rPr lang="en-US" smtClean="0"/>
-              <a:t>8/4/26</a:t>
+              <a:t>9/12/26</a:t>
             </a:fld>
             <a:endParaRPr lang="en-US"/>
           </a:p>
@@ -1043,7 +1300,7 @@
 </p:sldLayout>
 </file>
 
-<file path=ppt/slideLayouts/slideLayout3.xml><?xml version="1.0" encoding="utf-8"?>
+<file path=ppt/slideLayouts/slideLayout4.xml><?xml version="1.0" encoding="utf-8"?>
 <p:sldLayout xmlns:a="http://schemas.openxmlformats.org/drawingml/2006/main" xmlns:r="http://schemas.openxmlformats.org/officeDocument/2006/relationships" xmlns:p="http://schemas.openxmlformats.org/presentationml/2006/main" type="twoObj" preserve="1">
   <p:cSld name="Two Content">
     <p:spTree>
@@ -1235,7 +1492,7 @@
           <a:p>
             <a:fld id="{03FD4BE1-3C70-ED46-A67A-E95C69006502}" type="datetime1">
               <a:rPr lang="en-US" smtClean="0"/>
-              <a:t>8/4/26</a:t>
+              <a:t>9/12/26</a:t>
             </a:fld>
             <a:endParaRPr lang="en-US"/>
           </a:p>
@@ -1311,7 +1568,7 @@
 </p:sldLayout>
 </file>
 
-<file path=ppt/slideLayouts/slideLayout4.xml><?xml version="1.0" encoding="utf-8"?>
+<file path=ppt/slideLayouts/slideLayout5.xml><?xml version="1.0" encoding="utf-8"?>
 <p:sldLayout xmlns:a="http://schemas.openxmlformats.org/drawingml/2006/main" xmlns:r="http://schemas.openxmlformats.org/officeDocument/2006/relationships" xmlns:p="http://schemas.openxmlformats.org/presentationml/2006/main" type="titleOnly" preserve="1">
   <p:cSld name="Title Only">
     <p:spTree>
@@ -1379,7 +1636,7 @@
           <a:p>
             <a:fld id="{A383EB3D-39F3-3640-BD20-FFDEB0897022}" type="datetime1">
               <a:rPr lang="en-US" smtClean="0"/>
-              <a:t>8/4/26</a:t>
+              <a:t>9/12/26</a:t>
             </a:fld>
             <a:endParaRPr lang="en-US"/>
           </a:p>
@@ -1585,7 +1842,7 @@
           <a:p>
             <a:fld id="{0BEFCE9E-DC16-DC4E-B51E-937F2F381D09}" type="datetime1">
               <a:rPr lang="en-US" smtClean="0"/>
-              <a:t>8/4/26</a:t>
+              <a:t>9/12/26</a:t>
             </a:fld>
             <a:endParaRPr lang="en-US"/>
           </a:p>
@@ -1784,9 +2041,10 @@
   <p:clrMap bg1="lt1" tx1="dk1" bg2="lt2" tx2="dk2" accent1="accent1" accent2="accent2" accent3="accent3" accent4="accent4" accent5="accent5" accent6="accent6" hlink="hlink" folHlink="folHlink"/>
   <p:sldLayoutIdLst>
     <p:sldLayoutId id="2147483649" r:id="rId1"/>
-    <p:sldLayoutId id="2147483650" r:id="rId2"/>
-    <p:sldLayoutId id="2147483652" r:id="rId3"/>
-    <p:sldLayoutId id="2147483654" r:id="rId4"/>
+    <p:sldLayoutId id="2147483655" r:id="rId2"/>
+    <p:sldLayoutId id="2147483650" r:id="rId3"/>
+    <p:sldLayoutId id="2147483652" r:id="rId4"/>
+    <p:sldLayoutId id="2147483654" r:id="rId5"/>
   </p:sldLayoutIdLst>
   <p:hf hdr="0" dt="0"/>
   <p:txStyles>
@@ -2175,8 +2433,22 @@
           <a:lstStyle/>
           <a:p>
             <a:r>
-              <a:t>Connection Overhead</a:t>
-            </a:r>
+              <a:rPr dirty="0"/>
+              <a:t>Request</a:t>
+            </a:r>
+            <a:r>
+              <a:rPr lang="en-US" dirty="0"/>
+              <a:t>/</a:t>
+            </a:r>
+            <a:r>
+              <a:rPr dirty="0"/>
+              <a:t>Response</a:t>
+            </a:r>
+            <a:r>
+              <a:rPr lang="en-US" dirty="0"/>
+              <a:t> Protocol</a:t>
+            </a:r>
+            <a:endParaRPr dirty="0"/>
           </a:p>
         </p:txBody>
       </p:sp>
@@ -2190,188 +2462,108 @@
             <p:ph idx="1"/>
           </p:nvPr>
         </p:nvSpPr>
-        <p:spPr>
-          <a:xfrm>
-            <a:off x="838079" y="1476360"/>
-            <a:ext cx="7049998" cy="4748170"/>
-          </a:xfrm>
-        </p:spPr>
-        <p:txBody>
-          <a:bodyPr>
-            <a:normAutofit lnSpcReduction="10000"/>
-          </a:bodyPr>
-          <a:lstStyle/>
-          <a:p>
-            <a:r>
-              <a:rPr sz="2400" dirty="0"/>
-              <a:t>HTTP 1.0</a:t>
-            </a:r>
-            <a:endParaRPr lang="en-US" sz="2400" dirty="0"/>
-          </a:p>
-          <a:p>
-            <a:pPr lvl="1"/>
-            <a:r>
-              <a:rPr lang="en-US" sz="2000" dirty="0"/>
-              <a:t>O</a:t>
-            </a:r>
-            <a:r>
-              <a:rPr sz="2000" dirty="0"/>
-              <a:t>ne TCP connection per object</a:t>
-            </a:r>
-          </a:p>
-          <a:p>
-            <a:pPr lvl="1"/>
-            <a:r>
-              <a:rPr lang="en-US" sz="2000" dirty="0"/>
-              <a:t>P</a:t>
-            </a:r>
-            <a:r>
-              <a:rPr sz="2000" dirty="0"/>
-              <a:t>age with 12 images → 13 TCP </a:t>
-            </a:r>
-            <a:r>
-              <a:rPr lang="en-US" sz="2000" dirty="0"/>
-              <a:t>connections</a:t>
-            </a:r>
-          </a:p>
-          <a:p>
-            <a:pPr lvl="1"/>
-            <a:r>
-              <a:rPr lang="en-US" sz="2000" dirty="0"/>
-              <a:t>TLS adds additional round trips</a:t>
-            </a:r>
-            <a:endParaRPr sz="2000" dirty="0"/>
-          </a:p>
-          <a:p>
-            <a:r>
-              <a:rPr sz="2400" dirty="0"/>
-              <a:t>HTTP 1.1</a:t>
-            </a:r>
-            <a:endParaRPr lang="en-US" sz="2400" dirty="0"/>
-          </a:p>
-          <a:p>
-            <a:pPr lvl="1"/>
-            <a:r>
-              <a:rPr lang="en-US" sz="2000" dirty="0"/>
-              <a:t>P</a:t>
-            </a:r>
-            <a:r>
-              <a:rPr sz="2000" dirty="0"/>
-              <a:t>ersistent connections</a:t>
-            </a:r>
-            <a:endParaRPr lang="en-US" sz="2000" dirty="0"/>
-          </a:p>
-          <a:p>
-            <a:pPr lvl="1"/>
-            <a:r>
-              <a:rPr lang="en-US" sz="2000" dirty="0"/>
-              <a:t>R</a:t>
-            </a:r>
-            <a:r>
-              <a:rPr sz="2000" dirty="0"/>
-              <a:t>euse one TCP for multiple requests</a:t>
-            </a:r>
-          </a:p>
-          <a:p>
-            <a:r>
-              <a:rPr sz="2400" dirty="0"/>
-              <a:t>HTTP/2</a:t>
-            </a:r>
-            <a:endParaRPr lang="en-US" sz="2400" dirty="0"/>
-          </a:p>
-          <a:p>
-            <a:pPr lvl="1"/>
-            <a:r>
-              <a:rPr lang="en-US" sz="2000" dirty="0"/>
+        <p:spPr/>
+        <p:txBody>
+          <a:bodyPr/>
+          <a:lstStyle/>
+          <a:p>
+            <a:r>
+              <a:rPr dirty="0"/>
+              <a:t>Request: </a:t>
+            </a:r>
+            <a:r>
+              <a:rPr lang="en-US" dirty="0"/>
               <a:t>M</a:t>
             </a:r>
             <a:r>
-              <a:rPr sz="2000" dirty="0"/>
-              <a:t>ultiplexed streams</a:t>
-            </a:r>
-            <a:endParaRPr lang="en-US" sz="2000" dirty="0"/>
-          </a:p>
-          <a:p>
-            <a:pPr lvl="1"/>
-            <a:r>
-              <a:rPr lang="en-US" sz="2000" dirty="0"/>
-              <a:t>C</a:t>
-            </a:r>
-            <a:r>
-              <a:rPr sz="2000" dirty="0"/>
-              <a:t>oncurrent request/response pairs on one TCP</a:t>
-            </a:r>
-          </a:p>
-          <a:p>
-            <a:r>
-              <a:rPr sz="2400" dirty="0"/>
-              <a:t>HTTP/3 </a:t>
-            </a:r>
-            <a:r>
-              <a:rPr lang="en-US" sz="2400" dirty="0"/>
-              <a:t>&amp;</a:t>
-            </a:r>
-            <a:r>
-              <a:rPr sz="2400" dirty="0"/>
-              <a:t> QUIC</a:t>
-            </a:r>
-            <a:endParaRPr lang="en-US" sz="2400" dirty="0"/>
-          </a:p>
-          <a:p>
-            <a:pPr lvl="1"/>
-            <a:r>
-              <a:rPr lang="en-US" sz="2000" dirty="0"/>
-              <a:t>R</a:t>
-            </a:r>
-            <a:r>
-              <a:rPr sz="2000" dirty="0"/>
-              <a:t>eplaces TCP entirely </a:t>
-            </a:r>
-            <a:endParaRPr lang="en-US" sz="2000" dirty="0"/>
-          </a:p>
-          <a:p>
-            <a:pPr lvl="1"/>
-            <a:r>
-              <a:rPr lang="en-US" sz="2000" dirty="0"/>
-              <a:t>See </a:t>
-            </a:r>
-            <a:r>
-              <a:rPr sz="2000" dirty="0"/>
-              <a:t>Chapter 15</a:t>
-            </a:r>
-          </a:p>
-        </p:txBody>
-      </p:sp>
-      <p:pic>
-        <p:nvPicPr>
-          <p:cNvPr id="4" name="Picture 3" descr="rtt-overhead.png"/>
-          <p:cNvPicPr>
-            <a:picLocks noChangeAspect="1"/>
-          </p:cNvPicPr>
-          <p:nvPr/>
-        </p:nvPicPr>
-        <p:blipFill>
-          <a:blip r:embed="rId2"/>
-          <a:stretch>
-            <a:fillRect/>
-          </a:stretch>
-        </p:blipFill>
-        <p:spPr>
-          <a:xfrm>
-            <a:off x="7065909" y="1476360"/>
-            <a:ext cx="4539815" cy="4351320"/>
-          </a:xfrm>
-          <a:prstGeom prst="rect">
-            <a:avLst/>
-          </a:prstGeom>
-        </p:spPr>
-      </p:pic>
-      <p:sp>
-        <p:nvSpPr>
-          <p:cNvPr id="5" name="Footer Placeholder 4">
+              <a:rPr dirty="0"/>
+              <a:t>ethod + </a:t>
+            </a:r>
+            <a:r>
+              <a:rPr lang="en-US" dirty="0"/>
+              <a:t>Resource (named by URL)</a:t>
+            </a:r>
+            <a:endParaRPr dirty="0"/>
+          </a:p>
+          <a:p>
+            <a:pPr lvl="1"/>
+            <a:r>
+              <a:rPr dirty="0"/>
+              <a:t>GET (retrieve), POST (submit), PUT (update), DELETE (remove)</a:t>
+            </a:r>
+          </a:p>
+          <a:p>
+            <a:r>
+              <a:rPr dirty="0"/>
+              <a:t>Response: 3-digit status code + reason phrase</a:t>
+            </a:r>
+          </a:p>
+          <a:p>
+            <a:pPr lvl="1"/>
+            <a:r>
+              <a:rPr dirty="0"/>
+              <a:t>2xx success</a:t>
+            </a:r>
+            <a:r>
+              <a:rPr lang="en-US" dirty="0"/>
+              <a:t>,</a:t>
+            </a:r>
+            <a:r>
+              <a:rPr dirty="0"/>
+              <a:t> 3xx redirect</a:t>
+            </a:r>
+            <a:r>
+              <a:rPr lang="en-US" dirty="0"/>
+              <a:t>,</a:t>
+            </a:r>
+            <a:r>
+              <a:rPr dirty="0"/>
+              <a:t> 4xx client error</a:t>
+            </a:r>
+            <a:r>
+              <a:rPr lang="en-US" dirty="0"/>
+              <a:t>,</a:t>
+            </a:r>
+            <a:r>
+              <a:rPr dirty="0"/>
+              <a:t> 5xx server error</a:t>
+            </a:r>
+          </a:p>
+          <a:p>
+            <a:r>
+              <a:rPr dirty="0"/>
+              <a:t>HTML and HTTP are companion standards</a:t>
+            </a:r>
+            <a:endParaRPr lang="en-US" dirty="0"/>
+          </a:p>
+          <a:p>
+            <a:pPr lvl="1"/>
+            <a:r>
+              <a:rPr lang="en-US" dirty="0"/>
+              <a:t>D</a:t>
+            </a:r>
+            <a:r>
+              <a:rPr dirty="0"/>
+              <a:t>ata format separate from transfer protocol</a:t>
+            </a:r>
+            <a:endParaRPr lang="en-US" dirty="0"/>
+          </a:p>
+          <a:p>
+            <a:pPr lvl="1"/>
+            <a:r>
+              <a:rPr lang="en-US" dirty="0"/>
+              <a:t>Easy to substitute other formats (e.g., XML)</a:t>
+            </a:r>
+            <a:endParaRPr dirty="0"/>
+          </a:p>
+        </p:txBody>
+      </p:sp>
+      <p:sp>
+        <p:nvSpPr>
+          <p:cNvPr id="4" name="Footer Placeholder 3">
             <a:extLst>
               <a:ext uri="{FF2B5EF4-FFF2-40B4-BE49-F238E27FC236}">
-                <a16:creationId xmlns:a16="http://schemas.microsoft.com/office/drawing/2014/main" id="{139C1BA4-A1FF-6732-7AFE-39F9765EB8B5}"/>
+                <a16:creationId xmlns:a16="http://schemas.microsoft.com/office/drawing/2014/main" id="{FDF923E9-4193-0A34-E11B-408C9FB47E02}"/>
               </a:ext>
             </a:extLst>
           </p:cNvPr>
@@ -2396,10 +2588,10 @@
       </p:sp>
       <p:sp>
         <p:nvSpPr>
-          <p:cNvPr id="6" name="Slide Number Placeholder 5">
+          <p:cNvPr id="5" name="Slide Number Placeholder 4">
             <a:extLst>
               <a:ext uri="{FF2B5EF4-FFF2-40B4-BE49-F238E27FC236}">
-                <a16:creationId xmlns:a16="http://schemas.microsoft.com/office/drawing/2014/main" id="{921A9CA7-942D-DF7A-F75F-27FC8E0E8556}"/>
+                <a16:creationId xmlns:a16="http://schemas.microsoft.com/office/drawing/2014/main" id="{DAA12770-960D-C5E6-6A20-8450B71DAD66}"/>
               </a:ext>
             </a:extLst>
           </p:cNvPr>
@@ -2464,10 +2656,8 @@
           <a:lstStyle/>
           <a:p>
             <a:r>
-              <a:rPr lang="en-US" dirty="0"/>
-              <a:t>Naming Scheme</a:t>
-            </a:r>
-            <a:endParaRPr dirty="0"/>
+              <a:t>Connection Overhead</a:t>
+            </a:r>
           </a:p>
         </p:txBody>
       </p:sp>
@@ -2483,156 +2673,186 @@
         </p:nvSpPr>
         <p:spPr>
           <a:xfrm>
-            <a:off x="838199" y="1548225"/>
-            <a:ext cx="10751545" cy="4351338"/>
+            <a:off x="838079" y="1476360"/>
+            <a:ext cx="7049998" cy="4748170"/>
           </a:xfrm>
         </p:spPr>
         <p:txBody>
-          <a:bodyPr/>
-          <a:lstStyle/>
-          <a:p>
-            <a:r>
-              <a:rPr dirty="0"/>
-              <a:t>URI: Uniform Resource Identifier</a:t>
-            </a:r>
-            <a:endParaRPr lang="en-US" dirty="0"/>
-          </a:p>
-          <a:p>
-            <a:pPr lvl="1"/>
-            <a:r>
-              <a:rPr lang="en-US" dirty="0"/>
-              <a:t>N</a:t>
-            </a:r>
-            <a:r>
-              <a:rPr dirty="0"/>
-              <a:t>ames any resource on the Internet</a:t>
-            </a:r>
-          </a:p>
-          <a:p>
-            <a:pPr lvl="1"/>
-            <a:r>
-              <a:rPr dirty="0"/>
-              <a:t>Format: scheme + scheme-specific part</a:t>
-            </a:r>
-          </a:p>
-          <a:p>
-            <a:r>
-              <a:rPr dirty="0"/>
-              <a:t>URL: </a:t>
-            </a:r>
-            <a:r>
-              <a:rPr lang="en-US" dirty="0"/>
-              <a:t>Uniform Resource Locator</a:t>
-            </a:r>
-          </a:p>
-          <a:p>
-            <a:pPr lvl="1"/>
-            <a:r>
-              <a:rPr dirty="0"/>
-              <a:t>URI that also locates the resource</a:t>
-            </a:r>
-          </a:p>
-          <a:p>
-            <a:pPr lvl="1"/>
-            <a:r>
-              <a:rPr sz="2300" dirty="0">
-                <a:latin typeface="Lucida Sans" panose="020B0602030504020204" pitchFamily="34" charset="77"/>
-              </a:rPr>
-              <a:t>https://</a:t>
-            </a:r>
-            <a:r>
-              <a:rPr sz="2300" dirty="0" err="1">
-                <a:latin typeface="Lucida Sans" panose="020B0602030504020204" pitchFamily="34" charset="77"/>
-              </a:rPr>
-              <a:t>book.systemsapproach.org</a:t>
-            </a:r>
-            <a:r>
-              <a:rPr sz="2300" dirty="0">
-                <a:latin typeface="Lucida Sans" panose="020B0602030504020204" pitchFamily="34" charset="77"/>
-              </a:rPr>
-              <a:t>/</a:t>
-            </a:r>
-            <a:r>
-              <a:rPr sz="2300" dirty="0" err="1">
-                <a:latin typeface="Lucida Sans" panose="020B0602030504020204" pitchFamily="34" charset="77"/>
-              </a:rPr>
-              <a:t>index.html</a:t>
-            </a:r>
-            <a:r>
-              <a:rPr lang="en-US" sz="2300" dirty="0">
-                <a:latin typeface="Lucida Sans" panose="020B0602030504020204" pitchFamily="34" charset="77"/>
-              </a:rPr>
-              <a:t> </a:t>
-            </a:r>
-            <a:r>
-              <a:rPr sz="2300" dirty="0">
-                <a:latin typeface="Lucida Sans" panose="020B0602030504020204" pitchFamily="34" charset="77"/>
-              </a:rPr>
-              <a:t> </a:t>
-            </a:r>
-            <a:r>
-              <a:rPr lang="en-US" dirty="0"/>
-              <a:t>(</a:t>
-            </a:r>
-            <a:r>
-              <a:rPr dirty="0"/>
-              <a:t>the familiar form</a:t>
-            </a:r>
-            <a:r>
-              <a:rPr lang="en-US" dirty="0"/>
-              <a:t>)</a:t>
-            </a:r>
-            <a:endParaRPr dirty="0"/>
-          </a:p>
-          <a:p>
-            <a:r>
-              <a:rPr dirty="0"/>
-              <a:t>URN: </a:t>
-            </a:r>
-            <a:r>
-              <a:rPr lang="en-US" dirty="0"/>
-              <a:t>Uniform Resource Name</a:t>
-            </a:r>
-          </a:p>
-          <a:p>
-            <a:pPr lvl="1"/>
-            <a:r>
-              <a:rPr dirty="0"/>
-              <a:t>URI that gives a persistent name without implying a location</a:t>
-            </a:r>
-          </a:p>
-          <a:p>
-            <a:pPr lvl="1"/>
-            <a:r>
-              <a:rPr sz="2300" dirty="0">
-                <a:latin typeface="Lucida Sans" panose="020B0602030504020204" pitchFamily="34" charset="77"/>
-              </a:rPr>
-              <a:t>doi:10.17487/RFC0791 </a:t>
-            </a:r>
-            <a:r>
-              <a:rPr lang="en-US" dirty="0">
-                <a:sym typeface="Wingdings" pitchFamily="2" charset="2"/>
-              </a:rPr>
-              <a:t>(</a:t>
-            </a:r>
-            <a:r>
-              <a:rPr dirty="0"/>
-              <a:t>identifies RFC 791 regardless of where it's hosted</a:t>
-            </a:r>
-            <a:r>
-              <a:rPr lang="en-US" dirty="0"/>
-              <a:t>)</a:t>
-            </a:r>
-            <a:endParaRPr dirty="0"/>
-          </a:p>
-        </p:txBody>
-      </p:sp>
-      <p:sp>
-        <p:nvSpPr>
-          <p:cNvPr id="4" name="Footer Placeholder 3">
+          <a:bodyPr>
+            <a:normAutofit lnSpcReduction="10000"/>
+          </a:bodyPr>
+          <a:lstStyle/>
+          <a:p>
+            <a:r>
+              <a:rPr sz="2400" dirty="0"/>
+              <a:t>HTTP 1.0</a:t>
+            </a:r>
+            <a:endParaRPr lang="en-US" sz="2400" dirty="0"/>
+          </a:p>
+          <a:p>
+            <a:pPr lvl="1"/>
+            <a:r>
+              <a:rPr lang="en-US" sz="2000" dirty="0"/>
+              <a:t>O</a:t>
+            </a:r>
+            <a:r>
+              <a:rPr sz="2000" dirty="0"/>
+              <a:t>ne TCP connection per object</a:t>
+            </a:r>
+          </a:p>
+          <a:p>
+            <a:pPr lvl="1"/>
+            <a:r>
+              <a:rPr lang="en-US" sz="2000" dirty="0"/>
+              <a:t>P</a:t>
+            </a:r>
+            <a:r>
+              <a:rPr sz="2000" dirty="0"/>
+              <a:t>age with 12 images → 13 TCP </a:t>
+            </a:r>
+            <a:r>
+              <a:rPr lang="en-US" sz="2000" dirty="0"/>
+              <a:t>connections</a:t>
+            </a:r>
+          </a:p>
+          <a:p>
+            <a:pPr lvl="1"/>
+            <a:r>
+              <a:rPr lang="en-US" sz="2000" dirty="0"/>
+              <a:t>TLS adds additional round trips</a:t>
+            </a:r>
+            <a:endParaRPr sz="2000" dirty="0"/>
+          </a:p>
+          <a:p>
+            <a:r>
+              <a:rPr sz="2400" dirty="0"/>
+              <a:t>HTTP 1.1</a:t>
+            </a:r>
+            <a:endParaRPr lang="en-US" sz="2400" dirty="0"/>
+          </a:p>
+          <a:p>
+            <a:pPr lvl="1"/>
+            <a:r>
+              <a:rPr lang="en-US" sz="2000" dirty="0"/>
+              <a:t>P</a:t>
+            </a:r>
+            <a:r>
+              <a:rPr sz="2000" dirty="0"/>
+              <a:t>ersistent connections</a:t>
+            </a:r>
+            <a:endParaRPr lang="en-US" sz="2000" dirty="0"/>
+          </a:p>
+          <a:p>
+            <a:pPr lvl="1"/>
+            <a:r>
+              <a:rPr lang="en-US" sz="2000" dirty="0"/>
+              <a:t>R</a:t>
+            </a:r>
+            <a:r>
+              <a:rPr sz="2000" dirty="0"/>
+              <a:t>euse one TCP for multiple requests</a:t>
+            </a:r>
+          </a:p>
+          <a:p>
+            <a:r>
+              <a:rPr sz="2400" dirty="0"/>
+              <a:t>HTTP/2</a:t>
+            </a:r>
+            <a:endParaRPr lang="en-US" sz="2400" dirty="0"/>
+          </a:p>
+          <a:p>
+            <a:pPr lvl="1"/>
+            <a:r>
+              <a:rPr lang="en-US" sz="2000" dirty="0"/>
+              <a:t>M</a:t>
+            </a:r>
+            <a:r>
+              <a:rPr sz="2000" dirty="0"/>
+              <a:t>ultiplexed streams</a:t>
+            </a:r>
+            <a:endParaRPr lang="en-US" sz="2000" dirty="0"/>
+          </a:p>
+          <a:p>
+            <a:pPr lvl="1"/>
+            <a:r>
+              <a:rPr lang="en-US" sz="2000" dirty="0"/>
+              <a:t>C</a:t>
+            </a:r>
+            <a:r>
+              <a:rPr sz="2000" dirty="0"/>
+              <a:t>oncurrent request/response pairs on one TCP</a:t>
+            </a:r>
+          </a:p>
+          <a:p>
+            <a:r>
+              <a:rPr sz="2400" dirty="0"/>
+              <a:t>HTTP/3 </a:t>
+            </a:r>
+            <a:r>
+              <a:rPr lang="en-US" sz="2400" dirty="0"/>
+              <a:t>&amp;</a:t>
+            </a:r>
+            <a:r>
+              <a:rPr sz="2400" dirty="0"/>
+              <a:t> QUIC</a:t>
+            </a:r>
+            <a:endParaRPr lang="en-US" sz="2400" dirty="0"/>
+          </a:p>
+          <a:p>
+            <a:pPr lvl="1"/>
+            <a:r>
+              <a:rPr lang="en-US" sz="2000" dirty="0"/>
+              <a:t>R</a:t>
+            </a:r>
+            <a:r>
+              <a:rPr sz="2000" dirty="0"/>
+              <a:t>eplaces TCP entirely </a:t>
+            </a:r>
+            <a:endParaRPr lang="en-US" sz="2000" dirty="0"/>
+          </a:p>
+          <a:p>
+            <a:pPr lvl="1"/>
+            <a:r>
+              <a:rPr lang="en-US" sz="2000" dirty="0"/>
+              <a:t>See </a:t>
+            </a:r>
+            <a:r>
+              <a:rPr sz="2000" dirty="0"/>
+              <a:t>Chapter 15</a:t>
+            </a:r>
+          </a:p>
+        </p:txBody>
+      </p:sp>
+      <p:pic>
+        <p:nvPicPr>
+          <p:cNvPr id="4" name="Picture 3" descr="rtt-overhead.png"/>
+          <p:cNvPicPr>
+            <a:picLocks noChangeAspect="1"/>
+          </p:cNvPicPr>
+          <p:nvPr/>
+        </p:nvPicPr>
+        <p:blipFill>
+          <a:blip r:embed="rId2"/>
+          <a:stretch>
+            <a:fillRect/>
+          </a:stretch>
+        </p:blipFill>
+        <p:spPr>
+          <a:xfrm>
+            <a:off x="7065909" y="1476360"/>
+            <a:ext cx="4539815" cy="4351320"/>
+          </a:xfrm>
+          <a:prstGeom prst="rect">
+            <a:avLst/>
+          </a:prstGeom>
+        </p:spPr>
+      </p:pic>
+      <p:sp>
+        <p:nvSpPr>
+          <p:cNvPr id="5" name="Footer Placeholder 4">
             <a:extLst>
               <a:ext uri="{FF2B5EF4-FFF2-40B4-BE49-F238E27FC236}">
-                <a16:creationId xmlns:a16="http://schemas.microsoft.com/office/drawing/2014/main" id="{394A3A1A-2E1A-4E86-A5F3-0CAED44B30D9}"/>
+                <a16:creationId xmlns:a16="http://schemas.microsoft.com/office/drawing/2014/main" id="{139C1BA4-A1FF-6732-7AFE-39F9765EB8B5}"/>
               </a:ext>
             </a:extLst>
           </p:cNvPr>
@@ -2657,10 +2877,10 @@
       </p:sp>
       <p:sp>
         <p:nvSpPr>
-          <p:cNvPr id="5" name="Slide Number Placeholder 4">
+          <p:cNvPr id="6" name="Slide Number Placeholder 5">
             <a:extLst>
               <a:ext uri="{FF2B5EF4-FFF2-40B4-BE49-F238E27FC236}">
-                <a16:creationId xmlns:a16="http://schemas.microsoft.com/office/drawing/2014/main" id="{BF0BD709-3342-6F96-18DD-FBCA4E446E5A}"/>
+                <a16:creationId xmlns:a16="http://schemas.microsoft.com/office/drawing/2014/main" id="{921A9CA7-942D-DF7A-F75F-27FC8E0E8556}"/>
               </a:ext>
             </a:extLst>
           </p:cNvPr>
@@ -2725,12 +2945,8 @@
           <a:lstStyle/>
           <a:p>
             <a:r>
-              <a:rPr dirty="0"/>
-              <a:t>Caching</a:t>
-            </a:r>
-            <a:r>
-              <a:rPr lang="en-US" dirty="0"/>
-              <a:t> Infrastructure</a:t>
+              <a:rPr lang="en-US" dirty="0"/>
+              <a:t>Naming Scheme</a:t>
             </a:r>
             <a:endParaRPr dirty="0"/>
           </a:p>
@@ -2748,74 +2964,17 @@
         </p:nvSpPr>
         <p:spPr>
           <a:xfrm>
-            <a:off x="838200" y="1548225"/>
-            <a:ext cx="10515600" cy="4709356"/>
+            <a:off x="838199" y="1548225"/>
+            <a:ext cx="10751545" cy="4351338"/>
           </a:xfrm>
         </p:spPr>
         <p:txBody>
-          <a:bodyPr>
-            <a:normAutofit fontScale="92500" lnSpcReduction="10000"/>
-          </a:bodyPr>
-          <a:lstStyle/>
-          <a:p>
-            <a:r>
-              <a:rPr lang="en-US" dirty="0"/>
-              <a:t>Two Benefits</a:t>
-            </a:r>
-          </a:p>
-          <a:p>
-            <a:pPr lvl="1"/>
-            <a:r>
-              <a:rPr lang="en-US" dirty="0"/>
-              <a:t>R</a:t>
-            </a:r>
-            <a:r>
-              <a:rPr dirty="0"/>
-              <a:t>educes </a:t>
-            </a:r>
-            <a:r>
-              <a:rPr lang="en-US" dirty="0"/>
-              <a:t>response time</a:t>
-            </a:r>
-          </a:p>
-          <a:p>
-            <a:pPr lvl="1"/>
-            <a:r>
-              <a:rPr lang="en-US" dirty="0"/>
-              <a:t>Reduces </a:t>
-            </a:r>
-            <a:r>
-              <a:rPr dirty="0"/>
-              <a:t>server load</a:t>
-            </a:r>
-          </a:p>
-          <a:p>
-            <a:r>
-              <a:rPr dirty="0"/>
-              <a:t>Where </a:t>
-            </a:r>
-            <a:r>
-              <a:rPr lang="en-US" dirty="0"/>
-              <a:t>do </a:t>
-            </a:r>
-            <a:r>
-              <a:rPr dirty="0"/>
-              <a:t>caches live</a:t>
-            </a:r>
-            <a:r>
-              <a:rPr lang="en-US" dirty="0"/>
-              <a:t>?</a:t>
-            </a:r>
-          </a:p>
-          <a:p>
-            <a:pPr lvl="1"/>
-            <a:r>
-              <a:rPr lang="en-US" dirty="0"/>
-              <a:t>B</a:t>
-            </a:r>
-            <a:r>
-              <a:rPr dirty="0"/>
-              <a:t>rowser</a:t>
+          <a:bodyPr/>
+          <a:lstStyle/>
+          <a:p>
+            <a:r>
+              <a:rPr dirty="0"/>
+              <a:t>URI: Uniform Resource Identifier</a:t>
             </a:r>
             <a:endParaRPr lang="en-US" dirty="0"/>
           </a:p>
@@ -2823,97 +2982,127 @@
             <a:pPr lvl="1"/>
             <a:r>
               <a:rPr lang="en-US" dirty="0"/>
-              <a:t>S</a:t>
-            </a:r>
-            <a:r>
-              <a:rPr dirty="0"/>
-              <a:t>ite </a:t>
-            </a:r>
-            <a:r>
-              <a:rPr lang="en-US" dirty="0"/>
-              <a:t>P</a:t>
-            </a:r>
-            <a:r>
-              <a:rPr dirty="0"/>
-              <a:t>roxy</a:t>
-            </a:r>
-          </a:p>
-          <a:p>
-            <a:pPr lvl="1"/>
-            <a:r>
-              <a:rPr dirty="0"/>
-              <a:t>CDNs</a:t>
-            </a:r>
-            <a:r>
-              <a:rPr lang="en-US" dirty="0"/>
-              <a:t>: O</a:t>
-            </a:r>
-            <a:r>
-              <a:rPr dirty="0"/>
-              <a:t>verlay network with caches </a:t>
-            </a:r>
-            <a:r>
-              <a:rPr lang="en-US" dirty="0"/>
-              <a:t>distributed globally</a:t>
+              <a:t>N</a:t>
+            </a:r>
+            <a:r>
+              <a:rPr dirty="0"/>
+              <a:t>ames any resource on the Internet</a:t>
+            </a:r>
+          </a:p>
+          <a:p>
+            <a:pPr lvl="1"/>
+            <a:r>
+              <a:rPr dirty="0"/>
+              <a:t>Format: scheme + scheme-specific part</a:t>
+            </a:r>
+          </a:p>
+          <a:p>
+            <a:r>
+              <a:rPr dirty="0"/>
+              <a:t>URL: </a:t>
+            </a:r>
+            <a:r>
+              <a:rPr lang="en-US" dirty="0"/>
+              <a:t>Uniform Resource Locator</a:t>
+            </a:r>
+          </a:p>
+          <a:p>
+            <a:pPr lvl="1"/>
+            <a:r>
+              <a:rPr dirty="0"/>
+              <a:t>URI that also locates the resource</a:t>
+            </a:r>
+          </a:p>
+          <a:p>
+            <a:pPr lvl="1"/>
+            <a:r>
+              <a:rPr sz="2300" dirty="0">
+                <a:latin typeface="Lucida Sans" panose="020B0602030504020204" pitchFamily="34" charset="77"/>
+              </a:rPr>
+              <a:t>https://</a:t>
+            </a:r>
+            <a:r>
+              <a:rPr sz="2300" dirty="0" err="1">
+                <a:latin typeface="Lucida Sans" panose="020B0602030504020204" pitchFamily="34" charset="77"/>
+              </a:rPr>
+              <a:t>book.systemsapproach.org</a:t>
+            </a:r>
+            <a:r>
+              <a:rPr sz="2300" dirty="0">
+                <a:latin typeface="Lucida Sans" panose="020B0602030504020204" pitchFamily="34" charset="77"/>
+              </a:rPr>
+              <a:t>/</a:t>
+            </a:r>
+            <a:r>
+              <a:rPr sz="2300" dirty="0" err="1">
+                <a:latin typeface="Lucida Sans" panose="020B0602030504020204" pitchFamily="34" charset="77"/>
+              </a:rPr>
+              <a:t>index.html</a:t>
+            </a:r>
+            <a:r>
+              <a:rPr lang="en-US" sz="2300" dirty="0">
+                <a:latin typeface="Lucida Sans" panose="020B0602030504020204" pitchFamily="34" charset="77"/>
+              </a:rPr>
+              <a:t> </a:t>
+            </a:r>
+            <a:r>
+              <a:rPr sz="2300" dirty="0">
+                <a:latin typeface="Lucida Sans" panose="020B0602030504020204" pitchFamily="34" charset="77"/>
+              </a:rPr>
+              <a:t> </a:t>
+            </a:r>
+            <a:r>
+              <a:rPr lang="en-US" dirty="0"/>
+              <a:t>(</a:t>
+            </a:r>
+            <a:r>
+              <a:rPr dirty="0"/>
+              <a:t>the familiar form</a:t>
+            </a:r>
+            <a:r>
+              <a:rPr lang="en-US" dirty="0"/>
+              <a:t>)</a:t>
             </a:r>
             <a:endParaRPr dirty="0"/>
           </a:p>
           <a:p>
             <a:r>
               <a:rPr dirty="0"/>
-              <a:t>HTTP explicitly supports caching</a:t>
-            </a:r>
-          </a:p>
-          <a:p>
-            <a:pPr lvl="1"/>
-            <a:r>
-              <a:rPr dirty="0"/>
-              <a:t>Expires </a:t>
-            </a:r>
-            <a:r>
-              <a:rPr lang="en-US" dirty="0"/>
-              <a:t>H</a:t>
-            </a:r>
-            <a:r>
-              <a:rPr dirty="0"/>
-              <a:t>eader: cache valid until this time</a:t>
-            </a:r>
-          </a:p>
-          <a:p>
-            <a:pPr lvl="1"/>
-            <a:r>
-              <a:rPr dirty="0"/>
-              <a:t>Conditional GET: server returns page only if modified since last fetch</a:t>
-            </a:r>
-          </a:p>
-          <a:p>
-            <a:r>
-              <a:rPr dirty="0"/>
-              <a:t>302 Redirect</a:t>
-            </a:r>
-            <a:endParaRPr lang="en-US" dirty="0"/>
-          </a:p>
-          <a:p>
-            <a:pPr lvl="1"/>
-            <a:r>
-              <a:rPr lang="en-US" dirty="0"/>
-              <a:t>R</a:t>
-            </a:r>
-            <a:r>
-              <a:rPr dirty="0"/>
-              <a:t>outes clients to nearest cache — </a:t>
-            </a:r>
-            <a:r>
-              <a:rPr lang="en-US" dirty="0"/>
-              <a:t>intrinsic part of a</a:t>
-            </a:r>
-            <a:r>
-              <a:rPr dirty="0"/>
-              <a:t> CDN </a:t>
-            </a:r>
-            <a:r>
-              <a:rPr lang="en-US" dirty="0"/>
-              <a:t>(Chapter 16)</a:t>
+              <a:t>URN: </a:t>
+            </a:r>
+            <a:r>
+              <a:rPr lang="en-US" dirty="0"/>
+              <a:t>Uniform Resource Name</a:t>
+            </a:r>
+          </a:p>
+          <a:p>
+            <a:pPr lvl="1"/>
+            <a:r>
+              <a:rPr dirty="0"/>
+              <a:t>URI that gives a persistent name without implying a location</a:t>
+            </a:r>
+          </a:p>
+          <a:p>
+            <a:pPr lvl="1"/>
+            <a:r>
+              <a:rPr sz="2300" dirty="0">
+                <a:latin typeface="Lucida Sans" panose="020B0602030504020204" pitchFamily="34" charset="77"/>
+              </a:rPr>
+              <a:t>doi:10.17487/RFC0791 </a:t>
+            </a:r>
+            <a:r>
+              <a:rPr lang="en-US" dirty="0">
+                <a:sym typeface="Wingdings" pitchFamily="2" charset="2"/>
+              </a:rPr>
+              <a:t>(</a:t>
+            </a:r>
+            <a:r>
+              <a:rPr dirty="0"/>
+              <a:t>identifies RFC 791 regardless of where it's hosted</a:t>
+            </a:r>
+            <a:r>
+              <a:rPr lang="en-US" dirty="0"/>
+              <a:t>)</a:t>
             </a:r>
             <a:endParaRPr dirty="0"/>
           </a:p>
@@ -2924,7 +3113,7 @@
           <p:cNvPr id="4" name="Footer Placeholder 3">
             <a:extLst>
               <a:ext uri="{FF2B5EF4-FFF2-40B4-BE49-F238E27FC236}">
-                <a16:creationId xmlns:a16="http://schemas.microsoft.com/office/drawing/2014/main" id="{800BB0AF-55DD-655E-50DA-890BC852E19C}"/>
+                <a16:creationId xmlns:a16="http://schemas.microsoft.com/office/drawing/2014/main" id="{394A3A1A-2E1A-4E86-A5F3-0CAED44B30D9}"/>
               </a:ext>
             </a:extLst>
           </p:cNvPr>
@@ -2952,7 +3141,7 @@
           <p:cNvPr id="5" name="Slide Number Placeholder 4">
             <a:extLst>
               <a:ext uri="{FF2B5EF4-FFF2-40B4-BE49-F238E27FC236}">
-                <a16:creationId xmlns:a16="http://schemas.microsoft.com/office/drawing/2014/main" id="{31C29CD0-C9BD-2C0E-37C5-8115429DBD09}"/>
+                <a16:creationId xmlns:a16="http://schemas.microsoft.com/office/drawing/2014/main" id="{BF0BD709-3342-6F96-18DD-FBCA4E446E5A}"/>
               </a:ext>
             </a:extLst>
           </p:cNvPr>
@@ -3018,8 +3207,13 @@
           <a:p>
             <a:r>
               <a:rPr dirty="0"/>
-              <a:t>RESTful API</a:t>
-            </a:r>
+              <a:t>Caching</a:t>
+            </a:r>
+            <a:r>
+              <a:rPr lang="en-US" dirty="0"/>
+              <a:t> Infrastructure</a:t>
+            </a:r>
+            <a:endParaRPr dirty="0"/>
           </a:p>
         </p:txBody>
       </p:sp>
@@ -3035,39 +3229,74 @@
         </p:nvSpPr>
         <p:spPr>
           <a:xfrm>
-            <a:off x="838200" y="1460089"/>
-            <a:ext cx="10515600" cy="4632238"/>
+            <a:off x="838200" y="1548225"/>
+            <a:ext cx="10515600" cy="4709356"/>
           </a:xfrm>
         </p:spPr>
         <p:txBody>
           <a:bodyPr>
-            <a:normAutofit/>
+            <a:normAutofit fontScale="92500" lnSpcReduction="10000"/>
           </a:bodyPr>
           <a:lstStyle/>
           <a:p>
             <a:r>
-              <a:rPr dirty="0" err="1"/>
+              <a:rPr lang="en-US" dirty="0"/>
+              <a:t>Two Benefits</a:t>
+            </a:r>
+          </a:p>
+          <a:p>
+            <a:pPr lvl="1"/>
+            <a:r>
+              <a:rPr lang="en-US" dirty="0"/>
               <a:t>R</a:t>
             </a:r>
             <a:r>
-              <a:rPr lang="en-US" dirty="0" err="1"/>
-              <a:t>e</a:t>
-            </a:r>
-            <a:r>
-              <a:rPr dirty="0" err="1"/>
-              <a:t>ST</a:t>
-            </a:r>
-            <a:r>
-              <a:rPr dirty="0"/>
-              <a:t>: </a:t>
-            </a:r>
-            <a:r>
-              <a:rPr lang="en-US" dirty="0"/>
-              <a:t>A</a:t>
-            </a:r>
-            <a:r>
-              <a:rPr dirty="0"/>
-              <a:t>rchitectural style underlying the Web</a:t>
+              <a:rPr dirty="0"/>
+              <a:t>educes </a:t>
+            </a:r>
+            <a:r>
+              <a:rPr lang="en-US" dirty="0"/>
+              <a:t>response time</a:t>
+            </a:r>
+          </a:p>
+          <a:p>
+            <a:pPr lvl="1"/>
+            <a:r>
+              <a:rPr lang="en-US" dirty="0"/>
+              <a:t>Reduces </a:t>
+            </a:r>
+            <a:r>
+              <a:rPr dirty="0"/>
+              <a:t>server load</a:t>
+            </a:r>
+          </a:p>
+          <a:p>
+            <a:r>
+              <a:rPr dirty="0"/>
+              <a:t>Where </a:t>
+            </a:r>
+            <a:r>
+              <a:rPr lang="en-US" dirty="0"/>
+              <a:t>do </a:t>
+            </a:r>
+            <a:r>
+              <a:rPr dirty="0"/>
+              <a:t>caches live</a:t>
+            </a:r>
+            <a:r>
+              <a:rPr lang="en-US" dirty="0"/>
+              <a:t>?</a:t>
+            </a:r>
+          </a:p>
+          <a:p>
+            <a:pPr lvl="1"/>
+            <a:r>
+              <a:rPr lang="en-US" dirty="0"/>
+              <a:t>B</a:t>
+            </a:r>
+            <a:r>
+              <a:rPr dirty="0"/>
+              <a:t>rowser</a:t>
             </a:r>
             <a:endParaRPr lang="en-US" dirty="0"/>
           </a:p>
@@ -3075,68 +3304,73 @@
             <a:pPr lvl="1"/>
             <a:r>
               <a:rPr lang="en-US" dirty="0"/>
-              <a:t>Representable State Transfer (Fielding, 2000)</a:t>
+              <a:t>S</a:t>
+            </a:r>
+            <a:r>
+              <a:rPr dirty="0"/>
+              <a:t>ite </a:t>
+            </a:r>
+            <a:r>
+              <a:rPr lang="en-US" dirty="0"/>
+              <a:t>P</a:t>
+            </a:r>
+            <a:r>
+              <a:rPr dirty="0"/>
+              <a:t>roxy</a:t>
+            </a:r>
+          </a:p>
+          <a:p>
+            <a:pPr lvl="1"/>
+            <a:r>
+              <a:rPr dirty="0"/>
+              <a:t>CDNs</a:t>
+            </a:r>
+            <a:r>
+              <a:rPr lang="en-US" dirty="0"/>
+              <a:t>: O</a:t>
+            </a:r>
+            <a:r>
+              <a:rPr dirty="0"/>
+              <a:t>verlay network with caches </a:t>
+            </a:r>
+            <a:r>
+              <a:rPr lang="en-US" dirty="0"/>
+              <a:t>distributed globally</a:t>
             </a:r>
             <a:endParaRPr dirty="0"/>
           </a:p>
           <a:p>
             <a:r>
               <a:rPr dirty="0"/>
-              <a:t>Everything is a resource, identified by a URI</a:t>
-            </a:r>
-          </a:p>
-          <a:p>
-            <a:r>
-              <a:rPr dirty="0"/>
-              <a:t>HTTP methods </a:t>
-            </a:r>
-            <a:r>
-              <a:rPr lang="en-US" dirty="0"/>
-              <a:t>parallel Object Oriented Programming</a:t>
-            </a:r>
-          </a:p>
-          <a:p>
-            <a:pPr lvl="1"/>
-            <a:r>
-              <a:rPr dirty="0"/>
-              <a:t>CRUD: </a:t>
-            </a:r>
-            <a:r>
-              <a:rPr lang="en-US" dirty="0"/>
-              <a:t>Create, Read, Update, Delete</a:t>
-            </a:r>
-          </a:p>
-          <a:p>
-            <a:pPr lvl="1"/>
-            <a:r>
-              <a:rPr lang="en-US" dirty="0"/>
-              <a:t>HTTP: </a:t>
-            </a:r>
-            <a:r>
-              <a:rPr dirty="0"/>
-              <a:t>POST</a:t>
-            </a:r>
-            <a:r>
-              <a:rPr lang="en-US" dirty="0"/>
-              <a:t>, GET,</a:t>
-            </a:r>
-            <a:r>
-              <a:rPr dirty="0"/>
-              <a:t> PUT</a:t>
-            </a:r>
-            <a:r>
-              <a:rPr lang="en-US" dirty="0"/>
-              <a:t>,</a:t>
-            </a:r>
-            <a:r>
-              <a:rPr dirty="0"/>
-              <a:t> DELETE</a:t>
-            </a:r>
-          </a:p>
-          <a:p>
-            <a:r>
-              <a:rPr dirty="0"/>
-              <a:t>Payload carries state representation</a:t>
+              <a:t>HTTP explicitly supports caching</a:t>
+            </a:r>
+          </a:p>
+          <a:p>
+            <a:pPr lvl="1"/>
+            <a:r>
+              <a:rPr dirty="0"/>
+              <a:t>Expires </a:t>
+            </a:r>
+            <a:r>
+              <a:rPr lang="en-US" dirty="0"/>
+              <a:t>H</a:t>
+            </a:r>
+            <a:r>
+              <a:rPr dirty="0"/>
+              <a:t>eader: cache valid until this time</a:t>
+            </a:r>
+          </a:p>
+          <a:p>
+            <a:pPr lvl="1"/>
+            <a:r>
+              <a:rPr dirty="0"/>
+              <a:t>Conditional GET: server returns page only if modified since last fetch</a:t>
+            </a:r>
+          </a:p>
+          <a:p>
+            <a:r>
+              <a:rPr dirty="0"/>
+              <a:t>302 Redirect</a:t>
             </a:r>
             <a:endParaRPr lang="en-US" dirty="0"/>
           </a:p>
@@ -3144,46 +3378,25 @@
             <a:pPr lvl="1"/>
             <a:r>
               <a:rPr lang="en-US" dirty="0"/>
-              <a:t>e.g., </a:t>
-            </a:r>
-            <a:r>
-              <a:rPr dirty="0"/>
-              <a:t>JSON</a:t>
-            </a:r>
-            <a:r>
-              <a:rPr lang="en-US" dirty="0"/>
-              <a:t>, </a:t>
-            </a:r>
-            <a:r>
-              <a:rPr dirty="0"/>
-              <a:t>XML</a:t>
-            </a:r>
-          </a:p>
-          <a:p>
-            <a:r>
-              <a:rPr dirty="0"/>
-              <a:t>Reuses web infrastructure</a:t>
-            </a:r>
-            <a:endParaRPr lang="en-US" dirty="0"/>
-          </a:p>
-          <a:p>
-            <a:pPr lvl="1"/>
-            <a:r>
-              <a:rPr lang="en-US" dirty="0"/>
-              <a:t>P</a:t>
-            </a:r>
-            <a:r>
-              <a:rPr dirty="0"/>
-              <a:t>roxies, CDNs, </a:t>
-            </a:r>
-            <a:r>
-              <a:rPr lang="en-US" dirty="0"/>
-              <a:t>and C</a:t>
-            </a:r>
-            <a:r>
-              <a:rPr dirty="0"/>
-              <a:t>aches work automatically</a:t>
-            </a:r>
+              <a:t>R</a:t>
+            </a:r>
+            <a:r>
+              <a:rPr dirty="0"/>
+              <a:t>outes clients to nearest cache — </a:t>
+            </a:r>
+            <a:r>
+              <a:rPr lang="en-US" dirty="0"/>
+              <a:t>intrinsic part of a</a:t>
+            </a:r>
+            <a:r>
+              <a:rPr dirty="0"/>
+              <a:t> CDN </a:t>
+            </a:r>
+            <a:r>
+              <a:rPr lang="en-US" dirty="0"/>
+              <a:t>(Chapter 16)</a:t>
+            </a:r>
+            <a:endParaRPr dirty="0"/>
           </a:p>
         </p:txBody>
       </p:sp>
@@ -3192,7 +3405,7 @@
           <p:cNvPr id="4" name="Footer Placeholder 3">
             <a:extLst>
               <a:ext uri="{FF2B5EF4-FFF2-40B4-BE49-F238E27FC236}">
-                <a16:creationId xmlns:a16="http://schemas.microsoft.com/office/drawing/2014/main" id="{74791E5B-EEDF-DE51-EE93-430760129DA6}"/>
+                <a16:creationId xmlns:a16="http://schemas.microsoft.com/office/drawing/2014/main" id="{800BB0AF-55DD-655E-50DA-890BC852E19C}"/>
               </a:ext>
             </a:extLst>
           </p:cNvPr>
@@ -3220,7 +3433,7 @@
           <p:cNvPr id="5" name="Slide Number Placeholder 4">
             <a:extLst>
               <a:ext uri="{FF2B5EF4-FFF2-40B4-BE49-F238E27FC236}">
-                <a16:creationId xmlns:a16="http://schemas.microsoft.com/office/drawing/2014/main" id="{9C8110E5-DF96-3A68-F84A-84BF8ED96423}"/>
+                <a16:creationId xmlns:a16="http://schemas.microsoft.com/office/drawing/2014/main" id="{31C29CD0-C9BD-2C0E-37C5-8115429DBD09}"/>
               </a:ext>
             </a:extLst>
           </p:cNvPr>
@@ -3286,13 +3499,8 @@
           <a:p>
             <a:r>
               <a:rPr dirty="0"/>
-              <a:t>E</a:t>
-            </a:r>
-            <a:r>
-              <a:rPr lang="en-US" dirty="0"/>
-              <a:t>lectronic Mail</a:t>
-            </a:r>
-            <a:endParaRPr dirty="0"/>
+              <a:t>RESTful API</a:t>
+            </a:r>
           </a:p>
         </p:txBody>
       </p:sp>
@@ -3308,156 +3516,16 @@
         </p:nvSpPr>
         <p:spPr>
           <a:xfrm>
-            <a:off x="838080" y="1476360"/>
-            <a:ext cx="5181480" cy="4615968"/>
+            <a:off x="838200" y="1460089"/>
+            <a:ext cx="10515600" cy="4632238"/>
           </a:xfrm>
         </p:spPr>
         <p:txBody>
           <a:bodyPr>
-            <a:normAutofit fontScale="92500" lnSpcReduction="10000"/>
+            <a:normAutofit/>
           </a:bodyPr>
           <a:lstStyle/>
           <a:p>
-            <a:r>
-              <a:rPr dirty="0"/>
-              <a:t>Email</a:t>
-            </a:r>
-            <a:endParaRPr lang="en-US" dirty="0"/>
-          </a:p>
-          <a:p>
-            <a:pPr lvl="1"/>
-            <a:r>
-              <a:rPr dirty="0"/>
-              <a:t>Internet's original killer app</a:t>
-            </a:r>
-            <a:endParaRPr lang="en-US" dirty="0"/>
-          </a:p>
-          <a:p>
-            <a:pPr lvl="1"/>
-            <a:r>
-              <a:rPr lang="en-US" dirty="0"/>
-              <a:t>Example of</a:t>
-            </a:r>
-            <a:r>
-              <a:rPr dirty="0"/>
-              <a:t> pre-web design</a:t>
-            </a:r>
-          </a:p>
-          <a:p>
-            <a:r>
-              <a:rPr lang="en-US" dirty="0"/>
-              <a:t>M</a:t>
-            </a:r>
-            <a:r>
-              <a:rPr dirty="0"/>
-              <a:t>ailbox</a:t>
-            </a:r>
-            <a:r>
-              <a:rPr lang="en-US" dirty="0"/>
-              <a:t> Abstraction</a:t>
-            </a:r>
-          </a:p>
-          <a:p>
-            <a:pPr lvl="1"/>
-            <a:r>
-              <a:rPr lang="en-US" dirty="0"/>
-              <a:t>R</a:t>
-            </a:r>
-            <a:r>
-              <a:rPr dirty="0"/>
-              <a:t>endezvous point for messages</a:t>
-            </a:r>
-          </a:p>
-          <a:p>
-            <a:r>
-              <a:rPr dirty="0"/>
-              <a:t>SMTP</a:t>
-            </a:r>
-            <a:endParaRPr lang="en-US" dirty="0"/>
-          </a:p>
-          <a:p>
-            <a:pPr lvl="1"/>
-            <a:r>
-              <a:rPr lang="en-US" dirty="0"/>
-              <a:t>S</a:t>
-            </a:r>
-            <a:r>
-              <a:rPr dirty="0"/>
-              <a:t>end mail to a mailbox</a:t>
-            </a:r>
-            <a:endParaRPr lang="en-US" dirty="0"/>
-          </a:p>
-          <a:p>
-            <a:pPr lvl="1"/>
-            <a:r>
-              <a:rPr lang="en-US" dirty="0"/>
-              <a:t>S</a:t>
-            </a:r>
-            <a:r>
-              <a:rPr dirty="0"/>
-              <a:t>tore-and-forward</a:t>
-            </a:r>
-            <a:r>
-              <a:rPr lang="en-US" dirty="0"/>
-              <a:t> via </a:t>
-            </a:r>
-            <a:r>
-              <a:rPr dirty="0"/>
-              <a:t>MTA</a:t>
-            </a:r>
-            <a:r>
-              <a:rPr lang="en-US" dirty="0"/>
-              <a:t>s</a:t>
-            </a:r>
-            <a:endParaRPr dirty="0"/>
-          </a:p>
-          <a:p>
-            <a:r>
-              <a:rPr dirty="0"/>
-              <a:t>IMAP / POP</a:t>
-            </a:r>
-            <a:endParaRPr lang="en-US" dirty="0"/>
-          </a:p>
-          <a:p>
-            <a:pPr lvl="1"/>
-            <a:r>
-              <a:rPr lang="en-US" dirty="0"/>
-              <a:t>R</a:t>
-            </a:r>
-            <a:r>
-              <a:rPr dirty="0"/>
-              <a:t>etrieve mail from a mailbox</a:t>
-            </a:r>
-          </a:p>
-          <a:p>
-            <a:r>
-              <a:rPr dirty="0"/>
-              <a:t>Modern </a:t>
-            </a:r>
-            <a:r>
-              <a:rPr lang="en-US" dirty="0"/>
-              <a:t>W</a:t>
-            </a:r>
-            <a:r>
-              <a:rPr dirty="0"/>
-              <a:t>eb </a:t>
-            </a:r>
-            <a:r>
-              <a:rPr lang="en-US" dirty="0"/>
-              <a:t>M</a:t>
-            </a:r>
-            <a:r>
-              <a:rPr dirty="0"/>
-              <a:t>ail (e.g., Gmail)</a:t>
-            </a:r>
-            <a:endParaRPr lang="en-US" dirty="0"/>
-          </a:p>
-          <a:p>
-            <a:pPr lvl="1"/>
-            <a:r>
-              <a:rPr dirty="0"/>
-              <a:t> HTTPS/</a:t>
-            </a:r>
             <a:r>
               <a:rPr dirty="0" err="1"/>
               <a:t>R</a:t>
@@ -3472,41 +3540,140 @@
             </a:r>
             <a:r>
               <a:rPr dirty="0"/>
-              <a:t> replaces IMAP</a:t>
-            </a:r>
-          </a:p>
-        </p:txBody>
-      </p:sp>
-      <p:pic>
-        <p:nvPicPr>
-          <p:cNvPr id="4" name="Picture 3" descr="smtp.png"/>
-          <p:cNvPicPr>
-            <a:picLocks noChangeAspect="1"/>
-          </p:cNvPicPr>
-          <p:nvPr/>
-        </p:nvPicPr>
-        <p:blipFill>
-          <a:blip r:embed="rId2"/>
-          <a:stretch>
-            <a:fillRect/>
-          </a:stretch>
-        </p:blipFill>
-        <p:spPr>
-          <a:xfrm>
-            <a:off x="5433889" y="2181340"/>
-            <a:ext cx="6392003" cy="2473016"/>
-          </a:xfrm>
-          <a:prstGeom prst="rect">
-            <a:avLst/>
-          </a:prstGeom>
-        </p:spPr>
-      </p:pic>
-      <p:sp>
-        <p:nvSpPr>
-          <p:cNvPr id="5" name="Footer Placeholder 4">
+              <a:t>: </a:t>
+            </a:r>
+            <a:r>
+              <a:rPr lang="en-US" dirty="0"/>
+              <a:t>A</a:t>
+            </a:r>
+            <a:r>
+              <a:rPr dirty="0"/>
+              <a:t>rchitectural style underlying the Web</a:t>
+            </a:r>
+            <a:endParaRPr lang="en-US" dirty="0"/>
+          </a:p>
+          <a:p>
+            <a:pPr lvl="1"/>
+            <a:r>
+              <a:rPr lang="en-US" dirty="0"/>
+              <a:t>Representable State Transfer (Fielding, 2000)</a:t>
+            </a:r>
+            <a:endParaRPr dirty="0"/>
+          </a:p>
+          <a:p>
+            <a:r>
+              <a:rPr dirty="0"/>
+              <a:t>Everything is a resource, identified by a URI</a:t>
+            </a:r>
+          </a:p>
+          <a:p>
+            <a:r>
+              <a:rPr dirty="0"/>
+              <a:t>HTTP methods </a:t>
+            </a:r>
+            <a:r>
+              <a:rPr lang="en-US" dirty="0"/>
+              <a:t>parallel Object Oriented Programming</a:t>
+            </a:r>
+          </a:p>
+          <a:p>
+            <a:pPr lvl="1"/>
+            <a:r>
+              <a:rPr dirty="0"/>
+              <a:t>CRUD: </a:t>
+            </a:r>
+            <a:r>
+              <a:rPr lang="en-US" dirty="0"/>
+              <a:t>Create, Read, Update, Delete</a:t>
+            </a:r>
+          </a:p>
+          <a:p>
+            <a:pPr lvl="1"/>
+            <a:r>
+              <a:rPr lang="en-US" dirty="0"/>
+              <a:t>HTTP: </a:t>
+            </a:r>
+            <a:r>
+              <a:rPr dirty="0"/>
+              <a:t>POST</a:t>
+            </a:r>
+            <a:r>
+              <a:rPr lang="en-US" dirty="0"/>
+              <a:t>, GET,</a:t>
+            </a:r>
+            <a:r>
+              <a:rPr dirty="0"/>
+              <a:t> PUT</a:t>
+            </a:r>
+            <a:r>
+              <a:rPr lang="en-US" dirty="0"/>
+              <a:t>,</a:t>
+            </a:r>
+            <a:r>
+              <a:rPr dirty="0"/>
+              <a:t> DELETE</a:t>
+            </a:r>
+          </a:p>
+          <a:p>
+            <a:r>
+              <a:rPr dirty="0"/>
+              <a:t>Payload carries state representation</a:t>
+            </a:r>
+            <a:endParaRPr lang="en-US" dirty="0"/>
+          </a:p>
+          <a:p>
+            <a:pPr lvl="1"/>
+            <a:r>
+              <a:rPr lang="en-US" dirty="0"/>
+              <a:t>e.g., </a:t>
+            </a:r>
+            <a:r>
+              <a:rPr dirty="0"/>
+              <a:t>JSON</a:t>
+            </a:r>
+            <a:r>
+              <a:rPr lang="en-US" dirty="0"/>
+              <a:t>, </a:t>
+            </a:r>
+            <a:r>
+              <a:rPr dirty="0"/>
+              <a:t>XML</a:t>
+            </a:r>
+          </a:p>
+          <a:p>
+            <a:r>
+              <a:rPr dirty="0"/>
+              <a:t>Reuses web infrastructure</a:t>
+            </a:r>
+            <a:endParaRPr lang="en-US" dirty="0"/>
+          </a:p>
+          <a:p>
+            <a:pPr lvl="1"/>
+            <a:r>
+              <a:rPr lang="en-US" dirty="0"/>
+              <a:t>P</a:t>
+            </a:r>
+            <a:r>
+              <a:rPr dirty="0"/>
+              <a:t>roxies, CDNs, </a:t>
+            </a:r>
+            <a:r>
+              <a:rPr lang="en-US" dirty="0"/>
+              <a:t>and C</a:t>
+            </a:r>
+            <a:r>
+              <a:rPr dirty="0"/>
+              <a:t>aches work automatically</a:t>
+            </a:r>
+          </a:p>
+        </p:txBody>
+      </p:sp>
+      <p:sp>
+        <p:nvSpPr>
+          <p:cNvPr id="4" name="Footer Placeholder 3">
             <a:extLst>
               <a:ext uri="{FF2B5EF4-FFF2-40B4-BE49-F238E27FC236}">
-                <a16:creationId xmlns:a16="http://schemas.microsoft.com/office/drawing/2014/main" id="{B21C68C8-EE6E-FC47-B1FB-BEDCC8F11676}"/>
+                <a16:creationId xmlns:a16="http://schemas.microsoft.com/office/drawing/2014/main" id="{74791E5B-EEDF-DE51-EE93-430760129DA6}"/>
               </a:ext>
             </a:extLst>
           </p:cNvPr>
@@ -3531,10 +3698,10 @@
       </p:sp>
       <p:sp>
         <p:nvSpPr>
-          <p:cNvPr id="6" name="Slide Number Placeholder 5">
+          <p:cNvPr id="5" name="Slide Number Placeholder 4">
             <a:extLst>
               <a:ext uri="{FF2B5EF4-FFF2-40B4-BE49-F238E27FC236}">
-                <a16:creationId xmlns:a16="http://schemas.microsoft.com/office/drawing/2014/main" id="{154B4D6F-69FE-79FB-E337-03DC76695ABB}"/>
+                <a16:creationId xmlns:a16="http://schemas.microsoft.com/office/drawing/2014/main" id="{9C8110E5-DF96-3A68-F84A-84BF8ED96423}"/>
               </a:ext>
             </a:extLst>
           </p:cNvPr>
@@ -3585,134 +3752,10 @@
       </p:grpSpPr>
       <p:sp>
         <p:nvSpPr>
-          <p:cNvPr id="2" name="Title 1"/>
-          <p:cNvSpPr>
-            <a:spLocks noGrp="1"/>
-          </p:cNvSpPr>
-          <p:nvPr>
-            <p:ph type="title"/>
-          </p:nvPr>
-        </p:nvSpPr>
-        <p:spPr/>
-        <p:txBody>
-          <a:bodyPr/>
-          <a:lstStyle/>
-          <a:p>
-            <a:r>
-              <a:rPr dirty="0"/>
-              <a:t>Message Format</a:t>
-            </a:r>
-          </a:p>
-        </p:txBody>
-      </p:sp>
-      <p:sp>
-        <p:nvSpPr>
-          <p:cNvPr id="3" name="Content Placeholder 2"/>
-          <p:cNvSpPr>
-            <a:spLocks noGrp="1"/>
-          </p:cNvSpPr>
-          <p:nvPr>
-            <p:ph idx="1"/>
-          </p:nvPr>
-        </p:nvSpPr>
-        <p:spPr/>
-        <p:txBody>
-          <a:bodyPr/>
-          <a:lstStyle/>
-          <a:p>
-            <a:r>
-              <a:rPr dirty="0"/>
-              <a:t>RFC 822 / 5322</a:t>
-            </a:r>
-            <a:endParaRPr lang="en-US" dirty="0"/>
-          </a:p>
-          <a:p>
-            <a:pPr lvl="1"/>
-            <a:r>
-              <a:rPr lang="en-US" dirty="0"/>
-              <a:t>Header + Body (b</a:t>
-            </a:r>
-            <a:r>
-              <a:rPr dirty="0"/>
-              <a:t>oth </a:t>
-            </a:r>
-            <a:r>
-              <a:rPr lang="en-US" dirty="0"/>
-              <a:t>as</a:t>
-            </a:r>
-            <a:r>
-              <a:rPr dirty="0"/>
-              <a:t> ASCII text</a:t>
-            </a:r>
-            <a:r>
-              <a:rPr lang="en-US" dirty="0"/>
-              <a:t>)</a:t>
-            </a:r>
-            <a:endParaRPr dirty="0"/>
-          </a:p>
-          <a:p>
-            <a:pPr lvl="1"/>
-            <a:r>
-              <a:rPr dirty="0"/>
-              <a:t>Headers: To, From, Subject, Date, Received</a:t>
-            </a:r>
-          </a:p>
-          <a:p>
-            <a:r>
-              <a:rPr dirty="0"/>
-              <a:t>MIME (1992)</a:t>
-            </a:r>
-            <a:endParaRPr lang="en-US" dirty="0"/>
-          </a:p>
-          <a:p>
-            <a:pPr lvl="1"/>
-            <a:r>
-              <a:rPr lang="en-US" dirty="0"/>
-              <a:t>E</a:t>
-            </a:r>
-            <a:r>
-              <a:rPr dirty="0"/>
-              <a:t>xtends email to carry binary content</a:t>
-            </a:r>
-          </a:p>
-          <a:p>
-            <a:pPr lvl="1"/>
-            <a:r>
-              <a:rPr dirty="0"/>
-              <a:t>Content-Type declares the data type</a:t>
-            </a:r>
-            <a:endParaRPr lang="en-US" dirty="0"/>
-          </a:p>
-          <a:p>
-            <a:pPr lvl="2"/>
-            <a:r>
-              <a:rPr lang="en-US" dirty="0"/>
-              <a:t>e.g., </a:t>
-            </a:r>
-            <a:r>
-              <a:rPr dirty="0"/>
-              <a:t>image/jpeg, audio/mp3, multipart/mixed</a:t>
-            </a:r>
-          </a:p>
-          <a:p>
-            <a:pPr lvl="1"/>
-            <a:r>
-              <a:rPr lang="en-US" dirty="0"/>
-              <a:t>B</a:t>
-            </a:r>
-            <a:r>
-              <a:rPr dirty="0"/>
-              <a:t>ase64 maps binary to ASCII</a:t>
-            </a:r>
-          </a:p>
-        </p:txBody>
-      </p:sp>
-      <p:sp>
-        <p:nvSpPr>
-          <p:cNvPr id="4" name="Footer Placeholder 3">
+          <p:cNvPr id="2" name="Title 1">
             <a:extLst>
               <a:ext uri="{FF2B5EF4-FFF2-40B4-BE49-F238E27FC236}">
-                <a16:creationId xmlns:a16="http://schemas.microsoft.com/office/drawing/2014/main" id="{39F11885-A0CF-D1C9-5325-78DB6126988E}"/>
+                <a16:creationId xmlns:a16="http://schemas.microsoft.com/office/drawing/2014/main" id="{42D7A3FA-978E-2C1B-D818-5B0C82E28D93}"/>
               </a:ext>
             </a:extLst>
           </p:cNvPr>
@@ -3720,27 +3763,52 @@
             <a:spLocks noGrp="1"/>
           </p:cNvSpPr>
           <p:nvPr>
-            <p:ph type="ftr" sz="quarter" idx="11"/>
-          </p:nvPr>
-        </p:nvSpPr>
-        <p:spPr/>
-        <p:txBody>
-          <a:bodyPr/>
-          <a:lstStyle/>
-          <a:p>
-            <a:r>
-              <a:rPr lang="en-US"/>
-              <a:t>Copyright Peterson &amp; Davie, 2026</a:t>
-            </a:r>
-          </a:p>
-        </p:txBody>
-      </p:sp>
-      <p:sp>
-        <p:nvSpPr>
-          <p:cNvPr id="5" name="Slide Number Placeholder 4">
+            <p:ph type="ctrTitle"/>
+          </p:nvPr>
+        </p:nvSpPr>
+        <p:spPr/>
+        <p:txBody>
+          <a:bodyPr/>
+          <a:lstStyle/>
+          <a:p>
+            <a:r>
+              <a:rPr lang="en-US" dirty="0"/>
+              <a:t>Electronic Mail</a:t>
+            </a:r>
+          </a:p>
+        </p:txBody>
+      </p:sp>
+      <p:sp>
+        <p:nvSpPr>
+          <p:cNvPr id="3" name="Footer Placeholder 2">
             <a:extLst>
               <a:ext uri="{FF2B5EF4-FFF2-40B4-BE49-F238E27FC236}">
-                <a16:creationId xmlns:a16="http://schemas.microsoft.com/office/drawing/2014/main" id="{98923F51-9951-80DC-4DB4-F074CD623893}"/>
+                <a16:creationId xmlns:a16="http://schemas.microsoft.com/office/drawing/2014/main" id="{BEB3B289-2503-F857-5746-9E149397FA96}"/>
+              </a:ext>
+            </a:extLst>
+          </p:cNvPr>
+          <p:cNvSpPr>
+            <a:spLocks noGrp="1"/>
+          </p:cNvSpPr>
+          <p:nvPr>
+            <p:ph type="ftr" sz="quarter" idx="11"/>
+          </p:nvPr>
+        </p:nvSpPr>
+        <p:spPr/>
+        <p:txBody>
+          <a:bodyPr/>
+          <a:lstStyle/>
+          <a:p>
+            <a:endParaRPr lang="en-US"/>
+          </a:p>
+        </p:txBody>
+      </p:sp>
+      <p:sp>
+        <p:nvSpPr>
+          <p:cNvPr id="4" name="Slide Number Placeholder 3">
+            <a:extLst>
+              <a:ext uri="{FF2B5EF4-FFF2-40B4-BE49-F238E27FC236}">
+                <a16:creationId xmlns:a16="http://schemas.microsoft.com/office/drawing/2014/main" id="{C2C13BAE-F72F-AD57-448C-19F033C6CB7D}"/>
               </a:ext>
             </a:extLst>
           </p:cNvPr>
@@ -3765,6 +3833,11 @@
         </p:txBody>
       </p:sp>
     </p:spTree>
+    <p:extLst>
+      <p:ext uri="{BB962C8B-B14F-4D97-AF65-F5344CB8AC3E}">
+        <p14:creationId xmlns:p14="http://schemas.microsoft.com/office/powerpoint/2010/main" val="4066642793"/>
+      </p:ext>
+    </p:extLst>
   </p:cSld>
   <p:clrMapOvr>
     <a:masterClrMapping/>
@@ -3805,9 +3878,10 @@
           <a:lstStyle/>
           <a:p>
             <a:r>
-              <a:rPr dirty="0"/>
-              <a:t>Message Transfer</a:t>
-            </a:r>
+              <a:rPr lang="en-US" dirty="0"/>
+              <a:t>Overview</a:t>
+            </a:r>
+            <a:endParaRPr dirty="0"/>
           </a:p>
         </p:txBody>
       </p:sp>
@@ -3824,36 +3898,26 @@
         <p:spPr>
           <a:xfrm>
             <a:off x="838080" y="1476360"/>
-            <a:ext cx="5181480" cy="3679534"/>
+            <a:ext cx="5181480" cy="4615968"/>
           </a:xfrm>
         </p:spPr>
         <p:txBody>
           <a:bodyPr>
-            <a:normAutofit lnSpcReduction="10000"/>
+            <a:normAutofit fontScale="92500" lnSpcReduction="10000"/>
           </a:bodyPr>
           <a:lstStyle/>
           <a:p>
             <a:r>
               <a:rPr dirty="0"/>
-              <a:t>MTA (Message Transfer Agent)</a:t>
+              <a:t>Email</a:t>
             </a:r>
             <a:endParaRPr lang="en-US" dirty="0"/>
           </a:p>
           <a:p>
             <a:pPr lvl="1"/>
             <a:r>
-              <a:rPr lang="en-US" dirty="0"/>
-              <a:t>B</a:t>
-            </a:r>
-            <a:r>
-              <a:rPr dirty="0"/>
-              <a:t>oth client and server sides</a:t>
-            </a:r>
-          </a:p>
-          <a:p>
-            <a:r>
-              <a:rPr dirty="0"/>
-              <a:t>Store-and-forward</a:t>
+              <a:rPr dirty="0"/>
+              <a:t>Internet's original killer app</a:t>
             </a:r>
             <a:endParaRPr lang="en-US" dirty="0"/>
           </a:p>
@@ -3861,11 +3925,42 @@
             <a:pPr lvl="1"/>
             <a:r>
               <a:rPr lang="en-US" dirty="0"/>
-              <a:t>E</a:t>
-            </a:r>
-            <a:r>
-              <a:rPr dirty="0"/>
-              <a:t>ach MTA buffers to disk</a:t>
+              <a:t>Example of</a:t>
+            </a:r>
+            <a:r>
+              <a:rPr dirty="0"/>
+              <a:t> pre-web design</a:t>
+            </a:r>
+          </a:p>
+          <a:p>
+            <a:r>
+              <a:rPr lang="en-US" dirty="0"/>
+              <a:t>M</a:t>
+            </a:r>
+            <a:r>
+              <a:rPr dirty="0"/>
+              <a:t>ailbox</a:t>
+            </a:r>
+            <a:r>
+              <a:rPr lang="en-US" dirty="0"/>
+              <a:t> Abstraction</a:t>
+            </a:r>
+          </a:p>
+          <a:p>
+            <a:pPr lvl="1"/>
+            <a:r>
+              <a:rPr lang="en-US" dirty="0"/>
+              <a:t>R</a:t>
+            </a:r>
+            <a:r>
+              <a:rPr dirty="0"/>
+              <a:t>endezvous point for messages</a:t>
+            </a:r>
+          </a:p>
+          <a:p>
+            <a:r>
+              <a:rPr dirty="0"/>
+              <a:t>SMTP</a:t>
             </a:r>
             <a:endParaRPr lang="en-US" dirty="0"/>
           </a:p>
@@ -3873,181 +3968,134 @@
             <a:pPr lvl="1"/>
             <a:r>
               <a:rPr lang="en-US" dirty="0"/>
+              <a:t>S</a:t>
+            </a:r>
+            <a:r>
+              <a:rPr dirty="0"/>
+              <a:t>end mail to a mailbox</a:t>
+            </a:r>
+            <a:endParaRPr lang="en-US" dirty="0"/>
+          </a:p>
+          <a:p>
+            <a:pPr lvl="1"/>
+            <a:r>
+              <a:rPr lang="en-US" dirty="0"/>
+              <a:t>S</a:t>
+            </a:r>
+            <a:r>
+              <a:rPr dirty="0"/>
+              <a:t>tore-and-forward</a:t>
+            </a:r>
+            <a:r>
+              <a:rPr lang="en-US" dirty="0"/>
+              <a:t> via </a:t>
+            </a:r>
+            <a:r>
+              <a:rPr dirty="0"/>
+              <a:t>MTA</a:t>
+            </a:r>
+            <a:r>
+              <a:rPr lang="en-US" dirty="0"/>
+              <a:t>s</a:t>
+            </a:r>
+            <a:endParaRPr dirty="0"/>
+          </a:p>
+          <a:p>
+            <a:r>
+              <a:rPr dirty="0"/>
+              <a:t>IMAP / POP</a:t>
+            </a:r>
+            <a:endParaRPr lang="en-US" dirty="0"/>
+          </a:p>
+          <a:p>
+            <a:pPr lvl="1"/>
+            <a:r>
+              <a:rPr lang="en-US" dirty="0"/>
               <a:t>R</a:t>
             </a:r>
             <a:r>
               <a:rPr dirty="0"/>
-              <a:t>etries for days if needed</a:t>
+              <a:t>etrieve mail from a mailbox</a:t>
+            </a:r>
+          </a:p>
+          <a:p>
+            <a:r>
+              <a:rPr dirty="0"/>
+              <a:t>Modern </a:t>
+            </a:r>
+            <a:r>
+              <a:rPr lang="en-US" dirty="0"/>
+              <a:t>W</a:t>
+            </a:r>
+            <a:r>
+              <a:rPr dirty="0"/>
+              <a:t>eb </a:t>
+            </a:r>
+            <a:r>
+              <a:rPr lang="en-US" dirty="0"/>
+              <a:t>M</a:t>
+            </a:r>
+            <a:r>
+              <a:rPr dirty="0"/>
+              <a:t>ail (e.g., Gmail)</a:t>
             </a:r>
             <a:endParaRPr lang="en-US" dirty="0"/>
           </a:p>
           <a:p>
             <a:pPr lvl="1"/>
             <a:r>
-              <a:rPr lang="en-US" dirty="0"/>
-              <a:t>Hides organization internals</a:t>
-            </a:r>
-            <a:endParaRPr dirty="0"/>
-          </a:p>
-          <a:p>
-            <a:r>
-              <a:rPr lang="en-US" dirty="0"/>
-              <a:t>SMTP defines the Protocol</a:t>
-            </a:r>
-          </a:p>
-          <a:p>
-            <a:pPr lvl="1"/>
-            <a:r>
-              <a:rPr dirty="0"/>
-              <a:t>ASCII command/response dialog</a:t>
-            </a:r>
-            <a:endParaRPr lang="en-US" dirty="0"/>
-          </a:p>
-          <a:p>
-            <a:pPr lvl="1"/>
-            <a:r>
-              <a:rPr lang="en-US" dirty="0"/>
-              <a:t>Influenced HTTP’s design</a:t>
-            </a:r>
-          </a:p>
-          <a:p>
-            <a:endParaRPr dirty="0"/>
-          </a:p>
-        </p:txBody>
-      </p:sp>
-      <p:sp>
-        <p:nvSpPr>
-          <p:cNvPr id="4" name="TextBox 3"/>
-          <p:cNvSpPr txBox="1"/>
+              <a:rPr dirty="0"/>
+              <a:t> HTTPS/</a:t>
+            </a:r>
+            <a:r>
+              <a:rPr dirty="0" err="1"/>
+              <a:t>R</a:t>
+            </a:r>
+            <a:r>
+              <a:rPr lang="en-US" dirty="0" err="1"/>
+              <a:t>e</a:t>
+            </a:r>
+            <a:r>
+              <a:rPr dirty="0" err="1"/>
+              <a:t>ST</a:t>
+            </a:r>
+            <a:r>
+              <a:rPr dirty="0"/>
+              <a:t> replaces IMAP</a:t>
+            </a:r>
+          </a:p>
+        </p:txBody>
+      </p:sp>
+      <p:pic>
+        <p:nvPicPr>
+          <p:cNvPr id="4" name="Picture 3" descr="smtp.png"/>
+          <p:cNvPicPr>
+            <a:picLocks noChangeAspect="1"/>
+          </p:cNvPicPr>
           <p:nvPr/>
-        </p:nvSpPr>
+        </p:nvPicPr>
+        <p:blipFill>
+          <a:blip r:embed="rId2"/>
+          <a:stretch>
+            <a:fillRect/>
+          </a:stretch>
+        </p:blipFill>
         <p:spPr>
           <a:xfrm>
-            <a:off x="6172200" y="1476360"/>
-            <a:ext cx="5181480" cy="4351320"/>
+            <a:off x="5433889" y="2181340"/>
+            <a:ext cx="6392003" cy="2473016"/>
           </a:xfrm>
           <a:prstGeom prst="rect">
             <a:avLst/>
           </a:prstGeom>
-          <a:noFill/>
         </p:spPr>
-        <p:txBody>
-          <a:bodyPr wrap="none">
-            <a:spAutoFit/>
-          </a:bodyPr>
-          <a:lstStyle/>
-          <a:p>
-            <a:r>
-              <a:rPr sz="1600">
-                <a:latin typeface="Lucida Console"/>
-              </a:rPr>
-              <a:t>HELO cs.princeton.edu</a:t>
-            </a:r>
-          </a:p>
-          <a:p>
-            <a:r>
-              <a:rPr sz="1600">
-                <a:latin typeface="Lucida Console"/>
-              </a:rPr>
-              <a:t>250 Hello daemon@mail.princeton.edu</a:t>
-            </a:r>
-          </a:p>
-          <a:p>
-            <a:r>
-              <a:rPr sz="1600">
-                <a:latin typeface="Lucida Console"/>
-              </a:rPr>
-              <a:t>MAIL FROM:&lt;bob@princeton.edu&gt;</a:t>
-            </a:r>
-          </a:p>
-          <a:p>
-            <a:r>
-              <a:rPr sz="1600">
-                <a:latin typeface="Lucida Console"/>
-              </a:rPr>
-              <a:t>250 OK</a:t>
-            </a:r>
-          </a:p>
-          <a:p>
-            <a:r>
-              <a:rPr sz="1600">
-                <a:latin typeface="Lucida Console"/>
-              </a:rPr>
-              <a:t>RCPT TO:&lt;alice@systemsapproach.org&gt;</a:t>
-            </a:r>
-          </a:p>
-          <a:p>
-            <a:r>
-              <a:rPr sz="1600">
-                <a:latin typeface="Lucida Console"/>
-              </a:rPr>
-              <a:t>250 OK</a:t>
-            </a:r>
-          </a:p>
-          <a:p>
-            <a:r>
-              <a:rPr sz="1600">
-                <a:latin typeface="Lucida Console"/>
-              </a:rPr>
-              <a:t>DATA</a:t>
-            </a:r>
-          </a:p>
-          <a:p>
-            <a:r>
-              <a:rPr sz="1600">
-                <a:latin typeface="Lucida Console"/>
-              </a:rPr>
-              <a:t>354 Start mail input; end with &lt;CRLF&gt;.&lt;CRLF&gt;</a:t>
-            </a:r>
-          </a:p>
-          <a:p>
-            <a:r>
-              <a:rPr sz="1600">
-                <a:latin typeface="Lucida Console"/>
-              </a:rPr>
-              <a:t>...message body...</a:t>
-            </a:r>
-          </a:p>
-          <a:p>
-            <a:r>
-              <a:rPr sz="1600">
-                <a:latin typeface="Lucida Console"/>
-              </a:rPr>
-              <a:t>.</a:t>
-            </a:r>
-          </a:p>
-          <a:p>
-            <a:r>
-              <a:rPr sz="1600">
-                <a:latin typeface="Lucida Console"/>
-              </a:rPr>
-              <a:t>250 OK</a:t>
-            </a:r>
-          </a:p>
-          <a:p>
-            <a:r>
-              <a:rPr sz="1600">
-                <a:latin typeface="Lucida Console"/>
-              </a:rPr>
-              <a:t>QUIT</a:t>
-            </a:r>
-          </a:p>
-          <a:p>
-            <a:r>
-              <a:rPr sz="1600">
-                <a:latin typeface="Lucida Console"/>
-              </a:rPr>
-              <a:t>221 Closing connection</a:t>
-            </a:r>
-          </a:p>
-        </p:txBody>
-      </p:sp>
+      </p:pic>
       <p:sp>
         <p:nvSpPr>
           <p:cNvPr id="5" name="Footer Placeholder 4">
             <a:extLst>
               <a:ext uri="{FF2B5EF4-FFF2-40B4-BE49-F238E27FC236}">
-                <a16:creationId xmlns:a16="http://schemas.microsoft.com/office/drawing/2014/main" id="{D65226F3-446E-4A79-8A38-209BD3545901}"/>
+                <a16:creationId xmlns:a16="http://schemas.microsoft.com/office/drawing/2014/main" id="{B21C68C8-EE6E-FC47-B1FB-BEDCC8F11676}"/>
               </a:ext>
             </a:extLst>
           </p:cNvPr>
@@ -4075,7 +4123,7 @@
           <p:cNvPr id="6" name="Slide Number Placeholder 5">
             <a:extLst>
               <a:ext uri="{FF2B5EF4-FFF2-40B4-BE49-F238E27FC236}">
-                <a16:creationId xmlns:a16="http://schemas.microsoft.com/office/drawing/2014/main" id="{61A45FA8-D784-EC4C-4855-B202566F89FB}"/>
+                <a16:creationId xmlns:a16="http://schemas.microsoft.com/office/drawing/2014/main" id="{154B4D6F-69FE-79FB-E337-03DC76695ABB}"/>
               </a:ext>
             </a:extLst>
           </p:cNvPr>
@@ -4141,7 +4189,7 @@
           <a:p>
             <a:r>
               <a:rPr dirty="0"/>
-              <a:t>Adaptive Streaming</a:t>
+              <a:t>Message Format</a:t>
             </a:r>
           </a:p>
         </p:txBody>
@@ -4156,57 +4204,14 @@
             <p:ph idx="1"/>
           </p:nvPr>
         </p:nvSpPr>
-        <p:spPr>
-          <a:xfrm>
-            <a:off x="838079" y="1300088"/>
-            <a:ext cx="9793198" cy="3397649"/>
-          </a:xfrm>
-        </p:spPr>
-        <p:txBody>
-          <a:bodyPr>
-            <a:normAutofit fontScale="92500"/>
-          </a:bodyPr>
-          <a:lstStyle/>
-          <a:p>
-            <a:r>
-              <a:rPr dirty="0"/>
-              <a:t>Video</a:t>
-            </a:r>
-            <a:r>
-              <a:rPr lang="en-US" dirty="0"/>
-              <a:t> </a:t>
-            </a:r>
-            <a:r>
-              <a:rPr dirty="0"/>
-              <a:t>must adapt to variable network capacity</a:t>
-            </a:r>
-          </a:p>
-          <a:p>
-            <a:r>
-              <a:rPr dirty="0"/>
-              <a:t>DASH</a:t>
-            </a:r>
-            <a:r>
-              <a:rPr lang="en-US" dirty="0"/>
-              <a:t> (Dynamic Adaptable Streaming over HTTP)</a:t>
-            </a:r>
-          </a:p>
-          <a:p>
-            <a:pPr lvl="1"/>
-            <a:r>
-              <a:rPr lang="en-US" dirty="0"/>
-              <a:t>S</a:t>
-            </a:r>
-            <a:r>
-              <a:rPr dirty="0"/>
-              <a:t>tore video as N quality levels × M time segments</a:t>
-            </a:r>
-          </a:p>
-          <a:p>
-            <a:pPr lvl="1"/>
-            <a:r>
-              <a:rPr dirty="0"/>
-              <a:t>Client downloads MPD manifest</a:t>
+        <p:spPr/>
+        <p:txBody>
+          <a:bodyPr/>
+          <a:lstStyle/>
+          <a:p>
+            <a:r>
+              <a:rPr dirty="0"/>
+              <a:t>RFC 822 / 5322</a:t>
             </a:r>
             <a:endParaRPr lang="en-US" dirty="0"/>
           </a:p>
@@ -4214,32 +4219,37 @@
             <a:pPr lvl="1"/>
             <a:r>
               <a:rPr lang="en-US" dirty="0"/>
-              <a:t>Issue HTTP </a:t>
-            </a:r>
-            <a:r>
-              <a:rPr dirty="0"/>
-              <a:t>GET</a:t>
-            </a:r>
-            <a:r>
-              <a:rPr lang="en-US" dirty="0"/>
-              <a:t> requests for one</a:t>
-            </a:r>
-            <a:r>
-              <a:rPr dirty="0"/>
-              <a:t> segment one at a time</a:t>
-            </a:r>
-          </a:p>
-          <a:p>
-            <a:r>
-              <a:rPr dirty="0"/>
-              <a:t>Each segment is an opportunity to request a different quality level</a:t>
-            </a:r>
-          </a:p>
-          <a:p>
-            <a:pPr lvl="1"/>
-            <a:r>
-              <a:rPr dirty="0"/>
-              <a:t>Buffer draining → request lower quality</a:t>
+              <a:t>Header + Body (b</a:t>
+            </a:r>
+            <a:r>
+              <a:rPr dirty="0"/>
+              <a:t>oth </a:t>
+            </a:r>
+            <a:r>
+              <a:rPr lang="en-US" dirty="0"/>
+              <a:t>as</a:t>
+            </a:r>
+            <a:r>
+              <a:rPr dirty="0"/>
+              <a:t> ASCII text</a:t>
+            </a:r>
+            <a:r>
+              <a:rPr lang="en-US" dirty="0"/>
+              <a:t>)</a:t>
+            </a:r>
+            <a:endParaRPr dirty="0"/>
+          </a:p>
+          <a:p>
+            <a:pPr lvl="1"/>
+            <a:r>
+              <a:rPr dirty="0"/>
+              <a:t>Headers: To, From, Subject, Date, Received</a:t>
+            </a:r>
+          </a:p>
+          <a:p>
+            <a:r>
+              <a:rPr dirty="0"/>
+              <a:t>MIME (1992)</a:t>
             </a:r>
             <a:endParaRPr lang="en-US" dirty="0"/>
           </a:p>
@@ -4247,50 +4257,51 @@
             <a:pPr lvl="1"/>
             <a:r>
               <a:rPr lang="en-US" dirty="0"/>
+              <a:t>E</a:t>
+            </a:r>
+            <a:r>
+              <a:rPr dirty="0"/>
+              <a:t>xtends email to carry binary content</a:t>
+            </a:r>
+          </a:p>
+          <a:p>
+            <a:pPr lvl="1"/>
+            <a:r>
+              <a:rPr dirty="0"/>
+              <a:t>Content-Type declares the data type</a:t>
+            </a:r>
+            <a:endParaRPr lang="en-US" dirty="0"/>
+          </a:p>
+          <a:p>
+            <a:pPr lvl="2"/>
+            <a:r>
+              <a:rPr lang="en-US" dirty="0"/>
+              <a:t>e.g., </a:t>
+            </a:r>
+            <a:r>
+              <a:rPr dirty="0"/>
+              <a:t>image/jpeg, audio/mp3, multipart/mixed</a:t>
+            </a:r>
+          </a:p>
+          <a:p>
+            <a:pPr lvl="1"/>
+            <a:r>
+              <a:rPr lang="en-US" dirty="0"/>
               <a:t>B</a:t>
             </a:r>
             <a:r>
               <a:rPr dirty="0"/>
-              <a:t>uffer filling → try higher</a:t>
-            </a:r>
-            <a:r>
-              <a:rPr lang="en-US" dirty="0"/>
-              <a:t> quality</a:t>
-            </a:r>
-            <a:endParaRPr dirty="0"/>
-          </a:p>
-        </p:txBody>
-      </p:sp>
-      <p:pic>
-        <p:nvPicPr>
-          <p:cNvPr id="4" name="Picture 3" descr="buffer.png"/>
-          <p:cNvPicPr>
-            <a:picLocks noChangeAspect="1"/>
-          </p:cNvPicPr>
-          <p:nvPr/>
-        </p:nvPicPr>
-        <p:blipFill>
-          <a:blip r:embed="rId2"/>
-          <a:stretch>
-            <a:fillRect/>
-          </a:stretch>
-        </p:blipFill>
-        <p:spPr>
-          <a:xfrm>
-            <a:off x="2206159" y="4583018"/>
-            <a:ext cx="7779682" cy="1431880"/>
-          </a:xfrm>
-          <a:prstGeom prst="rect">
-            <a:avLst/>
-          </a:prstGeom>
-        </p:spPr>
-      </p:pic>
-      <p:sp>
-        <p:nvSpPr>
-          <p:cNvPr id="5" name="Footer Placeholder 4">
+              <a:t>ase64 maps binary to ASCII</a:t>
+            </a:r>
+          </a:p>
+        </p:txBody>
+      </p:sp>
+      <p:sp>
+        <p:nvSpPr>
+          <p:cNvPr id="4" name="Footer Placeholder 3">
             <a:extLst>
               <a:ext uri="{FF2B5EF4-FFF2-40B4-BE49-F238E27FC236}">
-                <a16:creationId xmlns:a16="http://schemas.microsoft.com/office/drawing/2014/main" id="{0CD6D699-E577-5B1F-18B2-709570B5EEC7}"/>
+                <a16:creationId xmlns:a16="http://schemas.microsoft.com/office/drawing/2014/main" id="{39F11885-A0CF-D1C9-5325-78DB6126988E}"/>
               </a:ext>
             </a:extLst>
           </p:cNvPr>
@@ -4315,10 +4326,10 @@
       </p:sp>
       <p:sp>
         <p:nvSpPr>
-          <p:cNvPr id="6" name="Slide Number Placeholder 5">
+          <p:cNvPr id="5" name="Slide Number Placeholder 4">
             <a:extLst>
               <a:ext uri="{FF2B5EF4-FFF2-40B4-BE49-F238E27FC236}">
-                <a16:creationId xmlns:a16="http://schemas.microsoft.com/office/drawing/2014/main" id="{30C515CB-9466-75E2-5C04-002D28FC611E}"/>
+                <a16:creationId xmlns:a16="http://schemas.microsoft.com/office/drawing/2014/main" id="{98923F51-9951-80DC-4DB4-F074CD623893}"/>
               </a:ext>
             </a:extLst>
           </p:cNvPr>
@@ -4384,7 +4395,7 @@
           <a:p>
             <a:r>
               <a:rPr dirty="0"/>
-              <a:t>Rate Adaptation</a:t>
+              <a:t>Message Transfer</a:t>
             </a:r>
           </a:p>
         </p:txBody>
@@ -4401,94 +4412,83 @@
         </p:nvSpPr>
         <p:spPr>
           <a:xfrm>
-            <a:off x="838200" y="1454227"/>
-            <a:ext cx="10515600" cy="4649118"/>
+            <a:off x="838080" y="1476360"/>
+            <a:ext cx="5181480" cy="3679534"/>
           </a:xfrm>
         </p:spPr>
         <p:txBody>
           <a:bodyPr>
-            <a:normAutofit/>
+            <a:normAutofit lnSpcReduction="10000"/>
           </a:bodyPr>
           <a:lstStyle/>
           <a:p>
             <a:r>
-              <a:rPr lang="en-US" dirty="0"/>
-              <a:t>Goal: match video bitrate to available bandwidth</a:t>
-            </a:r>
-          </a:p>
-          <a:p>
-            <a:r>
-              <a:rPr lang="en-US" dirty="0"/>
-              <a:t>Two mechanisms working in tandem</a:t>
-            </a:r>
-          </a:p>
-          <a:p>
-            <a:pPr lvl="1"/>
-            <a:r>
-              <a:rPr dirty="0"/>
-              <a:t>TCP's congestion control adjusts sending rate</a:t>
+              <a:rPr dirty="0"/>
+              <a:t>MTA (Message Transfer Agent)</a:t>
             </a:r>
             <a:endParaRPr lang="en-US" dirty="0"/>
           </a:p>
           <a:p>
             <a:pPr lvl="1"/>
             <a:r>
-              <a:rPr dirty="0"/>
-              <a:t>DASH </a:t>
-            </a:r>
-            <a:r>
-              <a:rPr lang="en-US" dirty="0"/>
-              <a:t>adapting volume of traffic being sent</a:t>
+              <a:rPr lang="en-US" dirty="0"/>
+              <a:t>B</a:t>
+            </a:r>
+            <a:r>
+              <a:rPr dirty="0"/>
+              <a:t>oth client and server sides</a:t>
+            </a:r>
+          </a:p>
+          <a:p>
+            <a:r>
+              <a:rPr dirty="0"/>
+              <a:t>Store-and-forward</a:t>
+            </a:r>
+            <a:endParaRPr lang="en-US" dirty="0"/>
+          </a:p>
+          <a:p>
+            <a:pPr lvl="1"/>
+            <a:r>
+              <a:rPr lang="en-US" dirty="0"/>
+              <a:t>E</a:t>
+            </a:r>
+            <a:r>
+              <a:rPr dirty="0"/>
+              <a:t>ach MTA buffers to disk</a:t>
+            </a:r>
+            <a:endParaRPr lang="en-US" dirty="0"/>
+          </a:p>
+          <a:p>
+            <a:pPr lvl="1"/>
+            <a:r>
+              <a:rPr lang="en-US" dirty="0"/>
+              <a:t>R</a:t>
+            </a:r>
+            <a:r>
+              <a:rPr dirty="0"/>
+              <a:t>etries for days if needed</a:t>
+            </a:r>
+            <a:endParaRPr lang="en-US" dirty="0"/>
+          </a:p>
+          <a:p>
+            <a:pPr lvl="1"/>
+            <a:r>
+              <a:rPr lang="en-US" dirty="0"/>
+              <a:t>Hides organization internals</a:t>
             </a:r>
             <a:endParaRPr dirty="0"/>
           </a:p>
           <a:p>
             <a:r>
-              <a:rPr dirty="0"/>
-              <a:t>Key </a:t>
-            </a:r>
-            <a:r>
-              <a:rPr lang="en-US" dirty="0"/>
-              <a:t>T</a:t>
-            </a:r>
-            <a:r>
-              <a:rPr dirty="0"/>
-              <a:t>radeoffs</a:t>
-            </a:r>
-          </a:p>
-          <a:p>
-            <a:pPr lvl="1"/>
-            <a:r>
-              <a:rPr dirty="0"/>
-              <a:t>Stability: frequent quality switches more annoying than a steady lower quality</a:t>
-            </a:r>
-          </a:p>
-          <a:p>
-            <a:pPr lvl="1"/>
-            <a:r>
-              <a:rPr dirty="0"/>
-              <a:t>Responsiveness: slow reaction wastes bandwidth or causes stalls</a:t>
-            </a:r>
-          </a:p>
-          <a:p>
-            <a:r>
-              <a:rPr dirty="0"/>
-              <a:t>Real-time video</a:t>
-            </a:r>
-            <a:r>
-              <a:rPr lang="en-US" dirty="0"/>
-              <a:t> </a:t>
-            </a:r>
-            <a:r>
-              <a:rPr dirty="0"/>
-              <a:t>conferencing cannot use buffered streaming</a:t>
-            </a:r>
-          </a:p>
-          <a:p>
-            <a:pPr lvl="1"/>
-            <a:r>
-              <a:rPr dirty="0"/>
-              <a:t>Needs &lt; 300ms end-to-end latency</a:t>
+              <a:rPr lang="en-US" dirty="0"/>
+              <a:t>SMTP defines the Protocol</a:t>
+            </a:r>
+          </a:p>
+          <a:p>
+            <a:pPr lvl="1"/>
+            <a:r>
+              <a:rPr dirty="0"/>
+              <a:t>ASCII command/response dialog</a:t>
             </a:r>
             <a:endParaRPr lang="en-US" dirty="0"/>
           </a:p>
@@ -4496,21 +4496,147 @@
             <a:pPr lvl="1"/>
             <a:r>
               <a:rPr lang="en-US" dirty="0"/>
-              <a:t>R</a:t>
-            </a:r>
-            <a:r>
-              <a:rPr dirty="0"/>
-              <a:t>equires a different approach (Chapter 17)</a:t>
-            </a:r>
-          </a:p>
-        </p:txBody>
-      </p:sp>
-      <p:sp>
-        <p:nvSpPr>
-          <p:cNvPr id="4" name="Footer Placeholder 3">
+              <a:t>Influenced HTTP’s design</a:t>
+            </a:r>
+          </a:p>
+          <a:p>
+            <a:endParaRPr dirty="0"/>
+          </a:p>
+        </p:txBody>
+      </p:sp>
+      <p:sp>
+        <p:nvSpPr>
+          <p:cNvPr id="4" name="TextBox 3"/>
+          <p:cNvSpPr txBox="1"/>
+          <p:nvPr/>
+        </p:nvSpPr>
+        <p:spPr>
+          <a:xfrm>
+            <a:off x="6172200" y="1476360"/>
+            <a:ext cx="5181480" cy="4351320"/>
+          </a:xfrm>
+          <a:prstGeom prst="rect">
+            <a:avLst/>
+          </a:prstGeom>
+          <a:noFill/>
+        </p:spPr>
+        <p:txBody>
+          <a:bodyPr wrap="none">
+            <a:spAutoFit/>
+          </a:bodyPr>
+          <a:lstStyle/>
+          <a:p>
+            <a:r>
+              <a:rPr sz="1600">
+                <a:latin typeface="Lucida Console"/>
+              </a:rPr>
+              <a:t>HELO cs.princeton.edu</a:t>
+            </a:r>
+          </a:p>
+          <a:p>
+            <a:r>
+              <a:rPr sz="1600">
+                <a:latin typeface="Lucida Console"/>
+              </a:rPr>
+              <a:t>250 Hello daemon@mail.princeton.edu</a:t>
+            </a:r>
+          </a:p>
+          <a:p>
+            <a:r>
+              <a:rPr sz="1600">
+                <a:latin typeface="Lucida Console"/>
+              </a:rPr>
+              <a:t>MAIL FROM:&lt;bob@princeton.edu&gt;</a:t>
+            </a:r>
+          </a:p>
+          <a:p>
+            <a:r>
+              <a:rPr sz="1600">
+                <a:latin typeface="Lucida Console"/>
+              </a:rPr>
+              <a:t>250 OK</a:t>
+            </a:r>
+          </a:p>
+          <a:p>
+            <a:r>
+              <a:rPr sz="1600">
+                <a:latin typeface="Lucida Console"/>
+              </a:rPr>
+              <a:t>RCPT TO:&lt;alice@systemsapproach.org&gt;</a:t>
+            </a:r>
+          </a:p>
+          <a:p>
+            <a:r>
+              <a:rPr sz="1600">
+                <a:latin typeface="Lucida Console"/>
+              </a:rPr>
+              <a:t>250 OK</a:t>
+            </a:r>
+          </a:p>
+          <a:p>
+            <a:r>
+              <a:rPr sz="1600">
+                <a:latin typeface="Lucida Console"/>
+              </a:rPr>
+              <a:t>DATA</a:t>
+            </a:r>
+          </a:p>
+          <a:p>
+            <a:r>
+              <a:rPr sz="1600">
+                <a:latin typeface="Lucida Console"/>
+              </a:rPr>
+              <a:t>354 Start mail input; end with &lt;CRLF&gt;.&lt;CRLF&gt;</a:t>
+            </a:r>
+          </a:p>
+          <a:p>
+            <a:r>
+              <a:rPr sz="1600">
+                <a:latin typeface="Lucida Console"/>
+              </a:rPr>
+              <a:t>...message body...</a:t>
+            </a:r>
+          </a:p>
+          <a:p>
+            <a:r>
+              <a:rPr sz="1600">
+                <a:latin typeface="Lucida Console"/>
+              </a:rPr>
+              <a:t>.</a:t>
+            </a:r>
+          </a:p>
+          <a:p>
+            <a:r>
+              <a:rPr sz="1600">
+                <a:latin typeface="Lucida Console"/>
+              </a:rPr>
+              <a:t>250 OK</a:t>
+            </a:r>
+          </a:p>
+          <a:p>
+            <a:r>
+              <a:rPr sz="1600">
+                <a:latin typeface="Lucida Console"/>
+              </a:rPr>
+              <a:t>QUIT</a:t>
+            </a:r>
+          </a:p>
+          <a:p>
+            <a:r>
+              <a:rPr sz="1600">
+                <a:latin typeface="Lucida Console"/>
+              </a:rPr>
+              <a:t>221 Closing connection</a:t>
+            </a:r>
+          </a:p>
+        </p:txBody>
+      </p:sp>
+      <p:sp>
+        <p:nvSpPr>
+          <p:cNvPr id="5" name="Footer Placeholder 4">
             <a:extLst>
               <a:ext uri="{FF2B5EF4-FFF2-40B4-BE49-F238E27FC236}">
-                <a16:creationId xmlns:a16="http://schemas.microsoft.com/office/drawing/2014/main" id="{C094D62D-2732-6E6D-BA6A-7DA8E4599F59}"/>
+                <a16:creationId xmlns:a16="http://schemas.microsoft.com/office/drawing/2014/main" id="{D65226F3-446E-4A79-8A38-209BD3545901}"/>
               </a:ext>
             </a:extLst>
           </p:cNvPr>
@@ -4535,10 +4661,10 @@
       </p:sp>
       <p:sp>
         <p:nvSpPr>
-          <p:cNvPr id="5" name="Slide Number Placeholder 4">
+          <p:cNvPr id="6" name="Slide Number Placeholder 5">
             <a:extLst>
               <a:ext uri="{FF2B5EF4-FFF2-40B4-BE49-F238E27FC236}">
-                <a16:creationId xmlns:a16="http://schemas.microsoft.com/office/drawing/2014/main" id="{D735982A-2D33-7237-5771-E33EBC20F2D0}"/>
+                <a16:creationId xmlns:a16="http://schemas.microsoft.com/office/drawing/2014/main" id="{61A45FA8-D784-EC4C-4855-B202566F89FB}"/>
               </a:ext>
             </a:extLst>
           </p:cNvPr>
@@ -4563,6 +4689,118 @@
         </p:txBody>
       </p:sp>
     </p:spTree>
+  </p:cSld>
+  <p:clrMapOvr>
+    <a:masterClrMapping/>
+  </p:clrMapOvr>
+</p:sld>
+</file>
+
+<file path=ppt/slides/slide19.xml><?xml version="1.0" encoding="utf-8"?>
+<p:sld xmlns:a="http://schemas.openxmlformats.org/drawingml/2006/main" xmlns:r="http://schemas.openxmlformats.org/officeDocument/2006/relationships" xmlns:p="http://schemas.openxmlformats.org/presentationml/2006/main">
+  <p:cSld>
+    <p:spTree>
+      <p:nvGrpSpPr>
+        <p:cNvPr id="1" name=""/>
+        <p:cNvGrpSpPr/>
+        <p:nvPr/>
+      </p:nvGrpSpPr>
+      <p:grpSpPr>
+        <a:xfrm>
+          <a:off x="0" y="0"/>
+          <a:ext cx="0" cy="0"/>
+          <a:chOff x="0" y="0"/>
+          <a:chExt cx="0" cy="0"/>
+        </a:xfrm>
+      </p:grpSpPr>
+      <p:sp>
+        <p:nvSpPr>
+          <p:cNvPr id="2" name="Title 1">
+            <a:extLst>
+              <a:ext uri="{FF2B5EF4-FFF2-40B4-BE49-F238E27FC236}">
+                <a16:creationId xmlns:a16="http://schemas.microsoft.com/office/drawing/2014/main" id="{8AFD0928-D2E8-0C1C-E0CF-52C06E29B1C7}"/>
+              </a:ext>
+            </a:extLst>
+          </p:cNvPr>
+          <p:cNvSpPr>
+            <a:spLocks noGrp="1"/>
+          </p:cNvSpPr>
+          <p:nvPr>
+            <p:ph type="ctrTitle"/>
+          </p:nvPr>
+        </p:nvSpPr>
+        <p:spPr/>
+        <p:txBody>
+          <a:bodyPr/>
+          <a:lstStyle/>
+          <a:p>
+            <a:r>
+              <a:rPr lang="en-US" dirty="0"/>
+              <a:t>Adaptive Streaming</a:t>
+            </a:r>
+          </a:p>
+        </p:txBody>
+      </p:sp>
+      <p:sp>
+        <p:nvSpPr>
+          <p:cNvPr id="3" name="Footer Placeholder 2">
+            <a:extLst>
+              <a:ext uri="{FF2B5EF4-FFF2-40B4-BE49-F238E27FC236}">
+                <a16:creationId xmlns:a16="http://schemas.microsoft.com/office/drawing/2014/main" id="{601B563F-32C2-B11D-27C3-210E04C43D19}"/>
+              </a:ext>
+            </a:extLst>
+          </p:cNvPr>
+          <p:cNvSpPr>
+            <a:spLocks noGrp="1"/>
+          </p:cNvSpPr>
+          <p:nvPr>
+            <p:ph type="ftr" sz="quarter" idx="11"/>
+          </p:nvPr>
+        </p:nvSpPr>
+        <p:spPr/>
+        <p:txBody>
+          <a:bodyPr/>
+          <a:lstStyle/>
+          <a:p>
+            <a:endParaRPr lang="en-US"/>
+          </a:p>
+        </p:txBody>
+      </p:sp>
+      <p:sp>
+        <p:nvSpPr>
+          <p:cNvPr id="4" name="Slide Number Placeholder 3">
+            <a:extLst>
+              <a:ext uri="{FF2B5EF4-FFF2-40B4-BE49-F238E27FC236}">
+                <a16:creationId xmlns:a16="http://schemas.microsoft.com/office/drawing/2014/main" id="{84B7E794-1DB2-AE50-44CA-FAC871D6C6C7}"/>
+              </a:ext>
+            </a:extLst>
+          </p:cNvPr>
+          <p:cNvSpPr>
+            <a:spLocks noGrp="1"/>
+          </p:cNvSpPr>
+          <p:nvPr>
+            <p:ph type="sldNum" sz="quarter" idx="12"/>
+          </p:nvPr>
+        </p:nvSpPr>
+        <p:spPr/>
+        <p:txBody>
+          <a:bodyPr/>
+          <a:lstStyle/>
+          <a:p>
+            <a:fld id="{394597B6-99AE-8F4E-8AC4-338DBFD9B0E5}" type="slidenum">
+              <a:rPr lang="en-US" smtClean="0"/>
+              <a:t>19</a:t>
+            </a:fld>
+            <a:endParaRPr lang="en-US"/>
+          </a:p>
+        </p:txBody>
+      </p:sp>
+    </p:spTree>
+    <p:extLst>
+      <p:ext uri="{BB962C8B-B14F-4D97-AF65-F5344CB8AC3E}">
+        <p14:creationId xmlns:p14="http://schemas.microsoft.com/office/powerpoint/2010/main" val="23912507"/>
+      </p:ext>
+    </p:extLst>
   </p:cSld>
   <p:clrMapOvr>
     <a:masterClrMapping/>
@@ -4660,19 +4898,19 @@
             </a:r>
             <a:r>
               <a:rPr i="1" dirty="0"/>
-              <a:t> application ecosystem, </a:t>
+              <a:t> </a:t>
             </a:r>
             <a:r>
               <a:rPr lang="en-US" i="1" dirty="0"/>
-              <a:t>setting the stage for understanding everything </a:t>
-            </a:r>
-            <a:r>
-              <a:rPr lang="en-US" i="1"/>
-              <a:t>it takes to support </a:t>
+              <a:t>software</a:t>
+            </a:r>
+            <a:r>
+              <a:rPr i="1" dirty="0"/>
+              <a:t> ecosystem, </a:t>
             </a:r>
             <a:r>
               <a:rPr lang="en-US" i="1" dirty="0"/>
-              <a:t>it</a:t>
+              <a:t>setting the stage for understanding everything it takes to create apps</a:t>
             </a:r>
             <a:r>
               <a:rPr i="1" dirty="0"/>
@@ -4733,6 +4971,470 @@
             <a:fld id="{394597B6-99AE-8F4E-8AC4-338DBFD9B0E5}" type="slidenum">
               <a:rPr lang="en-US" smtClean="0"/>
               <a:t>2</a:t>
+            </a:fld>
+            <a:endParaRPr lang="en-US"/>
+          </a:p>
+        </p:txBody>
+      </p:sp>
+    </p:spTree>
+  </p:cSld>
+  <p:clrMapOvr>
+    <a:masterClrMapping/>
+  </p:clrMapOvr>
+</p:sld>
+</file>
+
+<file path=ppt/slides/slide20.xml><?xml version="1.0" encoding="utf-8"?>
+<p:sld xmlns:a="http://schemas.openxmlformats.org/drawingml/2006/main" xmlns:r="http://schemas.openxmlformats.org/officeDocument/2006/relationships" xmlns:p="http://schemas.openxmlformats.org/presentationml/2006/main">
+  <p:cSld>
+    <p:spTree>
+      <p:nvGrpSpPr>
+        <p:cNvPr id="1" name=""/>
+        <p:cNvGrpSpPr/>
+        <p:nvPr/>
+      </p:nvGrpSpPr>
+      <p:grpSpPr>
+        <a:xfrm>
+          <a:off x="0" y="0"/>
+          <a:ext cx="0" cy="0"/>
+          <a:chOff x="0" y="0"/>
+          <a:chExt cx="0" cy="0"/>
+        </a:xfrm>
+      </p:grpSpPr>
+      <p:sp>
+        <p:nvSpPr>
+          <p:cNvPr id="2" name="Title 1"/>
+          <p:cNvSpPr>
+            <a:spLocks noGrp="1"/>
+          </p:cNvSpPr>
+          <p:nvPr>
+            <p:ph type="title"/>
+          </p:nvPr>
+        </p:nvSpPr>
+        <p:spPr/>
+        <p:txBody>
+          <a:bodyPr/>
+          <a:lstStyle/>
+          <a:p>
+            <a:r>
+              <a:rPr lang="en-US" dirty="0"/>
+              <a:t>Overview</a:t>
+            </a:r>
+            <a:endParaRPr dirty="0"/>
+          </a:p>
+        </p:txBody>
+      </p:sp>
+      <p:sp>
+        <p:nvSpPr>
+          <p:cNvPr id="3" name="Content Placeholder 2"/>
+          <p:cNvSpPr>
+            <a:spLocks noGrp="1"/>
+          </p:cNvSpPr>
+          <p:nvPr>
+            <p:ph idx="1"/>
+          </p:nvPr>
+        </p:nvSpPr>
+        <p:spPr>
+          <a:xfrm>
+            <a:off x="838079" y="1300088"/>
+            <a:ext cx="9793198" cy="3397649"/>
+          </a:xfrm>
+        </p:spPr>
+        <p:txBody>
+          <a:bodyPr>
+            <a:normAutofit fontScale="92500"/>
+          </a:bodyPr>
+          <a:lstStyle/>
+          <a:p>
+            <a:r>
+              <a:rPr dirty="0"/>
+              <a:t>Video</a:t>
+            </a:r>
+            <a:r>
+              <a:rPr lang="en-US" dirty="0"/>
+              <a:t> </a:t>
+            </a:r>
+            <a:r>
+              <a:rPr dirty="0"/>
+              <a:t>must adapt to variable network capacity</a:t>
+            </a:r>
+          </a:p>
+          <a:p>
+            <a:r>
+              <a:rPr dirty="0"/>
+              <a:t>DASH</a:t>
+            </a:r>
+            <a:r>
+              <a:rPr lang="en-US" dirty="0"/>
+              <a:t> (Dynamic Adaptable Streaming over HTTP)</a:t>
+            </a:r>
+          </a:p>
+          <a:p>
+            <a:pPr lvl="1"/>
+            <a:r>
+              <a:rPr lang="en-US" dirty="0"/>
+              <a:t>S</a:t>
+            </a:r>
+            <a:r>
+              <a:rPr dirty="0"/>
+              <a:t>tore video as N quality levels × M time segments</a:t>
+            </a:r>
+          </a:p>
+          <a:p>
+            <a:pPr lvl="1"/>
+            <a:r>
+              <a:rPr dirty="0"/>
+              <a:t>Client downloads MPD manifest</a:t>
+            </a:r>
+            <a:endParaRPr lang="en-US" dirty="0"/>
+          </a:p>
+          <a:p>
+            <a:pPr lvl="1"/>
+            <a:r>
+              <a:rPr lang="en-US" dirty="0"/>
+              <a:t>Issue HTTP </a:t>
+            </a:r>
+            <a:r>
+              <a:rPr dirty="0"/>
+              <a:t>GET</a:t>
+            </a:r>
+            <a:r>
+              <a:rPr lang="en-US" dirty="0"/>
+              <a:t> requests for one</a:t>
+            </a:r>
+            <a:r>
+              <a:rPr dirty="0"/>
+              <a:t> segment one at a time</a:t>
+            </a:r>
+          </a:p>
+          <a:p>
+            <a:r>
+              <a:rPr dirty="0"/>
+              <a:t>Each segment is an opportunity to request a different quality level</a:t>
+            </a:r>
+          </a:p>
+          <a:p>
+            <a:pPr lvl="1"/>
+            <a:r>
+              <a:rPr dirty="0"/>
+              <a:t>Buffer draining → request lower quality</a:t>
+            </a:r>
+            <a:endParaRPr lang="en-US" dirty="0"/>
+          </a:p>
+          <a:p>
+            <a:pPr lvl="1"/>
+            <a:r>
+              <a:rPr lang="en-US" dirty="0"/>
+              <a:t>B</a:t>
+            </a:r>
+            <a:r>
+              <a:rPr dirty="0"/>
+              <a:t>uffer filling → try higher</a:t>
+            </a:r>
+            <a:r>
+              <a:rPr lang="en-US" dirty="0"/>
+              <a:t> quality</a:t>
+            </a:r>
+            <a:endParaRPr dirty="0"/>
+          </a:p>
+        </p:txBody>
+      </p:sp>
+      <p:pic>
+        <p:nvPicPr>
+          <p:cNvPr id="4" name="Picture 3" descr="buffer.png"/>
+          <p:cNvPicPr>
+            <a:picLocks noChangeAspect="1"/>
+          </p:cNvPicPr>
+          <p:nvPr/>
+        </p:nvPicPr>
+        <p:blipFill>
+          <a:blip r:embed="rId2"/>
+          <a:stretch>
+            <a:fillRect/>
+          </a:stretch>
+        </p:blipFill>
+        <p:spPr>
+          <a:xfrm>
+            <a:off x="2206159" y="4583018"/>
+            <a:ext cx="7779682" cy="1431880"/>
+          </a:xfrm>
+          <a:prstGeom prst="rect">
+            <a:avLst/>
+          </a:prstGeom>
+        </p:spPr>
+      </p:pic>
+      <p:sp>
+        <p:nvSpPr>
+          <p:cNvPr id="5" name="Footer Placeholder 4">
+            <a:extLst>
+              <a:ext uri="{FF2B5EF4-FFF2-40B4-BE49-F238E27FC236}">
+                <a16:creationId xmlns:a16="http://schemas.microsoft.com/office/drawing/2014/main" id="{0CD6D699-E577-5B1F-18B2-709570B5EEC7}"/>
+              </a:ext>
+            </a:extLst>
+          </p:cNvPr>
+          <p:cNvSpPr>
+            <a:spLocks noGrp="1"/>
+          </p:cNvSpPr>
+          <p:nvPr>
+            <p:ph type="ftr" sz="quarter" idx="11"/>
+          </p:nvPr>
+        </p:nvSpPr>
+        <p:spPr/>
+        <p:txBody>
+          <a:bodyPr/>
+          <a:lstStyle/>
+          <a:p>
+            <a:r>
+              <a:rPr lang="en-US"/>
+              <a:t>Copyright Peterson &amp; Davie, 2026</a:t>
+            </a:r>
+          </a:p>
+        </p:txBody>
+      </p:sp>
+      <p:sp>
+        <p:nvSpPr>
+          <p:cNvPr id="6" name="Slide Number Placeholder 5">
+            <a:extLst>
+              <a:ext uri="{FF2B5EF4-FFF2-40B4-BE49-F238E27FC236}">
+                <a16:creationId xmlns:a16="http://schemas.microsoft.com/office/drawing/2014/main" id="{30C515CB-9466-75E2-5C04-002D28FC611E}"/>
+              </a:ext>
+            </a:extLst>
+          </p:cNvPr>
+          <p:cNvSpPr>
+            <a:spLocks noGrp="1"/>
+          </p:cNvSpPr>
+          <p:nvPr>
+            <p:ph type="sldNum" sz="quarter" idx="12"/>
+          </p:nvPr>
+        </p:nvSpPr>
+        <p:spPr/>
+        <p:txBody>
+          <a:bodyPr/>
+          <a:lstStyle/>
+          <a:p>
+            <a:fld id="{394597B6-99AE-8F4E-8AC4-338DBFD9B0E5}" type="slidenum">
+              <a:rPr lang="en-US" smtClean="0"/>
+              <a:t>20</a:t>
+            </a:fld>
+            <a:endParaRPr lang="en-US"/>
+          </a:p>
+        </p:txBody>
+      </p:sp>
+    </p:spTree>
+  </p:cSld>
+  <p:clrMapOvr>
+    <a:masterClrMapping/>
+  </p:clrMapOvr>
+</p:sld>
+</file>
+
+<file path=ppt/slides/slide21.xml><?xml version="1.0" encoding="utf-8"?>
+<p:sld xmlns:a="http://schemas.openxmlformats.org/drawingml/2006/main" xmlns:r="http://schemas.openxmlformats.org/officeDocument/2006/relationships" xmlns:p="http://schemas.openxmlformats.org/presentationml/2006/main">
+  <p:cSld>
+    <p:spTree>
+      <p:nvGrpSpPr>
+        <p:cNvPr id="1" name=""/>
+        <p:cNvGrpSpPr/>
+        <p:nvPr/>
+      </p:nvGrpSpPr>
+      <p:grpSpPr>
+        <a:xfrm>
+          <a:off x="0" y="0"/>
+          <a:ext cx="0" cy="0"/>
+          <a:chOff x="0" y="0"/>
+          <a:chExt cx="0" cy="0"/>
+        </a:xfrm>
+      </p:grpSpPr>
+      <p:sp>
+        <p:nvSpPr>
+          <p:cNvPr id="2" name="Title 1"/>
+          <p:cNvSpPr>
+            <a:spLocks noGrp="1"/>
+          </p:cNvSpPr>
+          <p:nvPr>
+            <p:ph type="title"/>
+          </p:nvPr>
+        </p:nvSpPr>
+        <p:spPr/>
+        <p:txBody>
+          <a:bodyPr/>
+          <a:lstStyle/>
+          <a:p>
+            <a:r>
+              <a:rPr dirty="0"/>
+              <a:t>Rate Adaptation</a:t>
+            </a:r>
+          </a:p>
+        </p:txBody>
+      </p:sp>
+      <p:sp>
+        <p:nvSpPr>
+          <p:cNvPr id="3" name="Content Placeholder 2"/>
+          <p:cNvSpPr>
+            <a:spLocks noGrp="1"/>
+          </p:cNvSpPr>
+          <p:nvPr>
+            <p:ph idx="1"/>
+          </p:nvPr>
+        </p:nvSpPr>
+        <p:spPr>
+          <a:xfrm>
+            <a:off x="838200" y="1454227"/>
+            <a:ext cx="10515600" cy="4649118"/>
+          </a:xfrm>
+        </p:spPr>
+        <p:txBody>
+          <a:bodyPr>
+            <a:normAutofit/>
+          </a:bodyPr>
+          <a:lstStyle/>
+          <a:p>
+            <a:r>
+              <a:rPr lang="en-US" dirty="0"/>
+              <a:t>Goal: match video bitrate to available bandwidth</a:t>
+            </a:r>
+          </a:p>
+          <a:p>
+            <a:r>
+              <a:rPr lang="en-US" dirty="0"/>
+              <a:t>Two mechanisms working in tandem</a:t>
+            </a:r>
+          </a:p>
+          <a:p>
+            <a:pPr lvl="1"/>
+            <a:r>
+              <a:rPr dirty="0"/>
+              <a:t>TCP's congestion control adjusts sending rate</a:t>
+            </a:r>
+            <a:endParaRPr lang="en-US" dirty="0"/>
+          </a:p>
+          <a:p>
+            <a:pPr lvl="1"/>
+            <a:r>
+              <a:rPr dirty="0"/>
+              <a:t>DASH </a:t>
+            </a:r>
+            <a:r>
+              <a:rPr lang="en-US" dirty="0"/>
+              <a:t>adapting volume of traffic being sent</a:t>
+            </a:r>
+            <a:endParaRPr dirty="0"/>
+          </a:p>
+          <a:p>
+            <a:r>
+              <a:rPr dirty="0"/>
+              <a:t>Key </a:t>
+            </a:r>
+            <a:r>
+              <a:rPr lang="en-US" dirty="0"/>
+              <a:t>T</a:t>
+            </a:r>
+            <a:r>
+              <a:rPr dirty="0"/>
+              <a:t>radeoffs</a:t>
+            </a:r>
+          </a:p>
+          <a:p>
+            <a:pPr lvl="1"/>
+            <a:r>
+              <a:rPr dirty="0"/>
+              <a:t>Stability: frequent quality switches more annoying than a steady lower quality</a:t>
+            </a:r>
+          </a:p>
+          <a:p>
+            <a:pPr lvl="1"/>
+            <a:r>
+              <a:rPr dirty="0"/>
+              <a:t>Responsiveness: slow reaction wastes bandwidth or causes stalls</a:t>
+            </a:r>
+          </a:p>
+          <a:p>
+            <a:r>
+              <a:rPr dirty="0"/>
+              <a:t>Real-time video</a:t>
+            </a:r>
+            <a:r>
+              <a:rPr lang="en-US" dirty="0"/>
+              <a:t> </a:t>
+            </a:r>
+            <a:r>
+              <a:rPr dirty="0"/>
+              <a:t>conferencing cannot use buffered streaming</a:t>
+            </a:r>
+          </a:p>
+          <a:p>
+            <a:pPr lvl="1"/>
+            <a:r>
+              <a:rPr dirty="0"/>
+              <a:t>Needs &lt; 300ms end-to-end latency</a:t>
+            </a:r>
+            <a:endParaRPr lang="en-US" dirty="0"/>
+          </a:p>
+          <a:p>
+            <a:pPr lvl="1"/>
+            <a:r>
+              <a:rPr lang="en-US" dirty="0"/>
+              <a:t>R</a:t>
+            </a:r>
+            <a:r>
+              <a:rPr dirty="0"/>
+              <a:t>equires a different approach (Chapter 17)</a:t>
+            </a:r>
+          </a:p>
+        </p:txBody>
+      </p:sp>
+      <p:sp>
+        <p:nvSpPr>
+          <p:cNvPr id="4" name="Footer Placeholder 3">
+            <a:extLst>
+              <a:ext uri="{FF2B5EF4-FFF2-40B4-BE49-F238E27FC236}">
+                <a16:creationId xmlns:a16="http://schemas.microsoft.com/office/drawing/2014/main" id="{C094D62D-2732-6E6D-BA6A-7DA8E4599F59}"/>
+              </a:ext>
+            </a:extLst>
+          </p:cNvPr>
+          <p:cNvSpPr>
+            <a:spLocks noGrp="1"/>
+          </p:cNvSpPr>
+          <p:nvPr>
+            <p:ph type="ftr" sz="quarter" idx="11"/>
+          </p:nvPr>
+        </p:nvSpPr>
+        <p:spPr/>
+        <p:txBody>
+          <a:bodyPr/>
+          <a:lstStyle/>
+          <a:p>
+            <a:r>
+              <a:rPr lang="en-US"/>
+              <a:t>Copyright Peterson &amp; Davie, 2026</a:t>
+            </a:r>
+          </a:p>
+        </p:txBody>
+      </p:sp>
+      <p:sp>
+        <p:nvSpPr>
+          <p:cNvPr id="5" name="Slide Number Placeholder 4">
+            <a:extLst>
+              <a:ext uri="{FF2B5EF4-FFF2-40B4-BE49-F238E27FC236}">
+                <a16:creationId xmlns:a16="http://schemas.microsoft.com/office/drawing/2014/main" id="{D735982A-2D33-7237-5771-E33EBC20F2D0}"/>
+              </a:ext>
+            </a:extLst>
+          </p:cNvPr>
+          <p:cNvSpPr>
+            <a:spLocks noGrp="1"/>
+          </p:cNvSpPr>
+          <p:nvPr>
+            <p:ph type="sldNum" sz="quarter" idx="12"/>
+          </p:nvPr>
+        </p:nvSpPr>
+        <p:spPr/>
+        <p:txBody>
+          <a:bodyPr/>
+          <a:lstStyle/>
+          <a:p>
+            <a:fld id="{394597B6-99AE-8F4E-8AC4-338DBFD9B0E5}" type="slidenum">
+              <a:rPr lang="en-US" smtClean="0"/>
+              <a:t>21</a:t>
             </a:fld>
             <a:endParaRPr lang="en-US"/>
           </a:p>
@@ -6406,6 +7108,118 @@
       </p:grpSpPr>
       <p:sp>
         <p:nvSpPr>
+          <p:cNvPr id="2" name="Title 1">
+            <a:extLst>
+              <a:ext uri="{FF2B5EF4-FFF2-40B4-BE49-F238E27FC236}">
+                <a16:creationId xmlns:a16="http://schemas.microsoft.com/office/drawing/2014/main" id="{36872019-9549-6622-0FE7-0C1C04BFDEAE}"/>
+              </a:ext>
+            </a:extLst>
+          </p:cNvPr>
+          <p:cNvSpPr>
+            <a:spLocks noGrp="1"/>
+          </p:cNvSpPr>
+          <p:nvPr>
+            <p:ph type="ctrTitle"/>
+          </p:nvPr>
+        </p:nvSpPr>
+        <p:spPr/>
+        <p:txBody>
+          <a:bodyPr/>
+          <a:lstStyle/>
+          <a:p>
+            <a:r>
+              <a:rPr lang="en-US" dirty="0"/>
+              <a:t>HTTP: From App to Framework</a:t>
+            </a:r>
+          </a:p>
+        </p:txBody>
+      </p:sp>
+      <p:sp>
+        <p:nvSpPr>
+          <p:cNvPr id="3" name="Footer Placeholder 2">
+            <a:extLst>
+              <a:ext uri="{FF2B5EF4-FFF2-40B4-BE49-F238E27FC236}">
+                <a16:creationId xmlns:a16="http://schemas.microsoft.com/office/drawing/2014/main" id="{8A1567C0-0A57-6BB8-670A-C6108CA413A8}"/>
+              </a:ext>
+            </a:extLst>
+          </p:cNvPr>
+          <p:cNvSpPr>
+            <a:spLocks noGrp="1"/>
+          </p:cNvSpPr>
+          <p:nvPr>
+            <p:ph type="ftr" sz="quarter" idx="11"/>
+          </p:nvPr>
+        </p:nvSpPr>
+        <p:spPr/>
+        <p:txBody>
+          <a:bodyPr/>
+          <a:lstStyle/>
+          <a:p>
+            <a:endParaRPr lang="en-US"/>
+          </a:p>
+        </p:txBody>
+      </p:sp>
+      <p:sp>
+        <p:nvSpPr>
+          <p:cNvPr id="4" name="Slide Number Placeholder 3">
+            <a:extLst>
+              <a:ext uri="{FF2B5EF4-FFF2-40B4-BE49-F238E27FC236}">
+                <a16:creationId xmlns:a16="http://schemas.microsoft.com/office/drawing/2014/main" id="{5B95C7F8-D016-5B15-83EA-9C81719EDED2}"/>
+              </a:ext>
+            </a:extLst>
+          </p:cNvPr>
+          <p:cNvSpPr>
+            <a:spLocks noGrp="1"/>
+          </p:cNvSpPr>
+          <p:nvPr>
+            <p:ph type="sldNum" sz="quarter" idx="12"/>
+          </p:nvPr>
+        </p:nvSpPr>
+        <p:spPr/>
+        <p:txBody>
+          <a:bodyPr/>
+          <a:lstStyle/>
+          <a:p>
+            <a:fld id="{394597B6-99AE-8F4E-8AC4-338DBFD9B0E5}" type="slidenum">
+              <a:rPr lang="en-US" smtClean="0"/>
+              <a:t>8</a:t>
+            </a:fld>
+            <a:endParaRPr lang="en-US"/>
+          </a:p>
+        </p:txBody>
+      </p:sp>
+    </p:spTree>
+    <p:extLst>
+      <p:ext uri="{BB962C8B-B14F-4D97-AF65-F5344CB8AC3E}">
+        <p14:creationId xmlns:p14="http://schemas.microsoft.com/office/powerpoint/2010/main" val="2632201489"/>
+      </p:ext>
+    </p:extLst>
+  </p:cSld>
+  <p:clrMapOvr>
+    <a:masterClrMapping/>
+  </p:clrMapOvr>
+</p:sld>
+</file>
+
+<file path=ppt/slides/slide9.xml><?xml version="1.0" encoding="utf-8"?>
+<p:sld xmlns:a="http://schemas.openxmlformats.org/drawingml/2006/main" xmlns:r="http://schemas.openxmlformats.org/officeDocument/2006/relationships" xmlns:p="http://schemas.openxmlformats.org/presentationml/2006/main">
+  <p:cSld>
+    <p:spTree>
+      <p:nvGrpSpPr>
+        <p:cNvPr id="1" name=""/>
+        <p:cNvGrpSpPr/>
+        <p:nvPr/>
+      </p:nvGrpSpPr>
+      <p:grpSpPr>
+        <a:xfrm>
+          <a:off x="0" y="0"/>
+          <a:ext cx="0" cy="0"/>
+          <a:chOff x="0" y="0"/>
+          <a:chExt cx="0" cy="0"/>
+        </a:xfrm>
+      </p:grpSpPr>
+      <p:sp>
+        <p:nvSpPr>
           <p:cNvPr id="2" name="Title 1"/>
           <p:cNvSpPr>
             <a:spLocks noGrp="1"/>
@@ -6420,25 +7234,10 @@
           <a:lstStyle/>
           <a:p>
             <a:r>
-              <a:rPr dirty="0"/>
-              <a:t>HTTP: </a:t>
-            </a:r>
-            <a:r>
-              <a:rPr lang="en-US" dirty="0"/>
-              <a:t>From </a:t>
-            </a:r>
-            <a:r>
-              <a:rPr dirty="0"/>
-              <a:t>Application </a:t>
-            </a:r>
-            <a:r>
-              <a:rPr lang="en-US" dirty="0"/>
-              <a:t>to </a:t>
-            </a:r>
-            <a:r>
-              <a:rPr dirty="0"/>
-              <a:t>Framework</a:t>
-            </a:r>
+              <a:rPr lang="en-US" dirty="0"/>
+              <a:t>Overview</a:t>
+            </a:r>
+            <a:endParaRPr dirty="0"/>
           </a:p>
         </p:txBody>
       </p:sp>
@@ -6588,229 +7387,6 @@
             <a:extLst>
               <a:ext uri="{FF2B5EF4-FFF2-40B4-BE49-F238E27FC236}">
                 <a16:creationId xmlns:a16="http://schemas.microsoft.com/office/drawing/2014/main" id="{8AC67E9E-C05B-E40E-B7C4-E7D69C8C91F8}"/>
-              </a:ext>
-            </a:extLst>
-          </p:cNvPr>
-          <p:cNvSpPr>
-            <a:spLocks noGrp="1"/>
-          </p:cNvSpPr>
-          <p:nvPr>
-            <p:ph type="sldNum" sz="quarter" idx="12"/>
-          </p:nvPr>
-        </p:nvSpPr>
-        <p:spPr/>
-        <p:txBody>
-          <a:bodyPr/>
-          <a:lstStyle/>
-          <a:p>
-            <a:fld id="{394597B6-99AE-8F4E-8AC4-338DBFD9B0E5}" type="slidenum">
-              <a:rPr lang="en-US" smtClean="0"/>
-              <a:t>8</a:t>
-            </a:fld>
-            <a:endParaRPr lang="en-US"/>
-          </a:p>
-        </p:txBody>
-      </p:sp>
-    </p:spTree>
-  </p:cSld>
-  <p:clrMapOvr>
-    <a:masterClrMapping/>
-  </p:clrMapOvr>
-</p:sld>
-</file>
-
-<file path=ppt/slides/slide9.xml><?xml version="1.0" encoding="utf-8"?>
-<p:sld xmlns:a="http://schemas.openxmlformats.org/drawingml/2006/main" xmlns:r="http://schemas.openxmlformats.org/officeDocument/2006/relationships" xmlns:p="http://schemas.openxmlformats.org/presentationml/2006/main">
-  <p:cSld>
-    <p:spTree>
-      <p:nvGrpSpPr>
-        <p:cNvPr id="1" name=""/>
-        <p:cNvGrpSpPr/>
-        <p:nvPr/>
-      </p:nvGrpSpPr>
-      <p:grpSpPr>
-        <a:xfrm>
-          <a:off x="0" y="0"/>
-          <a:ext cx="0" cy="0"/>
-          <a:chOff x="0" y="0"/>
-          <a:chExt cx="0" cy="0"/>
-        </a:xfrm>
-      </p:grpSpPr>
-      <p:sp>
-        <p:nvSpPr>
-          <p:cNvPr id="2" name="Title 1"/>
-          <p:cNvSpPr>
-            <a:spLocks noGrp="1"/>
-          </p:cNvSpPr>
-          <p:nvPr>
-            <p:ph type="title"/>
-          </p:nvPr>
-        </p:nvSpPr>
-        <p:spPr/>
-        <p:txBody>
-          <a:bodyPr/>
-          <a:lstStyle/>
-          <a:p>
-            <a:r>
-              <a:rPr dirty="0"/>
-              <a:t>Request</a:t>
-            </a:r>
-            <a:r>
-              <a:rPr lang="en-US" dirty="0"/>
-              <a:t>/</a:t>
-            </a:r>
-            <a:r>
-              <a:rPr dirty="0"/>
-              <a:t>Response</a:t>
-            </a:r>
-            <a:r>
-              <a:rPr lang="en-US" dirty="0"/>
-              <a:t> Protocol</a:t>
-            </a:r>
-            <a:endParaRPr dirty="0"/>
-          </a:p>
-        </p:txBody>
-      </p:sp>
-      <p:sp>
-        <p:nvSpPr>
-          <p:cNvPr id="3" name="Content Placeholder 2"/>
-          <p:cNvSpPr>
-            <a:spLocks noGrp="1"/>
-          </p:cNvSpPr>
-          <p:nvPr>
-            <p:ph idx="1"/>
-          </p:nvPr>
-        </p:nvSpPr>
-        <p:spPr/>
-        <p:txBody>
-          <a:bodyPr/>
-          <a:lstStyle/>
-          <a:p>
-            <a:r>
-              <a:rPr dirty="0"/>
-              <a:t>Request: </a:t>
-            </a:r>
-            <a:r>
-              <a:rPr lang="en-US" dirty="0"/>
-              <a:t>M</a:t>
-            </a:r>
-            <a:r>
-              <a:rPr dirty="0"/>
-              <a:t>ethod + </a:t>
-            </a:r>
-            <a:r>
-              <a:rPr lang="en-US" dirty="0"/>
-              <a:t>Resource (named by URL)</a:t>
-            </a:r>
-            <a:endParaRPr dirty="0"/>
-          </a:p>
-          <a:p>
-            <a:pPr lvl="1"/>
-            <a:r>
-              <a:rPr dirty="0"/>
-              <a:t>GET (retrieve), POST (submit), PUT (update), DELETE (remove)</a:t>
-            </a:r>
-          </a:p>
-          <a:p>
-            <a:r>
-              <a:rPr dirty="0"/>
-              <a:t>Response: 3-digit status code + reason phrase</a:t>
-            </a:r>
-          </a:p>
-          <a:p>
-            <a:pPr lvl="1"/>
-            <a:r>
-              <a:rPr dirty="0"/>
-              <a:t>2xx success</a:t>
-            </a:r>
-            <a:r>
-              <a:rPr lang="en-US" dirty="0"/>
-              <a:t>,</a:t>
-            </a:r>
-            <a:r>
-              <a:rPr dirty="0"/>
-              <a:t> 3xx redirect</a:t>
-            </a:r>
-            <a:r>
-              <a:rPr lang="en-US" dirty="0"/>
-              <a:t>,</a:t>
-            </a:r>
-            <a:r>
-              <a:rPr dirty="0"/>
-              <a:t> 4xx client error</a:t>
-            </a:r>
-            <a:r>
-              <a:rPr lang="en-US" dirty="0"/>
-              <a:t>,</a:t>
-            </a:r>
-            <a:r>
-              <a:rPr dirty="0"/>
-              <a:t> 5xx server error</a:t>
-            </a:r>
-          </a:p>
-          <a:p>
-            <a:r>
-              <a:rPr dirty="0"/>
-              <a:t>HTML and HTTP are companion standards</a:t>
-            </a:r>
-            <a:endParaRPr lang="en-US" dirty="0"/>
-          </a:p>
-          <a:p>
-            <a:pPr lvl="1"/>
-            <a:r>
-              <a:rPr lang="en-US" dirty="0"/>
-              <a:t>D</a:t>
-            </a:r>
-            <a:r>
-              <a:rPr dirty="0"/>
-              <a:t>ata format separate from transfer protocol</a:t>
-            </a:r>
-            <a:endParaRPr lang="en-US" dirty="0"/>
-          </a:p>
-          <a:p>
-            <a:pPr lvl="1"/>
-            <a:r>
-              <a:rPr lang="en-US" dirty="0"/>
-              <a:t>Easy to substitute other formats (e.g., XML)</a:t>
-            </a:r>
-            <a:endParaRPr dirty="0"/>
-          </a:p>
-        </p:txBody>
-      </p:sp>
-      <p:sp>
-        <p:nvSpPr>
-          <p:cNvPr id="4" name="Footer Placeholder 3">
-            <a:extLst>
-              <a:ext uri="{FF2B5EF4-FFF2-40B4-BE49-F238E27FC236}">
-                <a16:creationId xmlns:a16="http://schemas.microsoft.com/office/drawing/2014/main" id="{FDF923E9-4193-0A34-E11B-408C9FB47E02}"/>
-              </a:ext>
-            </a:extLst>
-          </p:cNvPr>
-          <p:cNvSpPr>
-            <a:spLocks noGrp="1"/>
-          </p:cNvSpPr>
-          <p:nvPr>
-            <p:ph type="ftr" sz="quarter" idx="11"/>
-          </p:nvPr>
-        </p:nvSpPr>
-        <p:spPr/>
-        <p:txBody>
-          <a:bodyPr/>
-          <a:lstStyle/>
-          <a:p>
-            <a:r>
-              <a:rPr lang="en-US"/>
-              <a:t>Copyright Peterson &amp; Davie, 2026</a:t>
-            </a:r>
-          </a:p>
-        </p:txBody>
-      </p:sp>
-      <p:sp>
-        <p:nvSpPr>
-          <p:cNvPr id="5" name="Slide Number Placeholder 4">
-            <a:extLst>
-              <a:ext uri="{FF2B5EF4-FFF2-40B4-BE49-F238E27FC236}">
-                <a16:creationId xmlns:a16="http://schemas.microsoft.com/office/drawing/2014/main" id="{DAA12770-960D-C5E6-6A20-8450B71DAD66}"/>
               </a:ext>
             </a:extLst>
           </p:cNvPr>

--- a/resources/slides/02_applications.pptx
+++ b/resources/slides/02_applications.pptx
@@ -1,11 +1,11 @@
 
 <file path=ppt/presentation.xml><?xml version="1.0" encoding="utf-8"?>
-<p:presentation xmlns:a="http://schemas.openxmlformats.org/drawingml/2006/main" xmlns:r="http://schemas.openxmlformats.org/officeDocument/2006/relationships" xmlns:p="http://schemas.openxmlformats.org/presentationml/2006/main" showSpecialPlsOnTitleSld="0" saveSubsetFonts="1" autoCompressPictures="0">
+<p:presentation xmlns:a="http://schemas.openxmlformats.org/drawingml/2006/main" xmlns:r="http://schemas.openxmlformats.org/officeDocument/2006/relationships" xmlns:p="http://schemas.openxmlformats.org/presentationml/2006/main" saveSubsetFonts="1" autoCompressPictures="0">
   <p:sldMasterIdLst>
     <p:sldMasterId id="2147483648" r:id="rId1"/>
   </p:sldMasterIdLst>
   <p:notesMasterIdLst>
-    <p:notesMasterId r:id="rId23"/>
+    <p:notesMasterId r:id="rId25"/>
   </p:notesMasterIdLst>
   <p:sldIdLst>
     <p:sldId id="256" r:id="rId2"/>
@@ -15,20 +15,22 @@
     <p:sldId id="260" r:id="rId6"/>
     <p:sldId id="261" r:id="rId7"/>
     <p:sldId id="262" r:id="rId8"/>
-    <p:sldId id="275" r:id="rId9"/>
-    <p:sldId id="263" r:id="rId10"/>
-    <p:sldId id="264" r:id="rId11"/>
-    <p:sldId id="265" r:id="rId12"/>
-    <p:sldId id="266" r:id="rId13"/>
-    <p:sldId id="267" r:id="rId14"/>
-    <p:sldId id="268" r:id="rId15"/>
-    <p:sldId id="276" r:id="rId16"/>
-    <p:sldId id="269" r:id="rId17"/>
-    <p:sldId id="270" r:id="rId18"/>
-    <p:sldId id="271" r:id="rId19"/>
-    <p:sldId id="277" r:id="rId20"/>
-    <p:sldId id="273" r:id="rId21"/>
-    <p:sldId id="274" r:id="rId22"/>
+    <p:sldId id="278" r:id="rId9"/>
+    <p:sldId id="279" r:id="rId10"/>
+    <p:sldId id="275" r:id="rId11"/>
+    <p:sldId id="263" r:id="rId12"/>
+    <p:sldId id="264" r:id="rId13"/>
+    <p:sldId id="265" r:id="rId14"/>
+    <p:sldId id="266" r:id="rId15"/>
+    <p:sldId id="267" r:id="rId16"/>
+    <p:sldId id="268" r:id="rId17"/>
+    <p:sldId id="276" r:id="rId18"/>
+    <p:sldId id="269" r:id="rId19"/>
+    <p:sldId id="270" r:id="rId20"/>
+    <p:sldId id="271" r:id="rId21"/>
+    <p:sldId id="277" r:id="rId22"/>
+    <p:sldId id="273" r:id="rId23"/>
+    <p:sldId id="274" r:id="rId24"/>
   </p:sldIdLst>
   <p:sldSz cx="12192000" cy="6858000"/>
   <p:notesSz cx="6858000" cy="9144000"/>
@@ -217,7 +219,7 @@
           <a:p>
             <a:fld id="{D3DF2789-8AA8-B642-BB33-D304F9683406}" type="datetimeFigureOut">
               <a:rPr lang="en-US" smtClean="0"/>
-              <a:t>9/12/26</a:t>
+              <a:t>9/16/26</a:t>
             </a:fld>
             <a:endParaRPr lang="en-US"/>
           </a:p>
@@ -737,9 +739,9 @@
           <a:bodyPr/>
           <a:lstStyle/>
           <a:p>
-            <a:fld id="{48083564-4C95-7249-8F3E-E0BAF15EED1F}" type="datetime1">
+            <a:fld id="{75A92500-32E8-5144-9E57-4D09EC85014B}" type="datetime1">
               <a:rPr lang="en-US" smtClean="0"/>
-              <a:t>9/12/26</a:t>
+              <a:t>9/16/26</a:t>
             </a:fld>
             <a:endParaRPr lang="en-US"/>
           </a:p>
@@ -972,9 +974,9 @@
           <a:bodyPr/>
           <a:lstStyle/>
           <a:p>
-            <a:fld id="{CC015439-64B1-CE4E-8D65-9A05746CEBEF}" type="datetimeFigureOut">
+            <a:fld id="{7890FD9E-92DF-C945-9CC3-C8761E6DD53E}" type="datetime1">
               <a:rPr lang="en-US" smtClean="0"/>
-              <a:t>9/12/26</a:t>
+              <a:t>9/16/26</a:t>
             </a:fld>
             <a:endParaRPr lang="en-US"/>
           </a:p>
@@ -1001,7 +1003,10 @@
           <a:bodyPr/>
           <a:lstStyle/>
           <a:p>
-            <a:endParaRPr lang="en-US"/>
+            <a:r>
+              <a:rPr lang="en-US"/>
+              <a:t>Copyright Peterson &amp; Davie, 2026</a:t>
+            </a:r>
           </a:p>
         </p:txBody>
       </p:sp>
@@ -1222,9 +1227,9 @@
           <a:bodyPr/>
           <a:lstStyle/>
           <a:p>
-            <a:fld id="{641350B5-1D53-6044-A5E6-B5385B772E16}" type="datetime1">
+            <a:fld id="{97E175B6-024D-E744-A288-90142305A663}" type="datetime1">
               <a:rPr lang="en-US" smtClean="0"/>
-              <a:t>9/12/26</a:t>
+              <a:t>9/16/26</a:t>
             </a:fld>
             <a:endParaRPr lang="en-US"/>
           </a:p>
@@ -1490,9 +1495,9 @@
           <a:bodyPr/>
           <a:lstStyle/>
           <a:p>
-            <a:fld id="{03FD4BE1-3C70-ED46-A67A-E95C69006502}" type="datetime1">
+            <a:fld id="{65502AE8-C9C0-3442-997B-0C9665747156}" type="datetime1">
               <a:rPr lang="en-US" smtClean="0"/>
-              <a:t>9/12/26</a:t>
+              <a:t>9/16/26</a:t>
             </a:fld>
             <a:endParaRPr lang="en-US"/>
           </a:p>
@@ -1634,9 +1639,9 @@
           <a:bodyPr/>
           <a:lstStyle/>
           <a:p>
-            <a:fld id="{A383EB3D-39F3-3640-BD20-FFDEB0897022}" type="datetime1">
+            <a:fld id="{B21008B6-A266-0D4E-9E72-AA29D695C536}" type="datetime1">
               <a:rPr lang="en-US" smtClean="0"/>
-              <a:t>9/12/26</a:t>
+              <a:t>9/16/26</a:t>
             </a:fld>
             <a:endParaRPr lang="en-US"/>
           </a:p>
@@ -1840,9 +1845,9 @@
             </a:lvl1pPr>
           </a:lstStyle>
           <a:p>
-            <a:fld id="{0BEFCE9E-DC16-DC4E-B51E-937F2F381D09}" type="datetime1">
+            <a:fld id="{E52AE8B4-62F9-8243-A1C0-4FE715F4AE61}" type="datetime1">
               <a:rPr lang="en-US" smtClean="0"/>
-              <a:t>9/12/26</a:t>
+              <a:t>9/16/26</a:t>
             </a:fld>
             <a:endParaRPr lang="en-US"/>
           </a:p>
@@ -2046,7 +2051,7 @@
     <p:sldLayoutId id="2147483652" r:id="rId4"/>
     <p:sldLayoutId id="2147483654" r:id="rId5"/>
   </p:sldLayoutIdLst>
-  <p:hf hdr="0" dt="0"/>
+  <p:hf sldNum="0" hdr="0" dt="0"/>
   <p:txStyles>
     <p:titleStyle>
       <a:lvl1pPr algn="l" defTabSz="914400" rtl="0" eaLnBrk="1" latinLnBrk="0" hangingPunct="1">
@@ -2392,6 +2397,34 @@
           </a:p>
         </p:txBody>
       </p:sp>
+      <p:sp>
+        <p:nvSpPr>
+          <p:cNvPr id="4" name="Footer Placeholder 3">
+            <a:extLst>
+              <a:ext uri="{FF2B5EF4-FFF2-40B4-BE49-F238E27FC236}">
+                <a16:creationId xmlns:a16="http://schemas.microsoft.com/office/drawing/2014/main" id="{721DB788-8A70-431B-817B-457DA025CD1C}"/>
+              </a:ext>
+            </a:extLst>
+          </p:cNvPr>
+          <p:cNvSpPr>
+            <a:spLocks noGrp="1"/>
+          </p:cNvSpPr>
+          <p:nvPr>
+            <p:ph type="ftr" sz="quarter" idx="11"/>
+          </p:nvPr>
+        </p:nvSpPr>
+        <p:spPr/>
+        <p:txBody>
+          <a:bodyPr/>
+          <a:lstStyle/>
+          <a:p>
+            <a:r>
+              <a:rPr lang="en-US"/>
+              <a:t>Copyright Peterson &amp; Davie, 2026</a:t>
+            </a:r>
+          </a:p>
+        </p:txBody>
+      </p:sp>
     </p:spTree>
   </p:cSld>
   <p:clrMapOvr>
@@ -2419,151 +2452,10 @@
       </p:grpSpPr>
       <p:sp>
         <p:nvSpPr>
-          <p:cNvPr id="2" name="Title 1"/>
-          <p:cNvSpPr>
-            <a:spLocks noGrp="1"/>
-          </p:cNvSpPr>
-          <p:nvPr>
-            <p:ph type="title"/>
-          </p:nvPr>
-        </p:nvSpPr>
-        <p:spPr/>
-        <p:txBody>
-          <a:bodyPr/>
-          <a:lstStyle/>
-          <a:p>
-            <a:r>
-              <a:rPr dirty="0"/>
-              <a:t>Request</a:t>
-            </a:r>
-            <a:r>
-              <a:rPr lang="en-US" dirty="0"/>
-              <a:t>/</a:t>
-            </a:r>
-            <a:r>
-              <a:rPr dirty="0"/>
-              <a:t>Response</a:t>
-            </a:r>
-            <a:r>
-              <a:rPr lang="en-US" dirty="0"/>
-              <a:t> Protocol</a:t>
-            </a:r>
-            <a:endParaRPr dirty="0"/>
-          </a:p>
-        </p:txBody>
-      </p:sp>
-      <p:sp>
-        <p:nvSpPr>
-          <p:cNvPr id="3" name="Content Placeholder 2"/>
-          <p:cNvSpPr>
-            <a:spLocks noGrp="1"/>
-          </p:cNvSpPr>
-          <p:nvPr>
-            <p:ph idx="1"/>
-          </p:nvPr>
-        </p:nvSpPr>
-        <p:spPr/>
-        <p:txBody>
-          <a:bodyPr/>
-          <a:lstStyle/>
-          <a:p>
-            <a:r>
-              <a:rPr dirty="0"/>
-              <a:t>Request: </a:t>
-            </a:r>
-            <a:r>
-              <a:rPr lang="en-US" dirty="0"/>
-              <a:t>M</a:t>
-            </a:r>
-            <a:r>
-              <a:rPr dirty="0"/>
-              <a:t>ethod + </a:t>
-            </a:r>
-            <a:r>
-              <a:rPr lang="en-US" dirty="0"/>
-              <a:t>Resource (named by URL)</a:t>
-            </a:r>
-            <a:endParaRPr dirty="0"/>
-          </a:p>
-          <a:p>
-            <a:pPr lvl="1"/>
-            <a:r>
-              <a:rPr dirty="0"/>
-              <a:t>GET (retrieve), POST (submit), PUT (update), DELETE (remove)</a:t>
-            </a:r>
-          </a:p>
-          <a:p>
-            <a:r>
-              <a:rPr dirty="0"/>
-              <a:t>Response: 3-digit status code + reason phrase</a:t>
-            </a:r>
-          </a:p>
-          <a:p>
-            <a:pPr lvl="1"/>
-            <a:r>
-              <a:rPr dirty="0"/>
-              <a:t>2xx success</a:t>
-            </a:r>
-            <a:r>
-              <a:rPr lang="en-US" dirty="0"/>
-              <a:t>,</a:t>
-            </a:r>
-            <a:r>
-              <a:rPr dirty="0"/>
-              <a:t> 3xx redirect</a:t>
-            </a:r>
-            <a:r>
-              <a:rPr lang="en-US" dirty="0"/>
-              <a:t>,</a:t>
-            </a:r>
-            <a:r>
-              <a:rPr dirty="0"/>
-              <a:t> 4xx client error</a:t>
-            </a:r>
-            <a:r>
-              <a:rPr lang="en-US" dirty="0"/>
-              <a:t>,</a:t>
-            </a:r>
-            <a:r>
-              <a:rPr dirty="0"/>
-              <a:t> 5xx server error</a:t>
-            </a:r>
-          </a:p>
-          <a:p>
-            <a:r>
-              <a:rPr dirty="0"/>
-              <a:t>HTML and HTTP are companion standards</a:t>
-            </a:r>
-            <a:endParaRPr lang="en-US" dirty="0"/>
-          </a:p>
-          <a:p>
-            <a:pPr lvl="1"/>
-            <a:r>
-              <a:rPr lang="en-US" dirty="0"/>
-              <a:t>D</a:t>
-            </a:r>
-            <a:r>
-              <a:rPr dirty="0"/>
-              <a:t>ata format separate from transfer protocol</a:t>
-            </a:r>
-            <a:endParaRPr lang="en-US" dirty="0"/>
-          </a:p>
-          <a:p>
-            <a:pPr lvl="1"/>
-            <a:r>
-              <a:rPr lang="en-US" dirty="0"/>
-              <a:t>Easy to substitute other formats (e.g., XML)</a:t>
-            </a:r>
-            <a:endParaRPr dirty="0"/>
-          </a:p>
-        </p:txBody>
-      </p:sp>
-      <p:sp>
-        <p:nvSpPr>
-          <p:cNvPr id="4" name="Footer Placeholder 3">
+          <p:cNvPr id="2" name="Title 1">
             <a:extLst>
               <a:ext uri="{FF2B5EF4-FFF2-40B4-BE49-F238E27FC236}">
-                <a16:creationId xmlns:a16="http://schemas.microsoft.com/office/drawing/2014/main" id="{FDF923E9-4193-0A34-E11B-408C9FB47E02}"/>
+                <a16:creationId xmlns:a16="http://schemas.microsoft.com/office/drawing/2014/main" id="{36872019-9549-6622-0FE7-0C1C04BFDEAE}"/>
               </a:ext>
             </a:extLst>
           </p:cNvPr>
@@ -2571,7 +2463,7 @@
             <a:spLocks noGrp="1"/>
           </p:cNvSpPr>
           <p:nvPr>
-            <p:ph type="ftr" sz="quarter" idx="11"/>
+            <p:ph type="ctrTitle"/>
           </p:nvPr>
         </p:nvSpPr>
         <p:spPr/>
@@ -2580,18 +2472,18 @@
           <a:lstStyle/>
           <a:p>
             <a:r>
-              <a:rPr lang="en-US"/>
-              <a:t>Copyright Peterson &amp; Davie, 2026</a:t>
-            </a:r>
-          </a:p>
-        </p:txBody>
-      </p:sp>
-      <p:sp>
-        <p:nvSpPr>
-          <p:cNvPr id="5" name="Slide Number Placeholder 4">
+              <a:rPr lang="en-US" dirty="0"/>
+              <a:t>HTTP: From App to Framework</a:t>
+            </a:r>
+          </a:p>
+        </p:txBody>
+      </p:sp>
+      <p:sp>
+        <p:nvSpPr>
+          <p:cNvPr id="3" name="Footer Placeholder 2">
             <a:extLst>
               <a:ext uri="{FF2B5EF4-FFF2-40B4-BE49-F238E27FC236}">
-                <a16:creationId xmlns:a16="http://schemas.microsoft.com/office/drawing/2014/main" id="{DAA12770-960D-C5E6-6A20-8450B71DAD66}"/>
+                <a16:creationId xmlns:a16="http://schemas.microsoft.com/office/drawing/2014/main" id="{8A1567C0-0A57-6BB8-670A-C6108CA413A8}"/>
               </a:ext>
             </a:extLst>
           </p:cNvPr>
@@ -2599,7 +2491,7 @@
             <a:spLocks noGrp="1"/>
           </p:cNvSpPr>
           <p:nvPr>
-            <p:ph type="sldNum" sz="quarter" idx="12"/>
+            <p:ph type="ftr" sz="quarter" idx="11"/>
           </p:nvPr>
         </p:nvSpPr>
         <p:spPr/>
@@ -2607,15 +2499,19 @@
           <a:bodyPr/>
           <a:lstStyle/>
           <a:p>
-            <a:fld id="{394597B6-99AE-8F4E-8AC4-338DBFD9B0E5}" type="slidenum">
-              <a:rPr lang="en-US" smtClean="0"/>
-              <a:t>10</a:t>
-            </a:fld>
-            <a:endParaRPr lang="en-US"/>
+            <a:r>
+              <a:rPr lang="en-US"/>
+              <a:t>Copyright Peterson &amp; Davie, 2026</a:t>
+            </a:r>
           </a:p>
         </p:txBody>
       </p:sp>
     </p:spTree>
+    <p:extLst>
+      <p:ext uri="{BB962C8B-B14F-4D97-AF65-F5344CB8AC3E}">
+        <p14:creationId xmlns:p14="http://schemas.microsoft.com/office/powerpoint/2010/main" val="2632201489"/>
+      </p:ext>
+    </p:extLst>
   </p:cSld>
   <p:clrMapOvr>
     <a:masterClrMapping/>
@@ -2656,8 +2552,10 @@
           <a:lstStyle/>
           <a:p>
             <a:r>
-              <a:t>Connection Overhead</a:t>
-            </a:r>
+              <a:rPr lang="en-US" dirty="0"/>
+              <a:t>Overview</a:t>
+            </a:r>
+            <a:endParaRPr dirty="0"/>
           </a:p>
         </p:txBody>
       </p:sp>
@@ -2673,159 +2571,85 @@
         </p:nvSpPr>
         <p:spPr>
           <a:xfrm>
-            <a:off x="838079" y="1476360"/>
-            <a:ext cx="7049998" cy="4748170"/>
+            <a:off x="838080" y="1476360"/>
+            <a:ext cx="5181480" cy="4351320"/>
           </a:xfrm>
         </p:spPr>
         <p:txBody>
-          <a:bodyPr>
-            <a:normAutofit lnSpcReduction="10000"/>
-          </a:bodyPr>
-          <a:lstStyle/>
-          <a:p>
-            <a:r>
-              <a:rPr sz="2400" dirty="0"/>
-              <a:t>HTTP 1.0</a:t>
-            </a:r>
-            <a:endParaRPr lang="en-US" sz="2400" dirty="0"/>
-          </a:p>
-          <a:p>
-            <a:pPr lvl="1"/>
-            <a:r>
-              <a:rPr lang="en-US" sz="2000" dirty="0"/>
-              <a:t>O</a:t>
-            </a:r>
-            <a:r>
-              <a:rPr sz="2000" dirty="0"/>
-              <a:t>ne TCP connection per object</a:t>
-            </a:r>
-          </a:p>
-          <a:p>
-            <a:pPr lvl="1"/>
-            <a:r>
-              <a:rPr lang="en-US" sz="2000" dirty="0"/>
+          <a:bodyPr/>
+          <a:lstStyle/>
+          <a:p>
+            <a:r>
+              <a:rPr dirty="0"/>
+              <a:t>HTTP began as the protocol of the World Wide Web</a:t>
+            </a:r>
+          </a:p>
+          <a:p>
+            <a:r>
+              <a:rPr dirty="0"/>
+              <a:t>Has evolved into </a:t>
+            </a:r>
+            <a:r>
+              <a:rPr lang="en-US" dirty="0"/>
+              <a:t>a</a:t>
+            </a:r>
+            <a:r>
+              <a:rPr dirty="0"/>
+              <a:t> framework for Internet applications</a:t>
+            </a:r>
+          </a:p>
+          <a:p>
+            <a:pPr lvl="1"/>
+            <a:r>
+              <a:rPr dirty="0"/>
+              <a:t>Mobile apps, video streaming</a:t>
+            </a:r>
+            <a:r>
+              <a:rPr lang="en-US" dirty="0"/>
+              <a:t>…</a:t>
+            </a:r>
+            <a:endParaRPr dirty="0"/>
+          </a:p>
+          <a:p>
+            <a:r>
+              <a:rPr lang="en-US" dirty="0"/>
+              <a:t>R</a:t>
+            </a:r>
+            <a:r>
+              <a:rPr dirty="0"/>
+              <a:t>equest/</a:t>
+            </a:r>
+            <a:r>
+              <a:rPr lang="en-US" dirty="0"/>
+              <a:t>R</a:t>
+            </a:r>
+            <a:r>
+              <a:rPr dirty="0"/>
+              <a:t>esponse </a:t>
+            </a:r>
+            <a:r>
+              <a:rPr lang="en-US" dirty="0"/>
               <a:t>P</a:t>
             </a:r>
             <a:r>
-              <a:rPr sz="2000" dirty="0"/>
-              <a:t>age with 12 images → 13 TCP </a:t>
-            </a:r>
-            <a:r>
-              <a:rPr lang="en-US" sz="2000" dirty="0"/>
-              <a:t>connections</a:t>
-            </a:r>
-          </a:p>
-          <a:p>
-            <a:pPr lvl="1"/>
-            <a:r>
-              <a:rPr lang="en-US" sz="2000" dirty="0"/>
-              <a:t>TLS adds additional round trips</a:t>
-            </a:r>
-            <a:endParaRPr sz="2000" dirty="0"/>
-          </a:p>
-          <a:p>
-            <a:r>
-              <a:rPr sz="2400" dirty="0"/>
-              <a:t>HTTP 1.1</a:t>
-            </a:r>
-            <a:endParaRPr lang="en-US" sz="2400" dirty="0"/>
-          </a:p>
-          <a:p>
-            <a:pPr lvl="1"/>
-            <a:r>
-              <a:rPr lang="en-US" sz="2000" dirty="0"/>
-              <a:t>P</a:t>
-            </a:r>
-            <a:r>
-              <a:rPr sz="2000" dirty="0"/>
-              <a:t>ersistent connections</a:t>
-            </a:r>
-            <a:endParaRPr lang="en-US" sz="2000" dirty="0"/>
-          </a:p>
-          <a:p>
-            <a:pPr lvl="1"/>
-            <a:r>
-              <a:rPr lang="en-US" sz="2000" dirty="0"/>
-              <a:t>R</a:t>
-            </a:r>
-            <a:r>
-              <a:rPr sz="2000" dirty="0"/>
-              <a:t>euse one TCP for multiple requests</a:t>
-            </a:r>
-          </a:p>
-          <a:p>
-            <a:r>
-              <a:rPr sz="2400" dirty="0"/>
-              <a:t>HTTP/2</a:t>
-            </a:r>
-            <a:endParaRPr lang="en-US" sz="2400" dirty="0"/>
-          </a:p>
-          <a:p>
-            <a:pPr lvl="1"/>
-            <a:r>
-              <a:rPr lang="en-US" sz="2000" dirty="0"/>
-              <a:t>M</a:t>
-            </a:r>
-            <a:r>
-              <a:rPr sz="2000" dirty="0"/>
-              <a:t>ultiplexed streams</a:t>
-            </a:r>
-            <a:endParaRPr lang="en-US" sz="2000" dirty="0"/>
-          </a:p>
-          <a:p>
-            <a:pPr lvl="1"/>
-            <a:r>
-              <a:rPr lang="en-US" sz="2000" dirty="0"/>
-              <a:t>C</a:t>
-            </a:r>
-            <a:r>
-              <a:rPr sz="2000" dirty="0"/>
-              <a:t>oncurrent request/response pairs on one TCP</a:t>
-            </a:r>
-          </a:p>
-          <a:p>
-            <a:r>
-              <a:rPr sz="2400" dirty="0"/>
-              <a:t>HTTP/3 </a:t>
-            </a:r>
-            <a:r>
-              <a:rPr lang="en-US" sz="2400" dirty="0"/>
-              <a:t>&amp;</a:t>
-            </a:r>
-            <a:r>
-              <a:rPr sz="2400" dirty="0"/>
-              <a:t> QUIC</a:t>
-            </a:r>
-            <a:endParaRPr lang="en-US" sz="2400" dirty="0"/>
-          </a:p>
-          <a:p>
-            <a:pPr lvl="1"/>
-            <a:r>
-              <a:rPr lang="en-US" sz="2000" dirty="0"/>
-              <a:t>R</a:t>
-            </a:r>
-            <a:r>
-              <a:rPr sz="2000" dirty="0"/>
-              <a:t>eplaces TCP entirely </a:t>
-            </a:r>
-            <a:endParaRPr lang="en-US" sz="2000" dirty="0"/>
-          </a:p>
-          <a:p>
-            <a:pPr lvl="1"/>
-            <a:r>
-              <a:rPr lang="en-US" sz="2000" dirty="0"/>
-              <a:t>See </a:t>
-            </a:r>
-            <a:r>
-              <a:rPr sz="2000" dirty="0"/>
-              <a:t>Chapter 15</a:t>
-            </a:r>
+              <a:rPr dirty="0"/>
+              <a:t>rotocol</a:t>
+            </a:r>
+            <a:endParaRPr lang="en-US" dirty="0"/>
+          </a:p>
+          <a:p>
+            <a:pPr lvl="1"/>
+            <a:r>
+              <a:rPr lang="en-US" dirty="0"/>
+              <a:t>and more…</a:t>
+            </a:r>
+            <a:endParaRPr dirty="0"/>
           </a:p>
         </p:txBody>
       </p:sp>
       <p:pic>
         <p:nvPicPr>
-          <p:cNvPr id="4" name="Picture 3" descr="rtt-overhead.png"/>
+          <p:cNvPr id="4" name="Picture 3" descr="firefox.png"/>
           <p:cNvPicPr>
             <a:picLocks noChangeAspect="1"/>
           </p:cNvPicPr>
@@ -2839,8 +2663,8 @@
         </p:blipFill>
         <p:spPr>
           <a:xfrm>
-            <a:off x="7065909" y="1476360"/>
-            <a:ext cx="4539815" cy="4351320"/>
+            <a:off x="6172200" y="1705105"/>
+            <a:ext cx="5181480" cy="3893829"/>
           </a:xfrm>
           <a:prstGeom prst="rect">
             <a:avLst/>
@@ -2852,7 +2676,7 @@
           <p:cNvPr id="5" name="Footer Placeholder 4">
             <a:extLst>
               <a:ext uri="{FF2B5EF4-FFF2-40B4-BE49-F238E27FC236}">
-                <a16:creationId xmlns:a16="http://schemas.microsoft.com/office/drawing/2014/main" id="{139C1BA4-A1FF-6732-7AFE-39F9765EB8B5}"/>
+                <a16:creationId xmlns:a16="http://schemas.microsoft.com/office/drawing/2014/main" id="{BB879E49-DB51-166E-BF20-94F8E02F9D72}"/>
               </a:ext>
             </a:extLst>
           </p:cNvPr>
@@ -2872,35 +2696,6 @@
               <a:rPr lang="en-US"/>
               <a:t>Copyright Peterson &amp; Davie, 2026</a:t>
             </a:r>
-          </a:p>
-        </p:txBody>
-      </p:sp>
-      <p:sp>
-        <p:nvSpPr>
-          <p:cNvPr id="6" name="Slide Number Placeholder 5">
-            <a:extLst>
-              <a:ext uri="{FF2B5EF4-FFF2-40B4-BE49-F238E27FC236}">
-                <a16:creationId xmlns:a16="http://schemas.microsoft.com/office/drawing/2014/main" id="{921A9CA7-942D-DF7A-F75F-27FC8E0E8556}"/>
-              </a:ext>
-            </a:extLst>
-          </p:cNvPr>
-          <p:cNvSpPr>
-            <a:spLocks noGrp="1"/>
-          </p:cNvSpPr>
-          <p:nvPr>
-            <p:ph type="sldNum" sz="quarter" idx="12"/>
-          </p:nvPr>
-        </p:nvSpPr>
-        <p:spPr/>
-        <p:txBody>
-          <a:bodyPr/>
-          <a:lstStyle/>
-          <a:p>
-            <a:fld id="{394597B6-99AE-8F4E-8AC4-338DBFD9B0E5}" type="slidenum">
-              <a:rPr lang="en-US" smtClean="0"/>
-              <a:t>11</a:t>
-            </a:fld>
-            <a:endParaRPr lang="en-US"/>
           </a:p>
         </p:txBody>
       </p:sp>
@@ -2945,8 +2740,20 @@
           <a:lstStyle/>
           <a:p>
             <a:r>
-              <a:rPr lang="en-US" dirty="0"/>
-              <a:t>Naming Scheme</a:t>
+              <a:rPr dirty="0"/>
+              <a:t>Request</a:t>
+            </a:r>
+            <a:r>
+              <a:rPr lang="en-US" dirty="0"/>
+              <a:t>/</a:t>
+            </a:r>
+            <a:r>
+              <a:rPr dirty="0"/>
+              <a:t>Response</a:t>
+            </a:r>
+            <a:r>
+              <a:rPr lang="en-US" dirty="0"/>
+              <a:t> Protocol</a:t>
             </a:r>
             <a:endParaRPr dirty="0"/>
           </a:p>
@@ -2962,19 +2769,77 @@
             <p:ph idx="1"/>
           </p:nvPr>
         </p:nvSpPr>
-        <p:spPr>
-          <a:xfrm>
-            <a:off x="838199" y="1548225"/>
-            <a:ext cx="10751545" cy="4351338"/>
-          </a:xfrm>
-        </p:spPr>
+        <p:spPr/>
         <p:txBody>
           <a:bodyPr/>
           <a:lstStyle/>
           <a:p>
             <a:r>
               <a:rPr dirty="0"/>
-              <a:t>URI: Uniform Resource Identifier</a:t>
+              <a:t>Request: </a:t>
+            </a:r>
+            <a:r>
+              <a:rPr lang="en-US" dirty="0"/>
+              <a:t>M</a:t>
+            </a:r>
+            <a:r>
+              <a:rPr dirty="0"/>
+              <a:t>ethod + </a:t>
+            </a:r>
+            <a:r>
+              <a:rPr lang="en-US" dirty="0"/>
+              <a:t>Resource (named by URL)</a:t>
+            </a:r>
+            <a:endParaRPr dirty="0"/>
+          </a:p>
+          <a:p>
+            <a:pPr lvl="1"/>
+            <a:r>
+              <a:rPr dirty="0"/>
+              <a:t>GET (retrieve), POST (submit), PUT (update), DELETE (remove)</a:t>
+            </a:r>
+          </a:p>
+          <a:p>
+            <a:r>
+              <a:rPr dirty="0"/>
+              <a:t>Response: 3-digit status code + reason phrase</a:t>
+            </a:r>
+          </a:p>
+          <a:p>
+            <a:pPr lvl="1"/>
+            <a:r>
+              <a:rPr dirty="0"/>
+              <a:t>2xx success</a:t>
+            </a:r>
+            <a:r>
+              <a:rPr lang="en-US" dirty="0"/>
+              <a:t>,</a:t>
+            </a:r>
+            <a:r>
+              <a:rPr dirty="0"/>
+              <a:t> 3xx redirect</a:t>
+            </a:r>
+            <a:r>
+              <a:rPr lang="en-US" dirty="0"/>
+              <a:t>,</a:t>
+            </a:r>
+            <a:r>
+              <a:rPr dirty="0"/>
+              <a:t> 4xx client error</a:t>
+            </a:r>
+            <a:r>
+              <a:rPr lang="en-US" dirty="0"/>
+              <a:t>,</a:t>
+            </a:r>
+            <a:r>
+              <a:rPr dirty="0"/>
+              <a:t> 5xx server error</a:t>
+            </a:r>
+          </a:p>
+          <a:p>
+            <a:r>
+              <a:rPr dirty="0"/>
+              <a:t>HTML and HTTP are companion standards</a:t>
             </a:r>
             <a:endParaRPr lang="en-US" dirty="0"/>
           </a:p>
@@ -2982,127 +2847,19 @@
             <a:pPr lvl="1"/>
             <a:r>
               <a:rPr lang="en-US" dirty="0"/>
-              <a:t>N</a:t>
-            </a:r>
-            <a:r>
-              <a:rPr dirty="0"/>
-              <a:t>ames any resource on the Internet</a:t>
-            </a:r>
-          </a:p>
-          <a:p>
-            <a:pPr lvl="1"/>
-            <a:r>
-              <a:rPr dirty="0"/>
-              <a:t>Format: scheme + scheme-specific part</a:t>
-            </a:r>
-          </a:p>
-          <a:p>
-            <a:r>
-              <a:rPr dirty="0"/>
-              <a:t>URL: </a:t>
-            </a:r>
-            <a:r>
-              <a:rPr lang="en-US" dirty="0"/>
-              <a:t>Uniform Resource Locator</a:t>
-            </a:r>
-          </a:p>
-          <a:p>
-            <a:pPr lvl="1"/>
-            <a:r>
-              <a:rPr dirty="0"/>
-              <a:t>URI that also locates the resource</a:t>
-            </a:r>
-          </a:p>
-          <a:p>
-            <a:pPr lvl="1"/>
-            <a:r>
-              <a:rPr sz="2300" dirty="0">
-                <a:latin typeface="Lucida Sans" panose="020B0602030504020204" pitchFamily="34" charset="77"/>
-              </a:rPr>
-              <a:t>https://</a:t>
-            </a:r>
-            <a:r>
-              <a:rPr sz="2300" dirty="0" err="1">
-                <a:latin typeface="Lucida Sans" panose="020B0602030504020204" pitchFamily="34" charset="77"/>
-              </a:rPr>
-              <a:t>book.systemsapproach.org</a:t>
-            </a:r>
-            <a:r>
-              <a:rPr sz="2300" dirty="0">
-                <a:latin typeface="Lucida Sans" panose="020B0602030504020204" pitchFamily="34" charset="77"/>
-              </a:rPr>
-              <a:t>/</a:t>
-            </a:r>
-            <a:r>
-              <a:rPr sz="2300" dirty="0" err="1">
-                <a:latin typeface="Lucida Sans" panose="020B0602030504020204" pitchFamily="34" charset="77"/>
-              </a:rPr>
-              <a:t>index.html</a:t>
-            </a:r>
-            <a:r>
-              <a:rPr lang="en-US" sz="2300" dirty="0">
-                <a:latin typeface="Lucida Sans" panose="020B0602030504020204" pitchFamily="34" charset="77"/>
-              </a:rPr>
-              <a:t> </a:t>
-            </a:r>
-            <a:r>
-              <a:rPr sz="2300" dirty="0">
-                <a:latin typeface="Lucida Sans" panose="020B0602030504020204" pitchFamily="34" charset="77"/>
-              </a:rPr>
-              <a:t> </a:t>
-            </a:r>
-            <a:r>
-              <a:rPr lang="en-US" dirty="0"/>
-              <a:t>(</a:t>
-            </a:r>
-            <a:r>
-              <a:rPr dirty="0"/>
-              <a:t>the familiar form</a:t>
-            </a:r>
-            <a:r>
-              <a:rPr lang="en-US" dirty="0"/>
-              <a:t>)</a:t>
-            </a:r>
-            <a:endParaRPr dirty="0"/>
-          </a:p>
-          <a:p>
-            <a:r>
-              <a:rPr dirty="0"/>
-              <a:t>URN: </a:t>
-            </a:r>
-            <a:r>
-              <a:rPr lang="en-US" dirty="0"/>
-              <a:t>Uniform Resource Name</a:t>
-            </a:r>
-          </a:p>
-          <a:p>
-            <a:pPr lvl="1"/>
-            <a:r>
-              <a:rPr dirty="0"/>
-              <a:t>URI that gives a persistent name without implying a location</a:t>
-            </a:r>
-          </a:p>
-          <a:p>
-            <a:pPr lvl="1"/>
-            <a:r>
-              <a:rPr sz="2300" dirty="0">
-                <a:latin typeface="Lucida Sans" panose="020B0602030504020204" pitchFamily="34" charset="77"/>
-              </a:rPr>
-              <a:t>doi:10.17487/RFC0791 </a:t>
-            </a:r>
-            <a:r>
-              <a:rPr lang="en-US" dirty="0">
-                <a:sym typeface="Wingdings" pitchFamily="2" charset="2"/>
-              </a:rPr>
-              <a:t>(</a:t>
-            </a:r>
-            <a:r>
-              <a:rPr dirty="0"/>
-              <a:t>identifies RFC 791 regardless of where it's hosted</a:t>
-            </a:r>
-            <a:r>
-              <a:rPr lang="en-US" dirty="0"/>
-              <a:t>)</a:t>
+              <a:t>D</a:t>
+            </a:r>
+            <a:r>
+              <a:rPr dirty="0"/>
+              <a:t>ata format separate from transfer protocol</a:t>
+            </a:r>
+            <a:endParaRPr lang="en-US" dirty="0"/>
+          </a:p>
+          <a:p>
+            <a:pPr lvl="1"/>
+            <a:r>
+              <a:rPr lang="en-US" dirty="0"/>
+              <a:t>Easy to substitute other formats (e.g., XML)</a:t>
             </a:r>
             <a:endParaRPr dirty="0"/>
           </a:p>
@@ -3113,7 +2870,7 @@
           <p:cNvPr id="4" name="Footer Placeholder 3">
             <a:extLst>
               <a:ext uri="{FF2B5EF4-FFF2-40B4-BE49-F238E27FC236}">
-                <a16:creationId xmlns:a16="http://schemas.microsoft.com/office/drawing/2014/main" id="{394A3A1A-2E1A-4E86-A5F3-0CAED44B30D9}"/>
+                <a16:creationId xmlns:a16="http://schemas.microsoft.com/office/drawing/2014/main" id="{FDF923E9-4193-0A34-E11B-408C9FB47E02}"/>
               </a:ext>
             </a:extLst>
           </p:cNvPr>
@@ -3133,35 +2890,6 @@
               <a:rPr lang="en-US"/>
               <a:t>Copyright Peterson &amp; Davie, 2026</a:t>
             </a:r>
-          </a:p>
-        </p:txBody>
-      </p:sp>
-      <p:sp>
-        <p:nvSpPr>
-          <p:cNvPr id="5" name="Slide Number Placeholder 4">
-            <a:extLst>
-              <a:ext uri="{FF2B5EF4-FFF2-40B4-BE49-F238E27FC236}">
-                <a16:creationId xmlns:a16="http://schemas.microsoft.com/office/drawing/2014/main" id="{BF0BD709-3342-6F96-18DD-FBCA4E446E5A}"/>
-              </a:ext>
-            </a:extLst>
-          </p:cNvPr>
-          <p:cNvSpPr>
-            <a:spLocks noGrp="1"/>
-          </p:cNvSpPr>
-          <p:nvPr>
-            <p:ph type="sldNum" sz="quarter" idx="12"/>
-          </p:nvPr>
-        </p:nvSpPr>
-        <p:spPr/>
-        <p:txBody>
-          <a:bodyPr/>
-          <a:lstStyle/>
-          <a:p>
-            <a:fld id="{394597B6-99AE-8F4E-8AC4-338DBFD9B0E5}" type="slidenum">
-              <a:rPr lang="en-US" smtClean="0"/>
-              <a:t>12</a:t>
-            </a:fld>
-            <a:endParaRPr lang="en-US"/>
           </a:p>
         </p:txBody>
       </p:sp>
@@ -3206,14 +2934,8 @@
           <a:lstStyle/>
           <a:p>
             <a:r>
-              <a:rPr dirty="0"/>
-              <a:t>Caching</a:t>
-            </a:r>
-            <a:r>
-              <a:rPr lang="en-US" dirty="0"/>
-              <a:t> Infrastructure</a:t>
-            </a:r>
-            <a:endParaRPr dirty="0"/>
+              <a:t>Connection Overhead</a:t>
+            </a:r>
           </a:p>
         </p:txBody>
       </p:sp>
@@ -3229,183 +2951,186 @@
         </p:nvSpPr>
         <p:spPr>
           <a:xfrm>
-            <a:off x="838200" y="1548225"/>
-            <a:ext cx="10515600" cy="4709356"/>
+            <a:off x="838079" y="1476360"/>
+            <a:ext cx="7049998" cy="4748170"/>
           </a:xfrm>
         </p:spPr>
         <p:txBody>
           <a:bodyPr>
-            <a:normAutofit fontScale="92500" lnSpcReduction="10000"/>
+            <a:normAutofit lnSpcReduction="10000"/>
           </a:bodyPr>
           <a:lstStyle/>
           <a:p>
             <a:r>
-              <a:rPr lang="en-US" dirty="0"/>
-              <a:t>Two Benefits</a:t>
-            </a:r>
-          </a:p>
-          <a:p>
-            <a:pPr lvl="1"/>
-            <a:r>
-              <a:rPr lang="en-US" dirty="0"/>
+              <a:rPr sz="2400" dirty="0"/>
+              <a:t>HTTP 1.0</a:t>
+            </a:r>
+            <a:endParaRPr lang="en-US" sz="2400" dirty="0"/>
+          </a:p>
+          <a:p>
+            <a:pPr lvl="1"/>
+            <a:r>
+              <a:rPr lang="en-US" sz="2000" dirty="0"/>
+              <a:t>O</a:t>
+            </a:r>
+            <a:r>
+              <a:rPr sz="2000" dirty="0"/>
+              <a:t>ne TCP connection per object</a:t>
+            </a:r>
+          </a:p>
+          <a:p>
+            <a:pPr lvl="1"/>
+            <a:r>
+              <a:rPr lang="en-US" sz="2000" dirty="0"/>
+              <a:t>P</a:t>
+            </a:r>
+            <a:r>
+              <a:rPr sz="2000" dirty="0"/>
+              <a:t>age with 12 images → 13 TCP </a:t>
+            </a:r>
+            <a:r>
+              <a:rPr lang="en-US" sz="2000" dirty="0"/>
+              <a:t>connections</a:t>
+            </a:r>
+          </a:p>
+          <a:p>
+            <a:pPr lvl="1"/>
+            <a:r>
+              <a:rPr lang="en-US" sz="2000" dirty="0"/>
+              <a:t>TLS adds additional round trips</a:t>
+            </a:r>
+            <a:endParaRPr sz="2000" dirty="0"/>
+          </a:p>
+          <a:p>
+            <a:r>
+              <a:rPr sz="2400" dirty="0"/>
+              <a:t>HTTP 1.1</a:t>
+            </a:r>
+            <a:endParaRPr lang="en-US" sz="2400" dirty="0"/>
+          </a:p>
+          <a:p>
+            <a:pPr lvl="1"/>
+            <a:r>
+              <a:rPr lang="en-US" sz="2000" dirty="0"/>
+              <a:t>P</a:t>
+            </a:r>
+            <a:r>
+              <a:rPr sz="2000" dirty="0"/>
+              <a:t>ersistent connections</a:t>
+            </a:r>
+            <a:endParaRPr lang="en-US" sz="2000" dirty="0"/>
+          </a:p>
+          <a:p>
+            <a:pPr lvl="1"/>
+            <a:r>
+              <a:rPr lang="en-US" sz="2000" dirty="0"/>
               <a:t>R</a:t>
             </a:r>
             <a:r>
-              <a:rPr dirty="0"/>
-              <a:t>educes </a:t>
-            </a:r>
-            <a:r>
-              <a:rPr lang="en-US" dirty="0"/>
-              <a:t>response time</a:t>
-            </a:r>
-          </a:p>
-          <a:p>
-            <a:pPr lvl="1"/>
-            <a:r>
-              <a:rPr lang="en-US" dirty="0"/>
-              <a:t>Reduces </a:t>
-            </a:r>
-            <a:r>
-              <a:rPr dirty="0"/>
-              <a:t>server load</a:t>
-            </a:r>
-          </a:p>
-          <a:p>
-            <a:r>
-              <a:rPr dirty="0"/>
-              <a:t>Where </a:t>
-            </a:r>
-            <a:r>
-              <a:rPr lang="en-US" dirty="0"/>
-              <a:t>do </a:t>
-            </a:r>
-            <a:r>
-              <a:rPr dirty="0"/>
-              <a:t>caches live</a:t>
-            </a:r>
-            <a:r>
-              <a:rPr lang="en-US" dirty="0"/>
-              <a:t>?</a:t>
-            </a:r>
-          </a:p>
-          <a:p>
-            <a:pPr lvl="1"/>
-            <a:r>
-              <a:rPr lang="en-US" dirty="0"/>
-              <a:t>B</a:t>
-            </a:r>
-            <a:r>
-              <a:rPr dirty="0"/>
-              <a:t>rowser</a:t>
-            </a:r>
-            <a:endParaRPr lang="en-US" dirty="0"/>
-          </a:p>
-          <a:p>
-            <a:pPr lvl="1"/>
-            <a:r>
-              <a:rPr lang="en-US" dirty="0"/>
-              <a:t>S</a:t>
-            </a:r>
-            <a:r>
-              <a:rPr dirty="0"/>
-              <a:t>ite </a:t>
-            </a:r>
-            <a:r>
-              <a:rPr lang="en-US" dirty="0"/>
-              <a:t>P</a:t>
-            </a:r>
-            <a:r>
-              <a:rPr dirty="0"/>
-              <a:t>roxy</a:t>
-            </a:r>
-          </a:p>
-          <a:p>
-            <a:pPr lvl="1"/>
-            <a:r>
-              <a:rPr dirty="0"/>
-              <a:t>CDNs</a:t>
-            </a:r>
-            <a:r>
-              <a:rPr lang="en-US" dirty="0"/>
-              <a:t>: O</a:t>
-            </a:r>
-            <a:r>
-              <a:rPr dirty="0"/>
-              <a:t>verlay network with caches </a:t>
-            </a:r>
-            <a:r>
-              <a:rPr lang="en-US" dirty="0"/>
-              <a:t>distributed globally</a:t>
-            </a:r>
-            <a:endParaRPr dirty="0"/>
-          </a:p>
-          <a:p>
-            <a:r>
-              <a:rPr dirty="0"/>
-              <a:t>HTTP explicitly supports caching</a:t>
-            </a:r>
-          </a:p>
-          <a:p>
-            <a:pPr lvl="1"/>
-            <a:r>
-              <a:rPr dirty="0"/>
-              <a:t>Expires </a:t>
-            </a:r>
-            <a:r>
-              <a:rPr lang="en-US" dirty="0"/>
-              <a:t>H</a:t>
-            </a:r>
-            <a:r>
-              <a:rPr dirty="0"/>
-              <a:t>eader: cache valid until this time</a:t>
-            </a:r>
-          </a:p>
-          <a:p>
-            <a:pPr lvl="1"/>
-            <a:r>
-              <a:rPr dirty="0"/>
-              <a:t>Conditional GET: server returns page only if modified since last fetch</a:t>
-            </a:r>
-          </a:p>
-          <a:p>
-            <a:r>
-              <a:rPr dirty="0"/>
-              <a:t>302 Redirect</a:t>
-            </a:r>
-            <a:endParaRPr lang="en-US" dirty="0"/>
-          </a:p>
-          <a:p>
-            <a:pPr lvl="1"/>
-            <a:r>
-              <a:rPr lang="en-US" dirty="0"/>
+              <a:rPr sz="2000" dirty="0"/>
+              <a:t>euse one TCP for multiple requests</a:t>
+            </a:r>
+          </a:p>
+          <a:p>
+            <a:r>
+              <a:rPr sz="2400" dirty="0"/>
+              <a:t>HTTP/2</a:t>
+            </a:r>
+            <a:endParaRPr lang="en-US" sz="2400" dirty="0"/>
+          </a:p>
+          <a:p>
+            <a:pPr lvl="1"/>
+            <a:r>
+              <a:rPr lang="en-US" sz="2000" dirty="0"/>
+              <a:t>M</a:t>
+            </a:r>
+            <a:r>
+              <a:rPr sz="2000" dirty="0"/>
+              <a:t>ultiplexed streams</a:t>
+            </a:r>
+            <a:endParaRPr lang="en-US" sz="2000" dirty="0"/>
+          </a:p>
+          <a:p>
+            <a:pPr lvl="1"/>
+            <a:r>
+              <a:rPr lang="en-US" sz="2000" dirty="0"/>
+              <a:t>C</a:t>
+            </a:r>
+            <a:r>
+              <a:rPr sz="2000" dirty="0"/>
+              <a:t>oncurrent request/response pairs on one TCP</a:t>
+            </a:r>
+          </a:p>
+          <a:p>
+            <a:r>
+              <a:rPr sz="2400" dirty="0"/>
+              <a:t>HTTP/3 </a:t>
+            </a:r>
+            <a:r>
+              <a:rPr lang="en-US" sz="2400" dirty="0"/>
+              <a:t>&amp;</a:t>
+            </a:r>
+            <a:r>
+              <a:rPr sz="2400" dirty="0"/>
+              <a:t> QUIC</a:t>
+            </a:r>
+            <a:endParaRPr lang="en-US" sz="2400" dirty="0"/>
+          </a:p>
+          <a:p>
+            <a:pPr lvl="1"/>
+            <a:r>
+              <a:rPr lang="en-US" sz="2000" dirty="0"/>
               <a:t>R</a:t>
             </a:r>
             <a:r>
-              <a:rPr dirty="0"/>
-              <a:t>outes clients to nearest cache — </a:t>
-            </a:r>
-            <a:r>
-              <a:rPr lang="en-US" dirty="0"/>
-              <a:t>intrinsic part of a</a:t>
-            </a:r>
-            <a:r>
-              <a:rPr dirty="0"/>
-              <a:t> CDN </a:t>
-            </a:r>
-            <a:r>
-              <a:rPr lang="en-US" dirty="0"/>
-              <a:t>(Chapter 16)</a:t>
-            </a:r>
-            <a:endParaRPr dirty="0"/>
-          </a:p>
-        </p:txBody>
-      </p:sp>
-      <p:sp>
-        <p:nvSpPr>
-          <p:cNvPr id="4" name="Footer Placeholder 3">
+              <a:rPr sz="2000" dirty="0"/>
+              <a:t>eplaces TCP entirely </a:t>
+            </a:r>
+            <a:endParaRPr lang="en-US" sz="2000" dirty="0"/>
+          </a:p>
+          <a:p>
+            <a:pPr lvl="1"/>
+            <a:r>
+              <a:rPr lang="en-US" sz="2000" dirty="0"/>
+              <a:t>See </a:t>
+            </a:r>
+            <a:r>
+              <a:rPr sz="2000" dirty="0"/>
+              <a:t>Chapter 15</a:t>
+            </a:r>
+          </a:p>
+        </p:txBody>
+      </p:sp>
+      <p:pic>
+        <p:nvPicPr>
+          <p:cNvPr id="4" name="Picture 3" descr="rtt-overhead.png"/>
+          <p:cNvPicPr>
+            <a:picLocks noChangeAspect="1"/>
+          </p:cNvPicPr>
+          <p:nvPr/>
+        </p:nvPicPr>
+        <p:blipFill>
+          <a:blip r:embed="rId2"/>
+          <a:stretch>
+            <a:fillRect/>
+          </a:stretch>
+        </p:blipFill>
+        <p:spPr>
+          <a:xfrm>
+            <a:off x="7065909" y="1476360"/>
+            <a:ext cx="4539815" cy="4351320"/>
+          </a:xfrm>
+          <a:prstGeom prst="rect">
+            <a:avLst/>
+          </a:prstGeom>
+        </p:spPr>
+      </p:pic>
+      <p:sp>
+        <p:nvSpPr>
+          <p:cNvPr id="5" name="Footer Placeholder 4">
             <a:extLst>
               <a:ext uri="{FF2B5EF4-FFF2-40B4-BE49-F238E27FC236}">
-                <a16:creationId xmlns:a16="http://schemas.microsoft.com/office/drawing/2014/main" id="{800BB0AF-55DD-655E-50DA-890BC852E19C}"/>
+                <a16:creationId xmlns:a16="http://schemas.microsoft.com/office/drawing/2014/main" id="{139C1BA4-A1FF-6732-7AFE-39F9765EB8B5}"/>
               </a:ext>
             </a:extLst>
           </p:cNvPr>
@@ -3425,35 +3150,6 @@
               <a:rPr lang="en-US"/>
               <a:t>Copyright Peterson &amp; Davie, 2026</a:t>
             </a:r>
-          </a:p>
-        </p:txBody>
-      </p:sp>
-      <p:sp>
-        <p:nvSpPr>
-          <p:cNvPr id="5" name="Slide Number Placeholder 4">
-            <a:extLst>
-              <a:ext uri="{FF2B5EF4-FFF2-40B4-BE49-F238E27FC236}">
-                <a16:creationId xmlns:a16="http://schemas.microsoft.com/office/drawing/2014/main" id="{31C29CD0-C9BD-2C0E-37C5-8115429DBD09}"/>
-              </a:ext>
-            </a:extLst>
-          </p:cNvPr>
-          <p:cNvSpPr>
-            <a:spLocks noGrp="1"/>
-          </p:cNvSpPr>
-          <p:nvPr>
-            <p:ph type="sldNum" sz="quarter" idx="12"/>
-          </p:nvPr>
-        </p:nvSpPr>
-        <p:spPr/>
-        <p:txBody>
-          <a:bodyPr/>
-          <a:lstStyle/>
-          <a:p>
-            <a:fld id="{394597B6-99AE-8F4E-8AC4-338DBFD9B0E5}" type="slidenum">
-              <a:rPr lang="en-US" smtClean="0"/>
-              <a:t>13</a:t>
-            </a:fld>
-            <a:endParaRPr lang="en-US"/>
           </a:p>
         </p:txBody>
       </p:sp>
@@ -3498,9 +3194,10 @@
           <a:lstStyle/>
           <a:p>
             <a:r>
-              <a:rPr dirty="0"/>
-              <a:t>RESTful API</a:t>
-            </a:r>
+              <a:rPr lang="en-US" dirty="0"/>
+              <a:t>Naming Scheme</a:t>
+            </a:r>
+            <a:endParaRPr dirty="0"/>
           </a:p>
         </p:txBody>
       </p:sp>
@@ -3516,39 +3213,17 @@
         </p:nvSpPr>
         <p:spPr>
           <a:xfrm>
-            <a:off x="838200" y="1460089"/>
-            <a:ext cx="10515600" cy="4632238"/>
+            <a:off x="838199" y="1548225"/>
+            <a:ext cx="10751545" cy="4351338"/>
           </a:xfrm>
         </p:spPr>
         <p:txBody>
-          <a:bodyPr>
-            <a:normAutofit/>
-          </a:bodyPr>
-          <a:lstStyle/>
-          <a:p>
-            <a:r>
-              <a:rPr dirty="0" err="1"/>
-              <a:t>R</a:t>
-            </a:r>
-            <a:r>
-              <a:rPr lang="en-US" dirty="0" err="1"/>
-              <a:t>e</a:t>
-            </a:r>
-            <a:r>
-              <a:rPr dirty="0" err="1"/>
-              <a:t>ST</a:t>
-            </a:r>
-            <a:r>
-              <a:rPr dirty="0"/>
-              <a:t>: </a:t>
-            </a:r>
-            <a:r>
-              <a:rPr lang="en-US" dirty="0"/>
-              <a:t>A</a:t>
-            </a:r>
-            <a:r>
-              <a:rPr dirty="0"/>
-              <a:t>rchitectural style underlying the Web</a:t>
+          <a:bodyPr/>
+          <a:lstStyle/>
+          <a:p>
+            <a:r>
+              <a:rPr dirty="0"/>
+              <a:t>URI: Uniform Resource Identifier</a:t>
             </a:r>
             <a:endParaRPr lang="en-US" dirty="0"/>
           </a:p>
@@ -3556,115 +3231,129 @@
             <a:pPr lvl="1"/>
             <a:r>
               <a:rPr lang="en-US" dirty="0"/>
-              <a:t>Representable State Transfer (Fielding, 2000)</a:t>
+              <a:t>N</a:t>
+            </a:r>
+            <a:r>
+              <a:rPr dirty="0"/>
+              <a:t>ames any resource on the Internet</a:t>
+            </a:r>
+          </a:p>
+          <a:p>
+            <a:pPr lvl="1"/>
+            <a:r>
+              <a:rPr dirty="0"/>
+              <a:t>Format: scheme + scheme-specific part</a:t>
+            </a:r>
+          </a:p>
+          <a:p>
+            <a:r>
+              <a:rPr dirty="0"/>
+              <a:t>URL: </a:t>
+            </a:r>
+            <a:r>
+              <a:rPr lang="en-US" dirty="0"/>
+              <a:t>Uniform Resource Locator</a:t>
+            </a:r>
+          </a:p>
+          <a:p>
+            <a:pPr lvl="1"/>
+            <a:r>
+              <a:rPr dirty="0"/>
+              <a:t>URI that also locates the resource</a:t>
+            </a:r>
+          </a:p>
+          <a:p>
+            <a:pPr lvl="1"/>
+            <a:r>
+              <a:rPr sz="2300" dirty="0">
+                <a:latin typeface="Lucida Sans" panose="020B0602030504020204" pitchFamily="34" charset="77"/>
+              </a:rPr>
+              <a:t>https://</a:t>
+            </a:r>
+            <a:r>
+              <a:rPr sz="2300" dirty="0" err="1">
+                <a:latin typeface="Lucida Sans" panose="020B0602030504020204" pitchFamily="34" charset="77"/>
+              </a:rPr>
+              <a:t>book.systemsapproach.org</a:t>
+            </a:r>
+            <a:r>
+              <a:rPr sz="2300" dirty="0">
+                <a:latin typeface="Lucida Sans" panose="020B0602030504020204" pitchFamily="34" charset="77"/>
+              </a:rPr>
+              <a:t>/</a:t>
+            </a:r>
+            <a:r>
+              <a:rPr sz="2300" dirty="0" err="1">
+                <a:latin typeface="Lucida Sans" panose="020B0602030504020204" pitchFamily="34" charset="77"/>
+              </a:rPr>
+              <a:t>index.html</a:t>
+            </a:r>
+            <a:r>
+              <a:rPr lang="en-US" sz="2300" dirty="0">
+                <a:latin typeface="Lucida Sans" panose="020B0602030504020204" pitchFamily="34" charset="77"/>
+              </a:rPr>
+              <a:t> </a:t>
+            </a:r>
+            <a:r>
+              <a:rPr sz="2300" dirty="0">
+                <a:latin typeface="Lucida Sans" panose="020B0602030504020204" pitchFamily="34" charset="77"/>
+              </a:rPr>
+              <a:t> </a:t>
+            </a:r>
+            <a:r>
+              <a:rPr lang="en-US" dirty="0"/>
+              <a:t>(</a:t>
+            </a:r>
+            <a:r>
+              <a:rPr dirty="0"/>
+              <a:t>the familiar form</a:t>
+            </a:r>
+            <a:r>
+              <a:rPr lang="en-US" dirty="0"/>
+              <a:t>)</a:t>
             </a:r>
             <a:endParaRPr dirty="0"/>
           </a:p>
           <a:p>
             <a:r>
               <a:rPr dirty="0"/>
-              <a:t>Everything is a resource, identified by a URI</a:t>
-            </a:r>
-          </a:p>
-          <a:p>
-            <a:r>
-              <a:rPr dirty="0"/>
-              <a:t>HTTP methods </a:t>
-            </a:r>
-            <a:r>
-              <a:rPr lang="en-US" dirty="0"/>
-              <a:t>parallel Object Oriented Programming</a:t>
-            </a:r>
-          </a:p>
-          <a:p>
-            <a:pPr lvl="1"/>
-            <a:r>
-              <a:rPr dirty="0"/>
-              <a:t>CRUD: </a:t>
-            </a:r>
-            <a:r>
-              <a:rPr lang="en-US" dirty="0"/>
-              <a:t>Create, Read, Update, Delete</a:t>
-            </a:r>
-          </a:p>
-          <a:p>
-            <a:pPr lvl="1"/>
-            <a:r>
-              <a:rPr lang="en-US" dirty="0"/>
-              <a:t>HTTP: </a:t>
-            </a:r>
-            <a:r>
-              <a:rPr dirty="0"/>
-              <a:t>POST</a:t>
-            </a:r>
-            <a:r>
-              <a:rPr lang="en-US" dirty="0"/>
-              <a:t>, GET,</a:t>
-            </a:r>
-            <a:r>
-              <a:rPr dirty="0"/>
-              <a:t> PUT</a:t>
-            </a:r>
-            <a:r>
-              <a:rPr lang="en-US" dirty="0"/>
-              <a:t>,</a:t>
-            </a:r>
-            <a:r>
-              <a:rPr dirty="0"/>
-              <a:t> DELETE</a:t>
-            </a:r>
-          </a:p>
-          <a:p>
-            <a:r>
-              <a:rPr dirty="0"/>
-              <a:t>Payload carries state representation</a:t>
-            </a:r>
-            <a:endParaRPr lang="en-US" dirty="0"/>
-          </a:p>
-          <a:p>
-            <a:pPr lvl="1"/>
-            <a:r>
-              <a:rPr lang="en-US" dirty="0"/>
-              <a:t>e.g., </a:t>
-            </a:r>
-            <a:r>
-              <a:rPr dirty="0"/>
-              <a:t>JSON</a:t>
-            </a:r>
-            <a:r>
-              <a:rPr lang="en-US" dirty="0"/>
-              <a:t>, </a:t>
-            </a:r>
-            <a:r>
-              <a:rPr dirty="0"/>
-              <a:t>XML</a:t>
-            </a:r>
-          </a:p>
-          <a:p>
-            <a:r>
-              <a:rPr dirty="0"/>
-              <a:t>Reuses web infrastructure</a:t>
-            </a:r>
-            <a:endParaRPr lang="en-US" dirty="0"/>
-          </a:p>
-          <a:p>
-            <a:pPr lvl="1"/>
-            <a:r>
-              <a:rPr lang="en-US" dirty="0"/>
-              <a:t>P</a:t>
-            </a:r>
-            <a:r>
-              <a:rPr dirty="0"/>
-              <a:t>roxies, CDNs, </a:t>
-            </a:r>
-            <a:r>
-              <a:rPr lang="en-US" dirty="0"/>
-              <a:t>and C</a:t>
-            </a:r>
-            <a:r>
-              <a:rPr dirty="0"/>
-              <a:t>aches work automatically</a:t>
-            </a:r>
+              <a:t>URN: </a:t>
+            </a:r>
+            <a:r>
+              <a:rPr lang="en-US" dirty="0"/>
+              <a:t>Uniform Resource Name</a:t>
+            </a:r>
+          </a:p>
+          <a:p>
+            <a:pPr lvl="1"/>
+            <a:r>
+              <a:rPr dirty="0"/>
+              <a:t>URI that gives a persistent name without implying a location</a:t>
+            </a:r>
+          </a:p>
+          <a:p>
+            <a:pPr lvl="1"/>
+            <a:r>
+              <a:rPr sz="2300" dirty="0">
+                <a:latin typeface="Lucida Sans" panose="020B0602030504020204" pitchFamily="34" charset="77"/>
+              </a:rPr>
+              <a:t>doi:10.17487/RFC0791 </a:t>
+            </a:r>
+            <a:r>
+              <a:rPr lang="en-US" dirty="0">
+                <a:sym typeface="Wingdings" pitchFamily="2" charset="2"/>
+              </a:rPr>
+              <a:t>(</a:t>
+            </a:r>
+            <a:r>
+              <a:rPr dirty="0"/>
+              <a:t>identifies RFC 791 regardless of where it's hosted</a:t>
+            </a:r>
+            <a:r>
+              <a:rPr lang="en-US" dirty="0"/>
+              <a:t>)</a:t>
+            </a:r>
+            <a:endParaRPr dirty="0"/>
           </a:p>
         </p:txBody>
       </p:sp>
@@ -3673,7 +3362,7 @@
           <p:cNvPr id="4" name="Footer Placeholder 3">
             <a:extLst>
               <a:ext uri="{FF2B5EF4-FFF2-40B4-BE49-F238E27FC236}">
-                <a16:creationId xmlns:a16="http://schemas.microsoft.com/office/drawing/2014/main" id="{74791E5B-EEDF-DE51-EE93-430760129DA6}"/>
+                <a16:creationId xmlns:a16="http://schemas.microsoft.com/office/drawing/2014/main" id="{394A3A1A-2E1A-4E86-A5F3-0CAED44B30D9}"/>
               </a:ext>
             </a:extLst>
           </p:cNvPr>
@@ -3693,35 +3382,6 @@
               <a:rPr lang="en-US"/>
               <a:t>Copyright Peterson &amp; Davie, 2026</a:t>
             </a:r>
-          </a:p>
-        </p:txBody>
-      </p:sp>
-      <p:sp>
-        <p:nvSpPr>
-          <p:cNvPr id="5" name="Slide Number Placeholder 4">
-            <a:extLst>
-              <a:ext uri="{FF2B5EF4-FFF2-40B4-BE49-F238E27FC236}">
-                <a16:creationId xmlns:a16="http://schemas.microsoft.com/office/drawing/2014/main" id="{9C8110E5-DF96-3A68-F84A-84BF8ED96423}"/>
-              </a:ext>
-            </a:extLst>
-          </p:cNvPr>
-          <p:cNvSpPr>
-            <a:spLocks noGrp="1"/>
-          </p:cNvSpPr>
-          <p:nvPr>
-            <p:ph type="sldNum" sz="quarter" idx="12"/>
-          </p:nvPr>
-        </p:nvSpPr>
-        <p:spPr/>
-        <p:txBody>
-          <a:bodyPr/>
-          <a:lstStyle/>
-          <a:p>
-            <a:fld id="{394597B6-99AE-8F4E-8AC4-338DBFD9B0E5}" type="slidenum">
-              <a:rPr lang="en-US" smtClean="0"/>
-              <a:t>14</a:t>
-            </a:fld>
-            <a:endParaRPr lang="en-US"/>
           </a:p>
         </p:txBody>
       </p:sp>
@@ -3752,10 +3412,220 @@
       </p:grpSpPr>
       <p:sp>
         <p:nvSpPr>
-          <p:cNvPr id="2" name="Title 1">
+          <p:cNvPr id="2" name="Title 1"/>
+          <p:cNvSpPr>
+            <a:spLocks noGrp="1"/>
+          </p:cNvSpPr>
+          <p:nvPr>
+            <p:ph type="title"/>
+          </p:nvPr>
+        </p:nvSpPr>
+        <p:spPr/>
+        <p:txBody>
+          <a:bodyPr/>
+          <a:lstStyle/>
+          <a:p>
+            <a:r>
+              <a:rPr dirty="0"/>
+              <a:t>Caching</a:t>
+            </a:r>
+            <a:r>
+              <a:rPr lang="en-US" dirty="0"/>
+              <a:t> Infrastructure</a:t>
+            </a:r>
+            <a:endParaRPr dirty="0"/>
+          </a:p>
+        </p:txBody>
+      </p:sp>
+      <p:sp>
+        <p:nvSpPr>
+          <p:cNvPr id="3" name="Content Placeholder 2"/>
+          <p:cNvSpPr>
+            <a:spLocks noGrp="1"/>
+          </p:cNvSpPr>
+          <p:nvPr>
+            <p:ph idx="1"/>
+          </p:nvPr>
+        </p:nvSpPr>
+        <p:spPr>
+          <a:xfrm>
+            <a:off x="838200" y="1548225"/>
+            <a:ext cx="10515600" cy="4709356"/>
+          </a:xfrm>
+        </p:spPr>
+        <p:txBody>
+          <a:bodyPr>
+            <a:normAutofit fontScale="92500" lnSpcReduction="10000"/>
+          </a:bodyPr>
+          <a:lstStyle/>
+          <a:p>
+            <a:r>
+              <a:rPr lang="en-US" dirty="0"/>
+              <a:t>Two Benefits</a:t>
+            </a:r>
+          </a:p>
+          <a:p>
+            <a:pPr lvl="1"/>
+            <a:r>
+              <a:rPr lang="en-US" dirty="0"/>
+              <a:t>R</a:t>
+            </a:r>
+            <a:r>
+              <a:rPr dirty="0"/>
+              <a:t>educes </a:t>
+            </a:r>
+            <a:r>
+              <a:rPr lang="en-US" dirty="0"/>
+              <a:t>response time</a:t>
+            </a:r>
+          </a:p>
+          <a:p>
+            <a:pPr lvl="1"/>
+            <a:r>
+              <a:rPr lang="en-US" dirty="0"/>
+              <a:t>Reduces </a:t>
+            </a:r>
+            <a:r>
+              <a:rPr dirty="0"/>
+              <a:t>server load</a:t>
+            </a:r>
+          </a:p>
+          <a:p>
+            <a:r>
+              <a:rPr dirty="0"/>
+              <a:t>Where </a:t>
+            </a:r>
+            <a:r>
+              <a:rPr lang="en-US" dirty="0"/>
+              <a:t>do </a:t>
+            </a:r>
+            <a:r>
+              <a:rPr dirty="0"/>
+              <a:t>caches live</a:t>
+            </a:r>
+            <a:r>
+              <a:rPr lang="en-US" dirty="0"/>
+              <a:t>?</a:t>
+            </a:r>
+          </a:p>
+          <a:p>
+            <a:pPr lvl="1"/>
+            <a:r>
+              <a:rPr lang="en-US" dirty="0"/>
+              <a:t>B</a:t>
+            </a:r>
+            <a:r>
+              <a:rPr dirty="0"/>
+              <a:t>rowser</a:t>
+            </a:r>
+            <a:endParaRPr lang="en-US" dirty="0"/>
+          </a:p>
+          <a:p>
+            <a:pPr lvl="1"/>
+            <a:r>
+              <a:rPr lang="en-US" dirty="0"/>
+              <a:t>S</a:t>
+            </a:r>
+            <a:r>
+              <a:rPr dirty="0"/>
+              <a:t>ite </a:t>
+            </a:r>
+            <a:r>
+              <a:rPr lang="en-US" dirty="0"/>
+              <a:t>P</a:t>
+            </a:r>
+            <a:r>
+              <a:rPr dirty="0"/>
+              <a:t>roxy</a:t>
+            </a:r>
+          </a:p>
+          <a:p>
+            <a:pPr lvl="1"/>
+            <a:r>
+              <a:rPr dirty="0"/>
+              <a:t>CDNs</a:t>
+            </a:r>
+            <a:r>
+              <a:rPr lang="en-US" dirty="0"/>
+              <a:t>: O</a:t>
+            </a:r>
+            <a:r>
+              <a:rPr dirty="0"/>
+              <a:t>verlay network with caches </a:t>
+            </a:r>
+            <a:r>
+              <a:rPr lang="en-US" dirty="0"/>
+              <a:t>distributed globally</a:t>
+            </a:r>
+            <a:endParaRPr dirty="0"/>
+          </a:p>
+          <a:p>
+            <a:r>
+              <a:rPr dirty="0"/>
+              <a:t>HTTP explicitly supports caching</a:t>
+            </a:r>
+          </a:p>
+          <a:p>
+            <a:pPr lvl="1"/>
+            <a:r>
+              <a:rPr dirty="0"/>
+              <a:t>Expires </a:t>
+            </a:r>
+            <a:r>
+              <a:rPr lang="en-US" dirty="0"/>
+              <a:t>H</a:t>
+            </a:r>
+            <a:r>
+              <a:rPr dirty="0"/>
+              <a:t>eader: cache valid until this time</a:t>
+            </a:r>
+          </a:p>
+          <a:p>
+            <a:pPr lvl="1"/>
+            <a:r>
+              <a:rPr dirty="0"/>
+              <a:t>Conditional GET: server returns page only if modified since last fetch</a:t>
+            </a:r>
+          </a:p>
+          <a:p>
+            <a:r>
+              <a:rPr dirty="0"/>
+              <a:t>302 Redirect</a:t>
+            </a:r>
+            <a:endParaRPr lang="en-US" dirty="0"/>
+          </a:p>
+          <a:p>
+            <a:pPr lvl="1"/>
+            <a:r>
+              <a:rPr lang="en-US" dirty="0"/>
+              <a:t>R</a:t>
+            </a:r>
+            <a:r>
+              <a:rPr dirty="0"/>
+              <a:t>outes clients to nearest cache — </a:t>
+            </a:r>
+            <a:r>
+              <a:rPr lang="en-US" dirty="0"/>
+              <a:t>intrinsic part of a</a:t>
+            </a:r>
+            <a:r>
+              <a:rPr dirty="0"/>
+              <a:t> CDN </a:t>
+            </a:r>
+            <a:r>
+              <a:rPr lang="en-US" dirty="0"/>
+              <a:t>(Chapter 16)</a:t>
+            </a:r>
+            <a:endParaRPr dirty="0"/>
+          </a:p>
+        </p:txBody>
+      </p:sp>
+      <p:sp>
+        <p:nvSpPr>
+          <p:cNvPr id="4" name="Footer Placeholder 3">
             <a:extLst>
               <a:ext uri="{FF2B5EF4-FFF2-40B4-BE49-F238E27FC236}">
-                <a16:creationId xmlns:a16="http://schemas.microsoft.com/office/drawing/2014/main" id="{42D7A3FA-978E-2C1B-D818-5B0C82E28D93}"/>
+                <a16:creationId xmlns:a16="http://schemas.microsoft.com/office/drawing/2014/main" id="{800BB0AF-55DD-655E-50DA-890BC852E19C}"/>
               </a:ext>
             </a:extLst>
           </p:cNvPr>
@@ -3763,7 +3633,7 @@
             <a:spLocks noGrp="1"/>
           </p:cNvSpPr>
           <p:nvPr>
-            <p:ph type="ctrTitle"/>
+            <p:ph type="ftr" sz="quarter" idx="11"/>
           </p:nvPr>
         </p:nvSpPr>
         <p:spPr/>
@@ -3772,72 +3642,13 @@
           <a:lstStyle/>
           <a:p>
             <a:r>
-              <a:rPr lang="en-US" dirty="0"/>
-              <a:t>Electronic Mail</a:t>
-            </a:r>
-          </a:p>
-        </p:txBody>
-      </p:sp>
-      <p:sp>
-        <p:nvSpPr>
-          <p:cNvPr id="3" name="Footer Placeholder 2">
-            <a:extLst>
-              <a:ext uri="{FF2B5EF4-FFF2-40B4-BE49-F238E27FC236}">
-                <a16:creationId xmlns:a16="http://schemas.microsoft.com/office/drawing/2014/main" id="{BEB3B289-2503-F857-5746-9E149397FA96}"/>
-              </a:ext>
-            </a:extLst>
-          </p:cNvPr>
-          <p:cNvSpPr>
-            <a:spLocks noGrp="1"/>
-          </p:cNvSpPr>
-          <p:nvPr>
-            <p:ph type="ftr" sz="quarter" idx="11"/>
-          </p:nvPr>
-        </p:nvSpPr>
-        <p:spPr/>
-        <p:txBody>
-          <a:bodyPr/>
-          <a:lstStyle/>
-          <a:p>
-            <a:endParaRPr lang="en-US"/>
-          </a:p>
-        </p:txBody>
-      </p:sp>
-      <p:sp>
-        <p:nvSpPr>
-          <p:cNvPr id="4" name="Slide Number Placeholder 3">
-            <a:extLst>
-              <a:ext uri="{FF2B5EF4-FFF2-40B4-BE49-F238E27FC236}">
-                <a16:creationId xmlns:a16="http://schemas.microsoft.com/office/drawing/2014/main" id="{C2C13BAE-F72F-AD57-448C-19F033C6CB7D}"/>
-              </a:ext>
-            </a:extLst>
-          </p:cNvPr>
-          <p:cNvSpPr>
-            <a:spLocks noGrp="1"/>
-          </p:cNvSpPr>
-          <p:nvPr>
-            <p:ph type="sldNum" sz="quarter" idx="12"/>
-          </p:nvPr>
-        </p:nvSpPr>
-        <p:spPr/>
-        <p:txBody>
-          <a:bodyPr/>
-          <a:lstStyle/>
-          <a:p>
-            <a:fld id="{394597B6-99AE-8F4E-8AC4-338DBFD9B0E5}" type="slidenum">
-              <a:rPr lang="en-US" smtClean="0"/>
-              <a:t>15</a:t>
-            </a:fld>
-            <a:endParaRPr lang="en-US"/>
+              <a:rPr lang="en-US"/>
+              <a:t>Copyright Peterson &amp; Davie, 2026</a:t>
+            </a:r>
           </a:p>
         </p:txBody>
       </p:sp>
     </p:spTree>
-    <p:extLst>
-      <p:ext uri="{BB962C8B-B14F-4D97-AF65-F5344CB8AC3E}">
-        <p14:creationId xmlns:p14="http://schemas.microsoft.com/office/powerpoint/2010/main" val="4066642793"/>
-      </p:ext>
-    </p:extLst>
   </p:cSld>
   <p:clrMapOvr>
     <a:masterClrMapping/>
@@ -3878,10 +3689,9 @@
           <a:lstStyle/>
           <a:p>
             <a:r>
-              <a:rPr lang="en-US" dirty="0"/>
-              <a:t>Overview</a:t>
-            </a:r>
-            <a:endParaRPr dirty="0"/>
+              <a:rPr dirty="0"/>
+              <a:t>RESTful API</a:t>
+            </a:r>
           </a:p>
         </p:txBody>
       </p:sp>
@@ -3897,156 +3707,16 @@
         </p:nvSpPr>
         <p:spPr>
           <a:xfrm>
-            <a:off x="838080" y="1476360"/>
-            <a:ext cx="5181480" cy="4615968"/>
+            <a:off x="838200" y="1460089"/>
+            <a:ext cx="10515600" cy="4632238"/>
           </a:xfrm>
         </p:spPr>
         <p:txBody>
           <a:bodyPr>
-            <a:normAutofit fontScale="92500" lnSpcReduction="10000"/>
+            <a:normAutofit/>
           </a:bodyPr>
           <a:lstStyle/>
           <a:p>
-            <a:r>
-              <a:rPr dirty="0"/>
-              <a:t>Email</a:t>
-            </a:r>
-            <a:endParaRPr lang="en-US" dirty="0"/>
-          </a:p>
-          <a:p>
-            <a:pPr lvl="1"/>
-            <a:r>
-              <a:rPr dirty="0"/>
-              <a:t>Internet's original killer app</a:t>
-            </a:r>
-            <a:endParaRPr lang="en-US" dirty="0"/>
-          </a:p>
-          <a:p>
-            <a:pPr lvl="1"/>
-            <a:r>
-              <a:rPr lang="en-US" dirty="0"/>
-              <a:t>Example of</a:t>
-            </a:r>
-            <a:r>
-              <a:rPr dirty="0"/>
-              <a:t> pre-web design</a:t>
-            </a:r>
-          </a:p>
-          <a:p>
-            <a:r>
-              <a:rPr lang="en-US" dirty="0"/>
-              <a:t>M</a:t>
-            </a:r>
-            <a:r>
-              <a:rPr dirty="0"/>
-              <a:t>ailbox</a:t>
-            </a:r>
-            <a:r>
-              <a:rPr lang="en-US" dirty="0"/>
-              <a:t> Abstraction</a:t>
-            </a:r>
-          </a:p>
-          <a:p>
-            <a:pPr lvl="1"/>
-            <a:r>
-              <a:rPr lang="en-US" dirty="0"/>
-              <a:t>R</a:t>
-            </a:r>
-            <a:r>
-              <a:rPr dirty="0"/>
-              <a:t>endezvous point for messages</a:t>
-            </a:r>
-          </a:p>
-          <a:p>
-            <a:r>
-              <a:rPr dirty="0"/>
-              <a:t>SMTP</a:t>
-            </a:r>
-            <a:endParaRPr lang="en-US" dirty="0"/>
-          </a:p>
-          <a:p>
-            <a:pPr lvl="1"/>
-            <a:r>
-              <a:rPr lang="en-US" dirty="0"/>
-              <a:t>S</a:t>
-            </a:r>
-            <a:r>
-              <a:rPr dirty="0"/>
-              <a:t>end mail to a mailbox</a:t>
-            </a:r>
-            <a:endParaRPr lang="en-US" dirty="0"/>
-          </a:p>
-          <a:p>
-            <a:pPr lvl="1"/>
-            <a:r>
-              <a:rPr lang="en-US" dirty="0"/>
-              <a:t>S</a:t>
-            </a:r>
-            <a:r>
-              <a:rPr dirty="0"/>
-              <a:t>tore-and-forward</a:t>
-            </a:r>
-            <a:r>
-              <a:rPr lang="en-US" dirty="0"/>
-              <a:t> via </a:t>
-            </a:r>
-            <a:r>
-              <a:rPr dirty="0"/>
-              <a:t>MTA</a:t>
-            </a:r>
-            <a:r>
-              <a:rPr lang="en-US" dirty="0"/>
-              <a:t>s</a:t>
-            </a:r>
-            <a:endParaRPr dirty="0"/>
-          </a:p>
-          <a:p>
-            <a:r>
-              <a:rPr dirty="0"/>
-              <a:t>IMAP / POP</a:t>
-            </a:r>
-            <a:endParaRPr lang="en-US" dirty="0"/>
-          </a:p>
-          <a:p>
-            <a:pPr lvl="1"/>
-            <a:r>
-              <a:rPr lang="en-US" dirty="0"/>
-              <a:t>R</a:t>
-            </a:r>
-            <a:r>
-              <a:rPr dirty="0"/>
-              <a:t>etrieve mail from a mailbox</a:t>
-            </a:r>
-          </a:p>
-          <a:p>
-            <a:r>
-              <a:rPr dirty="0"/>
-              <a:t>Modern </a:t>
-            </a:r>
-            <a:r>
-              <a:rPr lang="en-US" dirty="0"/>
-              <a:t>W</a:t>
-            </a:r>
-            <a:r>
-              <a:rPr dirty="0"/>
-              <a:t>eb </a:t>
-            </a:r>
-            <a:r>
-              <a:rPr lang="en-US" dirty="0"/>
-              <a:t>M</a:t>
-            </a:r>
-            <a:r>
-              <a:rPr dirty="0"/>
-              <a:t>ail (e.g., Gmail)</a:t>
-            </a:r>
-            <a:endParaRPr lang="en-US" dirty="0"/>
-          </a:p>
-          <a:p>
-            <a:pPr lvl="1"/>
-            <a:r>
-              <a:rPr dirty="0"/>
-              <a:t> HTTPS/</a:t>
-            </a:r>
             <a:r>
               <a:rPr dirty="0" err="1"/>
               <a:t>R</a:t>
@@ -4061,41 +3731,140 @@
             </a:r>
             <a:r>
               <a:rPr dirty="0"/>
-              <a:t> replaces IMAP</a:t>
-            </a:r>
-          </a:p>
-        </p:txBody>
-      </p:sp>
-      <p:pic>
-        <p:nvPicPr>
-          <p:cNvPr id="4" name="Picture 3" descr="smtp.png"/>
-          <p:cNvPicPr>
-            <a:picLocks noChangeAspect="1"/>
-          </p:cNvPicPr>
-          <p:nvPr/>
-        </p:nvPicPr>
-        <p:blipFill>
-          <a:blip r:embed="rId2"/>
-          <a:stretch>
-            <a:fillRect/>
-          </a:stretch>
-        </p:blipFill>
-        <p:spPr>
-          <a:xfrm>
-            <a:off x="5433889" y="2181340"/>
-            <a:ext cx="6392003" cy="2473016"/>
-          </a:xfrm>
-          <a:prstGeom prst="rect">
-            <a:avLst/>
-          </a:prstGeom>
-        </p:spPr>
-      </p:pic>
-      <p:sp>
-        <p:nvSpPr>
-          <p:cNvPr id="5" name="Footer Placeholder 4">
+              <a:t>: </a:t>
+            </a:r>
+            <a:r>
+              <a:rPr lang="en-US" dirty="0"/>
+              <a:t>A</a:t>
+            </a:r>
+            <a:r>
+              <a:rPr dirty="0"/>
+              <a:t>rchitectural style underlying the Web</a:t>
+            </a:r>
+            <a:endParaRPr lang="en-US" dirty="0"/>
+          </a:p>
+          <a:p>
+            <a:pPr lvl="1"/>
+            <a:r>
+              <a:rPr lang="en-US" dirty="0"/>
+              <a:t>Representable State Transfer (Fielding, 2000)</a:t>
+            </a:r>
+            <a:endParaRPr dirty="0"/>
+          </a:p>
+          <a:p>
+            <a:r>
+              <a:rPr dirty="0"/>
+              <a:t>Everything is a resource, identified by a URI</a:t>
+            </a:r>
+          </a:p>
+          <a:p>
+            <a:r>
+              <a:rPr dirty="0"/>
+              <a:t>HTTP methods </a:t>
+            </a:r>
+            <a:r>
+              <a:rPr lang="en-US" dirty="0"/>
+              <a:t>parallel Object Oriented Programming</a:t>
+            </a:r>
+          </a:p>
+          <a:p>
+            <a:pPr lvl="1"/>
+            <a:r>
+              <a:rPr dirty="0"/>
+              <a:t>CRUD: </a:t>
+            </a:r>
+            <a:r>
+              <a:rPr lang="en-US" dirty="0"/>
+              <a:t>Create, Read, Update, Delete</a:t>
+            </a:r>
+          </a:p>
+          <a:p>
+            <a:pPr lvl="1"/>
+            <a:r>
+              <a:rPr lang="en-US" dirty="0"/>
+              <a:t>HTTP: </a:t>
+            </a:r>
+            <a:r>
+              <a:rPr dirty="0"/>
+              <a:t>POST</a:t>
+            </a:r>
+            <a:r>
+              <a:rPr lang="en-US" dirty="0"/>
+              <a:t>, GET,</a:t>
+            </a:r>
+            <a:r>
+              <a:rPr dirty="0"/>
+              <a:t> PUT</a:t>
+            </a:r>
+            <a:r>
+              <a:rPr lang="en-US" dirty="0"/>
+              <a:t>,</a:t>
+            </a:r>
+            <a:r>
+              <a:rPr dirty="0"/>
+              <a:t> DELETE</a:t>
+            </a:r>
+          </a:p>
+          <a:p>
+            <a:r>
+              <a:rPr dirty="0"/>
+              <a:t>Payload carries state representation</a:t>
+            </a:r>
+            <a:endParaRPr lang="en-US" dirty="0"/>
+          </a:p>
+          <a:p>
+            <a:pPr lvl="1"/>
+            <a:r>
+              <a:rPr lang="en-US" dirty="0"/>
+              <a:t>e.g., </a:t>
+            </a:r>
+            <a:r>
+              <a:rPr dirty="0"/>
+              <a:t>JSON</a:t>
+            </a:r>
+            <a:r>
+              <a:rPr lang="en-US" dirty="0"/>
+              <a:t>, </a:t>
+            </a:r>
+            <a:r>
+              <a:rPr dirty="0"/>
+              <a:t>XML</a:t>
+            </a:r>
+          </a:p>
+          <a:p>
+            <a:r>
+              <a:rPr dirty="0"/>
+              <a:t>Reuses web infrastructure</a:t>
+            </a:r>
+            <a:endParaRPr lang="en-US" dirty="0"/>
+          </a:p>
+          <a:p>
+            <a:pPr lvl="1"/>
+            <a:r>
+              <a:rPr lang="en-US" dirty="0"/>
+              <a:t>P</a:t>
+            </a:r>
+            <a:r>
+              <a:rPr dirty="0"/>
+              <a:t>roxies, CDNs, </a:t>
+            </a:r>
+            <a:r>
+              <a:rPr lang="en-US" dirty="0"/>
+              <a:t>and C</a:t>
+            </a:r>
+            <a:r>
+              <a:rPr dirty="0"/>
+              <a:t>aches work automatically</a:t>
+            </a:r>
+          </a:p>
+        </p:txBody>
+      </p:sp>
+      <p:sp>
+        <p:nvSpPr>
+          <p:cNvPr id="4" name="Footer Placeholder 3">
             <a:extLst>
               <a:ext uri="{FF2B5EF4-FFF2-40B4-BE49-F238E27FC236}">
-                <a16:creationId xmlns:a16="http://schemas.microsoft.com/office/drawing/2014/main" id="{B21C68C8-EE6E-FC47-B1FB-BEDCC8F11676}"/>
+                <a16:creationId xmlns:a16="http://schemas.microsoft.com/office/drawing/2014/main" id="{74791E5B-EEDF-DE51-EE93-430760129DA6}"/>
               </a:ext>
             </a:extLst>
           </p:cNvPr>
@@ -4115,35 +3884,6 @@
               <a:rPr lang="en-US"/>
               <a:t>Copyright Peterson &amp; Davie, 2026</a:t>
             </a:r>
-          </a:p>
-        </p:txBody>
-      </p:sp>
-      <p:sp>
-        <p:nvSpPr>
-          <p:cNvPr id="6" name="Slide Number Placeholder 5">
-            <a:extLst>
-              <a:ext uri="{FF2B5EF4-FFF2-40B4-BE49-F238E27FC236}">
-                <a16:creationId xmlns:a16="http://schemas.microsoft.com/office/drawing/2014/main" id="{154B4D6F-69FE-79FB-E337-03DC76695ABB}"/>
-              </a:ext>
-            </a:extLst>
-          </p:cNvPr>
-          <p:cNvSpPr>
-            <a:spLocks noGrp="1"/>
-          </p:cNvSpPr>
-          <p:nvPr>
-            <p:ph type="sldNum" sz="quarter" idx="12"/>
-          </p:nvPr>
-        </p:nvSpPr>
-        <p:spPr/>
-        <p:txBody>
-          <a:bodyPr/>
-          <a:lstStyle/>
-          <a:p>
-            <a:fld id="{394597B6-99AE-8F4E-8AC4-338DBFD9B0E5}" type="slidenum">
-              <a:rPr lang="en-US" smtClean="0"/>
-              <a:t>16</a:t>
-            </a:fld>
-            <a:endParaRPr lang="en-US"/>
           </a:p>
         </p:txBody>
       </p:sp>
@@ -4174,134 +3914,10 @@
       </p:grpSpPr>
       <p:sp>
         <p:nvSpPr>
-          <p:cNvPr id="2" name="Title 1"/>
-          <p:cNvSpPr>
-            <a:spLocks noGrp="1"/>
-          </p:cNvSpPr>
-          <p:nvPr>
-            <p:ph type="title"/>
-          </p:nvPr>
-        </p:nvSpPr>
-        <p:spPr/>
-        <p:txBody>
-          <a:bodyPr/>
-          <a:lstStyle/>
-          <a:p>
-            <a:r>
-              <a:rPr dirty="0"/>
-              <a:t>Message Format</a:t>
-            </a:r>
-          </a:p>
-        </p:txBody>
-      </p:sp>
-      <p:sp>
-        <p:nvSpPr>
-          <p:cNvPr id="3" name="Content Placeholder 2"/>
-          <p:cNvSpPr>
-            <a:spLocks noGrp="1"/>
-          </p:cNvSpPr>
-          <p:nvPr>
-            <p:ph idx="1"/>
-          </p:nvPr>
-        </p:nvSpPr>
-        <p:spPr/>
-        <p:txBody>
-          <a:bodyPr/>
-          <a:lstStyle/>
-          <a:p>
-            <a:r>
-              <a:rPr dirty="0"/>
-              <a:t>RFC 822 / 5322</a:t>
-            </a:r>
-            <a:endParaRPr lang="en-US" dirty="0"/>
-          </a:p>
-          <a:p>
-            <a:pPr lvl="1"/>
-            <a:r>
-              <a:rPr lang="en-US" dirty="0"/>
-              <a:t>Header + Body (b</a:t>
-            </a:r>
-            <a:r>
-              <a:rPr dirty="0"/>
-              <a:t>oth </a:t>
-            </a:r>
-            <a:r>
-              <a:rPr lang="en-US" dirty="0"/>
-              <a:t>as</a:t>
-            </a:r>
-            <a:r>
-              <a:rPr dirty="0"/>
-              <a:t> ASCII text</a:t>
-            </a:r>
-            <a:r>
-              <a:rPr lang="en-US" dirty="0"/>
-              <a:t>)</a:t>
-            </a:r>
-            <a:endParaRPr dirty="0"/>
-          </a:p>
-          <a:p>
-            <a:pPr lvl="1"/>
-            <a:r>
-              <a:rPr dirty="0"/>
-              <a:t>Headers: To, From, Subject, Date, Received</a:t>
-            </a:r>
-          </a:p>
-          <a:p>
-            <a:r>
-              <a:rPr dirty="0"/>
-              <a:t>MIME (1992)</a:t>
-            </a:r>
-            <a:endParaRPr lang="en-US" dirty="0"/>
-          </a:p>
-          <a:p>
-            <a:pPr lvl="1"/>
-            <a:r>
-              <a:rPr lang="en-US" dirty="0"/>
-              <a:t>E</a:t>
-            </a:r>
-            <a:r>
-              <a:rPr dirty="0"/>
-              <a:t>xtends email to carry binary content</a:t>
-            </a:r>
-          </a:p>
-          <a:p>
-            <a:pPr lvl="1"/>
-            <a:r>
-              <a:rPr dirty="0"/>
-              <a:t>Content-Type declares the data type</a:t>
-            </a:r>
-            <a:endParaRPr lang="en-US" dirty="0"/>
-          </a:p>
-          <a:p>
-            <a:pPr lvl="2"/>
-            <a:r>
-              <a:rPr lang="en-US" dirty="0"/>
-              <a:t>e.g., </a:t>
-            </a:r>
-            <a:r>
-              <a:rPr dirty="0"/>
-              <a:t>image/jpeg, audio/mp3, multipart/mixed</a:t>
-            </a:r>
-          </a:p>
-          <a:p>
-            <a:pPr lvl="1"/>
-            <a:r>
-              <a:rPr lang="en-US" dirty="0"/>
-              <a:t>B</a:t>
-            </a:r>
-            <a:r>
-              <a:rPr dirty="0"/>
-              <a:t>ase64 maps binary to ASCII</a:t>
-            </a:r>
-          </a:p>
-        </p:txBody>
-      </p:sp>
-      <p:sp>
-        <p:nvSpPr>
-          <p:cNvPr id="4" name="Footer Placeholder 3">
+          <p:cNvPr id="2" name="Title 1">
             <a:extLst>
               <a:ext uri="{FF2B5EF4-FFF2-40B4-BE49-F238E27FC236}">
-                <a16:creationId xmlns:a16="http://schemas.microsoft.com/office/drawing/2014/main" id="{39F11885-A0CF-D1C9-5325-78DB6126988E}"/>
+                <a16:creationId xmlns:a16="http://schemas.microsoft.com/office/drawing/2014/main" id="{42D7A3FA-978E-2C1B-D818-5B0C82E28D93}"/>
               </a:ext>
             </a:extLst>
           </p:cNvPr>
@@ -4309,7 +3925,7 @@
             <a:spLocks noGrp="1"/>
           </p:cNvSpPr>
           <p:nvPr>
-            <p:ph type="ftr" sz="quarter" idx="11"/>
+            <p:ph type="ctrTitle"/>
           </p:nvPr>
         </p:nvSpPr>
         <p:spPr/>
@@ -4318,18 +3934,18 @@
           <a:lstStyle/>
           <a:p>
             <a:r>
-              <a:rPr lang="en-US"/>
-              <a:t>Copyright Peterson &amp; Davie, 2026</a:t>
-            </a:r>
-          </a:p>
-        </p:txBody>
-      </p:sp>
-      <p:sp>
-        <p:nvSpPr>
-          <p:cNvPr id="5" name="Slide Number Placeholder 4">
+              <a:rPr lang="en-US" dirty="0"/>
+              <a:t>Electronic Mail</a:t>
+            </a:r>
+          </a:p>
+        </p:txBody>
+      </p:sp>
+      <p:sp>
+        <p:nvSpPr>
+          <p:cNvPr id="3" name="Footer Placeholder 2">
             <a:extLst>
               <a:ext uri="{FF2B5EF4-FFF2-40B4-BE49-F238E27FC236}">
-                <a16:creationId xmlns:a16="http://schemas.microsoft.com/office/drawing/2014/main" id="{98923F51-9951-80DC-4DB4-F074CD623893}"/>
+                <a16:creationId xmlns:a16="http://schemas.microsoft.com/office/drawing/2014/main" id="{BEB3B289-2503-F857-5746-9E149397FA96}"/>
               </a:ext>
             </a:extLst>
           </p:cNvPr>
@@ -4337,7 +3953,7 @@
             <a:spLocks noGrp="1"/>
           </p:cNvSpPr>
           <p:nvPr>
-            <p:ph type="sldNum" sz="quarter" idx="12"/>
+            <p:ph type="ftr" sz="quarter" idx="11"/>
           </p:nvPr>
         </p:nvSpPr>
         <p:spPr/>
@@ -4345,15 +3961,19 @@
           <a:bodyPr/>
           <a:lstStyle/>
           <a:p>
-            <a:fld id="{394597B6-99AE-8F4E-8AC4-338DBFD9B0E5}" type="slidenum">
-              <a:rPr lang="en-US" smtClean="0"/>
-              <a:t>17</a:t>
-            </a:fld>
-            <a:endParaRPr lang="en-US"/>
+            <a:r>
+              <a:rPr lang="en-US"/>
+              <a:t>Copyright Peterson &amp; Davie, 2026</a:t>
+            </a:r>
           </a:p>
         </p:txBody>
       </p:sp>
     </p:spTree>
+    <p:extLst>
+      <p:ext uri="{BB962C8B-B14F-4D97-AF65-F5344CB8AC3E}">
+        <p14:creationId xmlns:p14="http://schemas.microsoft.com/office/powerpoint/2010/main" val="4066642793"/>
+      </p:ext>
+    </p:extLst>
   </p:cSld>
   <p:clrMapOvr>
     <a:masterClrMapping/>
@@ -4394,9 +4014,10 @@
           <a:lstStyle/>
           <a:p>
             <a:r>
-              <a:rPr dirty="0"/>
-              <a:t>Message Transfer</a:t>
-            </a:r>
+              <a:rPr lang="en-US" dirty="0"/>
+              <a:t>Overview</a:t>
+            </a:r>
+            <a:endParaRPr dirty="0"/>
           </a:p>
         </p:txBody>
       </p:sp>
@@ -4413,36 +4034,26 @@
         <p:spPr>
           <a:xfrm>
             <a:off x="838080" y="1476360"/>
-            <a:ext cx="5181480" cy="3679534"/>
+            <a:ext cx="5181480" cy="4615968"/>
           </a:xfrm>
         </p:spPr>
         <p:txBody>
           <a:bodyPr>
-            <a:normAutofit lnSpcReduction="10000"/>
+            <a:normAutofit fontScale="92500" lnSpcReduction="10000"/>
           </a:bodyPr>
           <a:lstStyle/>
           <a:p>
             <a:r>
               <a:rPr dirty="0"/>
-              <a:t>MTA (Message Transfer Agent)</a:t>
+              <a:t>Email</a:t>
             </a:r>
             <a:endParaRPr lang="en-US" dirty="0"/>
           </a:p>
           <a:p>
             <a:pPr lvl="1"/>
             <a:r>
-              <a:rPr lang="en-US" dirty="0"/>
-              <a:t>B</a:t>
-            </a:r>
-            <a:r>
-              <a:rPr dirty="0"/>
-              <a:t>oth client and server sides</a:t>
-            </a:r>
-          </a:p>
-          <a:p>
-            <a:r>
-              <a:rPr dirty="0"/>
-              <a:t>Store-and-forward</a:t>
+              <a:rPr dirty="0"/>
+              <a:t>Internet's original killer app</a:t>
             </a:r>
             <a:endParaRPr lang="en-US" dirty="0"/>
           </a:p>
@@ -4450,11 +4061,42 @@
             <a:pPr lvl="1"/>
             <a:r>
               <a:rPr lang="en-US" dirty="0"/>
-              <a:t>E</a:t>
-            </a:r>
-            <a:r>
-              <a:rPr dirty="0"/>
-              <a:t>ach MTA buffers to disk</a:t>
+              <a:t>Example of</a:t>
+            </a:r>
+            <a:r>
+              <a:rPr dirty="0"/>
+              <a:t> pre-web design</a:t>
+            </a:r>
+          </a:p>
+          <a:p>
+            <a:r>
+              <a:rPr lang="en-US" dirty="0"/>
+              <a:t>M</a:t>
+            </a:r>
+            <a:r>
+              <a:rPr dirty="0"/>
+              <a:t>ailbox</a:t>
+            </a:r>
+            <a:r>
+              <a:rPr lang="en-US" dirty="0"/>
+              <a:t> Abstraction</a:t>
+            </a:r>
+          </a:p>
+          <a:p>
+            <a:pPr lvl="1"/>
+            <a:r>
+              <a:rPr lang="en-US" dirty="0"/>
+              <a:t>R</a:t>
+            </a:r>
+            <a:r>
+              <a:rPr dirty="0"/>
+              <a:t>endezvous point for messages</a:t>
+            </a:r>
+          </a:p>
+          <a:p>
+            <a:r>
+              <a:rPr dirty="0"/>
+              <a:t>SMTP</a:t>
             </a:r>
             <a:endParaRPr lang="en-US" dirty="0"/>
           </a:p>
@@ -4462,181 +4104,134 @@
             <a:pPr lvl="1"/>
             <a:r>
               <a:rPr lang="en-US" dirty="0"/>
+              <a:t>S</a:t>
+            </a:r>
+            <a:r>
+              <a:rPr dirty="0"/>
+              <a:t>end mail to a mailbox</a:t>
+            </a:r>
+            <a:endParaRPr lang="en-US" dirty="0"/>
+          </a:p>
+          <a:p>
+            <a:pPr lvl="1"/>
+            <a:r>
+              <a:rPr lang="en-US" dirty="0"/>
+              <a:t>S</a:t>
+            </a:r>
+            <a:r>
+              <a:rPr dirty="0"/>
+              <a:t>tore-and-forward</a:t>
+            </a:r>
+            <a:r>
+              <a:rPr lang="en-US" dirty="0"/>
+              <a:t> via </a:t>
+            </a:r>
+            <a:r>
+              <a:rPr dirty="0"/>
+              <a:t>MTA</a:t>
+            </a:r>
+            <a:r>
+              <a:rPr lang="en-US" dirty="0"/>
+              <a:t>s</a:t>
+            </a:r>
+            <a:endParaRPr dirty="0"/>
+          </a:p>
+          <a:p>
+            <a:r>
+              <a:rPr dirty="0"/>
+              <a:t>IMAP / POP</a:t>
+            </a:r>
+            <a:endParaRPr lang="en-US" dirty="0"/>
+          </a:p>
+          <a:p>
+            <a:pPr lvl="1"/>
+            <a:r>
+              <a:rPr lang="en-US" dirty="0"/>
               <a:t>R</a:t>
             </a:r>
             <a:r>
               <a:rPr dirty="0"/>
-              <a:t>etries for days if needed</a:t>
+              <a:t>etrieve mail from a mailbox</a:t>
+            </a:r>
+          </a:p>
+          <a:p>
+            <a:r>
+              <a:rPr dirty="0"/>
+              <a:t>Modern </a:t>
+            </a:r>
+            <a:r>
+              <a:rPr lang="en-US" dirty="0"/>
+              <a:t>W</a:t>
+            </a:r>
+            <a:r>
+              <a:rPr dirty="0"/>
+              <a:t>eb </a:t>
+            </a:r>
+            <a:r>
+              <a:rPr lang="en-US" dirty="0"/>
+              <a:t>M</a:t>
+            </a:r>
+            <a:r>
+              <a:rPr dirty="0"/>
+              <a:t>ail (e.g., Gmail)</a:t>
             </a:r>
             <a:endParaRPr lang="en-US" dirty="0"/>
           </a:p>
           <a:p>
             <a:pPr lvl="1"/>
             <a:r>
-              <a:rPr lang="en-US" dirty="0"/>
-              <a:t>Hides organization internals</a:t>
-            </a:r>
-            <a:endParaRPr dirty="0"/>
-          </a:p>
-          <a:p>
-            <a:r>
-              <a:rPr lang="en-US" dirty="0"/>
-              <a:t>SMTP defines the Protocol</a:t>
-            </a:r>
-          </a:p>
-          <a:p>
-            <a:pPr lvl="1"/>
-            <a:r>
-              <a:rPr dirty="0"/>
-              <a:t>ASCII command/response dialog</a:t>
-            </a:r>
-            <a:endParaRPr lang="en-US" dirty="0"/>
-          </a:p>
-          <a:p>
-            <a:pPr lvl="1"/>
-            <a:r>
-              <a:rPr lang="en-US" dirty="0"/>
-              <a:t>Influenced HTTP’s design</a:t>
-            </a:r>
-          </a:p>
-          <a:p>
-            <a:endParaRPr dirty="0"/>
-          </a:p>
-        </p:txBody>
-      </p:sp>
-      <p:sp>
-        <p:nvSpPr>
-          <p:cNvPr id="4" name="TextBox 3"/>
-          <p:cNvSpPr txBox="1"/>
+              <a:rPr dirty="0"/>
+              <a:t> HTTPS/</a:t>
+            </a:r>
+            <a:r>
+              <a:rPr dirty="0" err="1"/>
+              <a:t>R</a:t>
+            </a:r>
+            <a:r>
+              <a:rPr lang="en-US" dirty="0" err="1"/>
+              <a:t>e</a:t>
+            </a:r>
+            <a:r>
+              <a:rPr dirty="0" err="1"/>
+              <a:t>ST</a:t>
+            </a:r>
+            <a:r>
+              <a:rPr dirty="0"/>
+              <a:t> replaces IMAP</a:t>
+            </a:r>
+          </a:p>
+        </p:txBody>
+      </p:sp>
+      <p:pic>
+        <p:nvPicPr>
+          <p:cNvPr id="4" name="Picture 3" descr="smtp.png"/>
+          <p:cNvPicPr>
+            <a:picLocks noChangeAspect="1"/>
+          </p:cNvPicPr>
           <p:nvPr/>
-        </p:nvSpPr>
+        </p:nvPicPr>
+        <p:blipFill>
+          <a:blip r:embed="rId2"/>
+          <a:stretch>
+            <a:fillRect/>
+          </a:stretch>
+        </p:blipFill>
         <p:spPr>
           <a:xfrm>
-            <a:off x="6172200" y="1476360"/>
-            <a:ext cx="5181480" cy="4351320"/>
+            <a:off x="5433889" y="2181340"/>
+            <a:ext cx="6392003" cy="2473016"/>
           </a:xfrm>
           <a:prstGeom prst="rect">
             <a:avLst/>
           </a:prstGeom>
-          <a:noFill/>
         </p:spPr>
-        <p:txBody>
-          <a:bodyPr wrap="none">
-            <a:spAutoFit/>
-          </a:bodyPr>
-          <a:lstStyle/>
-          <a:p>
-            <a:r>
-              <a:rPr sz="1600">
-                <a:latin typeface="Lucida Console"/>
-              </a:rPr>
-              <a:t>HELO cs.princeton.edu</a:t>
-            </a:r>
-          </a:p>
-          <a:p>
-            <a:r>
-              <a:rPr sz="1600">
-                <a:latin typeface="Lucida Console"/>
-              </a:rPr>
-              <a:t>250 Hello daemon@mail.princeton.edu</a:t>
-            </a:r>
-          </a:p>
-          <a:p>
-            <a:r>
-              <a:rPr sz="1600">
-                <a:latin typeface="Lucida Console"/>
-              </a:rPr>
-              <a:t>MAIL FROM:&lt;bob@princeton.edu&gt;</a:t>
-            </a:r>
-          </a:p>
-          <a:p>
-            <a:r>
-              <a:rPr sz="1600">
-                <a:latin typeface="Lucida Console"/>
-              </a:rPr>
-              <a:t>250 OK</a:t>
-            </a:r>
-          </a:p>
-          <a:p>
-            <a:r>
-              <a:rPr sz="1600">
-                <a:latin typeface="Lucida Console"/>
-              </a:rPr>
-              <a:t>RCPT TO:&lt;alice@systemsapproach.org&gt;</a:t>
-            </a:r>
-          </a:p>
-          <a:p>
-            <a:r>
-              <a:rPr sz="1600">
-                <a:latin typeface="Lucida Console"/>
-              </a:rPr>
-              <a:t>250 OK</a:t>
-            </a:r>
-          </a:p>
-          <a:p>
-            <a:r>
-              <a:rPr sz="1600">
-                <a:latin typeface="Lucida Console"/>
-              </a:rPr>
-              <a:t>DATA</a:t>
-            </a:r>
-          </a:p>
-          <a:p>
-            <a:r>
-              <a:rPr sz="1600">
-                <a:latin typeface="Lucida Console"/>
-              </a:rPr>
-              <a:t>354 Start mail input; end with &lt;CRLF&gt;.&lt;CRLF&gt;</a:t>
-            </a:r>
-          </a:p>
-          <a:p>
-            <a:r>
-              <a:rPr sz="1600">
-                <a:latin typeface="Lucida Console"/>
-              </a:rPr>
-              <a:t>...message body...</a:t>
-            </a:r>
-          </a:p>
-          <a:p>
-            <a:r>
-              <a:rPr sz="1600">
-                <a:latin typeface="Lucida Console"/>
-              </a:rPr>
-              <a:t>.</a:t>
-            </a:r>
-          </a:p>
-          <a:p>
-            <a:r>
-              <a:rPr sz="1600">
-                <a:latin typeface="Lucida Console"/>
-              </a:rPr>
-              <a:t>250 OK</a:t>
-            </a:r>
-          </a:p>
-          <a:p>
-            <a:r>
-              <a:rPr sz="1600">
-                <a:latin typeface="Lucida Console"/>
-              </a:rPr>
-              <a:t>QUIT</a:t>
-            </a:r>
-          </a:p>
-          <a:p>
-            <a:r>
-              <a:rPr sz="1600">
-                <a:latin typeface="Lucida Console"/>
-              </a:rPr>
-              <a:t>221 Closing connection</a:t>
-            </a:r>
-          </a:p>
-        </p:txBody>
-      </p:sp>
+      </p:pic>
       <p:sp>
         <p:nvSpPr>
           <p:cNvPr id="5" name="Footer Placeholder 4">
             <a:extLst>
               <a:ext uri="{FF2B5EF4-FFF2-40B4-BE49-F238E27FC236}">
-                <a16:creationId xmlns:a16="http://schemas.microsoft.com/office/drawing/2014/main" id="{D65226F3-446E-4A79-8A38-209BD3545901}"/>
+                <a16:creationId xmlns:a16="http://schemas.microsoft.com/office/drawing/2014/main" id="{B21C68C8-EE6E-FC47-B1FB-BEDCC8F11676}"/>
               </a:ext>
             </a:extLst>
           </p:cNvPr>
@@ -4656,35 +4251,6 @@
               <a:rPr lang="en-US"/>
               <a:t>Copyright Peterson &amp; Davie, 2026</a:t>
             </a:r>
-          </a:p>
-        </p:txBody>
-      </p:sp>
-      <p:sp>
-        <p:nvSpPr>
-          <p:cNvPr id="6" name="Slide Number Placeholder 5">
-            <a:extLst>
-              <a:ext uri="{FF2B5EF4-FFF2-40B4-BE49-F238E27FC236}">
-                <a16:creationId xmlns:a16="http://schemas.microsoft.com/office/drawing/2014/main" id="{61A45FA8-D784-EC4C-4855-B202566F89FB}"/>
-              </a:ext>
-            </a:extLst>
-          </p:cNvPr>
-          <p:cNvSpPr>
-            <a:spLocks noGrp="1"/>
-          </p:cNvSpPr>
-          <p:nvPr>
-            <p:ph type="sldNum" sz="quarter" idx="12"/>
-          </p:nvPr>
-        </p:nvSpPr>
-        <p:spPr/>
-        <p:txBody>
-          <a:bodyPr/>
-          <a:lstStyle/>
-          <a:p>
-            <a:fld id="{394597B6-99AE-8F4E-8AC4-338DBFD9B0E5}" type="slidenum">
-              <a:rPr lang="en-US" smtClean="0"/>
-              <a:t>18</a:t>
-            </a:fld>
-            <a:endParaRPr lang="en-US"/>
           </a:p>
         </p:txBody>
       </p:sp>
@@ -4715,10 +4281,134 @@
       </p:grpSpPr>
       <p:sp>
         <p:nvSpPr>
-          <p:cNvPr id="2" name="Title 1">
+          <p:cNvPr id="2" name="Title 1"/>
+          <p:cNvSpPr>
+            <a:spLocks noGrp="1"/>
+          </p:cNvSpPr>
+          <p:nvPr>
+            <p:ph type="title"/>
+          </p:nvPr>
+        </p:nvSpPr>
+        <p:spPr/>
+        <p:txBody>
+          <a:bodyPr/>
+          <a:lstStyle/>
+          <a:p>
+            <a:r>
+              <a:rPr dirty="0"/>
+              <a:t>Message Format</a:t>
+            </a:r>
+          </a:p>
+        </p:txBody>
+      </p:sp>
+      <p:sp>
+        <p:nvSpPr>
+          <p:cNvPr id="3" name="Content Placeholder 2"/>
+          <p:cNvSpPr>
+            <a:spLocks noGrp="1"/>
+          </p:cNvSpPr>
+          <p:nvPr>
+            <p:ph idx="1"/>
+          </p:nvPr>
+        </p:nvSpPr>
+        <p:spPr/>
+        <p:txBody>
+          <a:bodyPr/>
+          <a:lstStyle/>
+          <a:p>
+            <a:r>
+              <a:rPr dirty="0"/>
+              <a:t>RFC 822 / 5322</a:t>
+            </a:r>
+            <a:endParaRPr lang="en-US" dirty="0"/>
+          </a:p>
+          <a:p>
+            <a:pPr lvl="1"/>
+            <a:r>
+              <a:rPr lang="en-US" dirty="0"/>
+              <a:t>Header + Body (b</a:t>
+            </a:r>
+            <a:r>
+              <a:rPr dirty="0"/>
+              <a:t>oth </a:t>
+            </a:r>
+            <a:r>
+              <a:rPr lang="en-US" dirty="0"/>
+              <a:t>as</a:t>
+            </a:r>
+            <a:r>
+              <a:rPr dirty="0"/>
+              <a:t> ASCII text</a:t>
+            </a:r>
+            <a:r>
+              <a:rPr lang="en-US" dirty="0"/>
+              <a:t>)</a:t>
+            </a:r>
+            <a:endParaRPr dirty="0"/>
+          </a:p>
+          <a:p>
+            <a:pPr lvl="1"/>
+            <a:r>
+              <a:rPr dirty="0"/>
+              <a:t>Headers: To, From, Subject, Date, Received</a:t>
+            </a:r>
+          </a:p>
+          <a:p>
+            <a:r>
+              <a:rPr dirty="0"/>
+              <a:t>MIME (1992)</a:t>
+            </a:r>
+            <a:endParaRPr lang="en-US" dirty="0"/>
+          </a:p>
+          <a:p>
+            <a:pPr lvl="1"/>
+            <a:r>
+              <a:rPr lang="en-US" dirty="0"/>
+              <a:t>E</a:t>
+            </a:r>
+            <a:r>
+              <a:rPr dirty="0"/>
+              <a:t>xtends email to carry binary content</a:t>
+            </a:r>
+          </a:p>
+          <a:p>
+            <a:pPr lvl="1"/>
+            <a:r>
+              <a:rPr dirty="0"/>
+              <a:t>Content-Type declares the data type</a:t>
+            </a:r>
+            <a:endParaRPr lang="en-US" dirty="0"/>
+          </a:p>
+          <a:p>
+            <a:pPr lvl="2"/>
+            <a:r>
+              <a:rPr lang="en-US" dirty="0"/>
+              <a:t>e.g., </a:t>
+            </a:r>
+            <a:r>
+              <a:rPr dirty="0"/>
+              <a:t>image/jpeg, audio/mp3, multipart/mixed</a:t>
+            </a:r>
+          </a:p>
+          <a:p>
+            <a:pPr lvl="1"/>
+            <a:r>
+              <a:rPr lang="en-US" dirty="0"/>
+              <a:t>B</a:t>
+            </a:r>
+            <a:r>
+              <a:rPr dirty="0"/>
+              <a:t>ase64 maps binary to ASCII</a:t>
+            </a:r>
+          </a:p>
+        </p:txBody>
+      </p:sp>
+      <p:sp>
+        <p:nvSpPr>
+          <p:cNvPr id="4" name="Footer Placeholder 3">
             <a:extLst>
               <a:ext uri="{FF2B5EF4-FFF2-40B4-BE49-F238E27FC236}">
-                <a16:creationId xmlns:a16="http://schemas.microsoft.com/office/drawing/2014/main" id="{8AFD0928-D2E8-0C1C-E0CF-52C06E29B1C7}"/>
+                <a16:creationId xmlns:a16="http://schemas.microsoft.com/office/drawing/2014/main" id="{39F11885-A0CF-D1C9-5325-78DB6126988E}"/>
               </a:ext>
             </a:extLst>
           </p:cNvPr>
@@ -4726,7 +4416,7 @@
             <a:spLocks noGrp="1"/>
           </p:cNvSpPr>
           <p:nvPr>
-            <p:ph type="ctrTitle"/>
+            <p:ph type="ftr" sz="quarter" idx="11"/>
           </p:nvPr>
         </p:nvSpPr>
         <p:spPr/>
@@ -4735,72 +4425,13 @@
           <a:lstStyle/>
           <a:p>
             <a:r>
-              <a:rPr lang="en-US" dirty="0"/>
-              <a:t>Adaptive Streaming</a:t>
-            </a:r>
-          </a:p>
-        </p:txBody>
-      </p:sp>
-      <p:sp>
-        <p:nvSpPr>
-          <p:cNvPr id="3" name="Footer Placeholder 2">
-            <a:extLst>
-              <a:ext uri="{FF2B5EF4-FFF2-40B4-BE49-F238E27FC236}">
-                <a16:creationId xmlns:a16="http://schemas.microsoft.com/office/drawing/2014/main" id="{601B563F-32C2-B11D-27C3-210E04C43D19}"/>
-              </a:ext>
-            </a:extLst>
-          </p:cNvPr>
-          <p:cNvSpPr>
-            <a:spLocks noGrp="1"/>
-          </p:cNvSpPr>
-          <p:nvPr>
-            <p:ph type="ftr" sz="quarter" idx="11"/>
-          </p:nvPr>
-        </p:nvSpPr>
-        <p:spPr/>
-        <p:txBody>
-          <a:bodyPr/>
-          <a:lstStyle/>
-          <a:p>
-            <a:endParaRPr lang="en-US"/>
-          </a:p>
-        </p:txBody>
-      </p:sp>
-      <p:sp>
-        <p:nvSpPr>
-          <p:cNvPr id="4" name="Slide Number Placeholder 3">
-            <a:extLst>
-              <a:ext uri="{FF2B5EF4-FFF2-40B4-BE49-F238E27FC236}">
-                <a16:creationId xmlns:a16="http://schemas.microsoft.com/office/drawing/2014/main" id="{84B7E794-1DB2-AE50-44CA-FAC871D6C6C7}"/>
-              </a:ext>
-            </a:extLst>
-          </p:cNvPr>
-          <p:cNvSpPr>
-            <a:spLocks noGrp="1"/>
-          </p:cNvSpPr>
-          <p:nvPr>
-            <p:ph type="sldNum" sz="quarter" idx="12"/>
-          </p:nvPr>
-        </p:nvSpPr>
-        <p:spPr/>
-        <p:txBody>
-          <a:bodyPr/>
-          <a:lstStyle/>
-          <a:p>
-            <a:fld id="{394597B6-99AE-8F4E-8AC4-338DBFD9B0E5}" type="slidenum">
-              <a:rPr lang="en-US" smtClean="0"/>
-              <a:t>19</a:t>
-            </a:fld>
-            <a:endParaRPr lang="en-US"/>
+              <a:rPr lang="en-US"/>
+              <a:t>Copyright Peterson &amp; Davie, 2026</a:t>
+            </a:r>
           </a:p>
         </p:txBody>
       </p:sp>
     </p:spTree>
-    <p:extLst>
-      <p:ext uri="{BB962C8B-B14F-4D97-AF65-F5344CB8AC3E}">
-        <p14:creationId xmlns:p14="http://schemas.microsoft.com/office/powerpoint/2010/main" val="23912507"/>
-      </p:ext>
-    </p:extLst>
   </p:cSld>
   <p:clrMapOvr>
     <a:masterClrMapping/>
@@ -4944,35 +4575,6 @@
               <a:rPr lang="en-US"/>
               <a:t>Copyright Peterson &amp; Davie, 2026</a:t>
             </a:r>
-          </a:p>
-        </p:txBody>
-      </p:sp>
-      <p:sp>
-        <p:nvSpPr>
-          <p:cNvPr id="5" name="Slide Number Placeholder 4">
-            <a:extLst>
-              <a:ext uri="{FF2B5EF4-FFF2-40B4-BE49-F238E27FC236}">
-                <a16:creationId xmlns:a16="http://schemas.microsoft.com/office/drawing/2014/main" id="{B8007B94-10C7-BA94-F90C-52CAB6C9348B}"/>
-              </a:ext>
-            </a:extLst>
-          </p:cNvPr>
-          <p:cNvSpPr>
-            <a:spLocks noGrp="1"/>
-          </p:cNvSpPr>
-          <p:nvPr>
-            <p:ph type="sldNum" sz="quarter" idx="12"/>
-          </p:nvPr>
-        </p:nvSpPr>
-        <p:spPr/>
-        <p:txBody>
-          <a:bodyPr/>
-          <a:lstStyle/>
-          <a:p>
-            <a:fld id="{394597B6-99AE-8F4E-8AC4-338DBFD9B0E5}" type="slidenum">
-              <a:rPr lang="en-US" smtClean="0"/>
-              <a:t>2</a:t>
-            </a:fld>
-            <a:endParaRPr lang="en-US"/>
           </a:p>
         </p:txBody>
       </p:sp>
@@ -5017,10 +4619,9 @@
           <a:lstStyle/>
           <a:p>
             <a:r>
-              <a:rPr lang="en-US" dirty="0"/>
-              <a:t>Overview</a:t>
-            </a:r>
-            <a:endParaRPr dirty="0"/>
+              <a:rPr dirty="0"/>
+              <a:t>Message Transfer</a:t>
+            </a:r>
           </a:p>
         </p:txBody>
       </p:sp>
@@ -5036,55 +4637,19 @@
         </p:nvSpPr>
         <p:spPr>
           <a:xfrm>
-            <a:off x="838079" y="1300088"/>
-            <a:ext cx="9793198" cy="3397649"/>
+            <a:off x="838080" y="1476360"/>
+            <a:ext cx="5181480" cy="3679534"/>
           </a:xfrm>
         </p:spPr>
         <p:txBody>
           <a:bodyPr>
-            <a:normAutofit fontScale="92500"/>
+            <a:normAutofit lnSpcReduction="10000"/>
           </a:bodyPr>
           <a:lstStyle/>
           <a:p>
             <a:r>
               <a:rPr dirty="0"/>
-              <a:t>Video</a:t>
-            </a:r>
-            <a:r>
-              <a:rPr lang="en-US" dirty="0"/>
-              <a:t> </a:t>
-            </a:r>
-            <a:r>
-              <a:rPr dirty="0"/>
-              <a:t>must adapt to variable network capacity</a:t>
-            </a:r>
-          </a:p>
-          <a:p>
-            <a:r>
-              <a:rPr dirty="0"/>
-              <a:t>DASH</a:t>
-            </a:r>
-            <a:r>
-              <a:rPr lang="en-US" dirty="0"/>
-              <a:t> (Dynamic Adaptable Streaming over HTTP)</a:t>
-            </a:r>
-          </a:p>
-          <a:p>
-            <a:pPr lvl="1"/>
-            <a:r>
-              <a:rPr lang="en-US" dirty="0"/>
-              <a:t>S</a:t>
-            </a:r>
-            <a:r>
-              <a:rPr dirty="0"/>
-              <a:t>tore video as N quality levels × M time segments</a:t>
-            </a:r>
-          </a:p>
-          <a:p>
-            <a:pPr lvl="1"/>
-            <a:r>
-              <a:rPr dirty="0"/>
-              <a:t>Client downloads MPD manifest</a:t>
+              <a:t>MTA (Message Transfer Agent)</a:t>
             </a:r>
             <a:endParaRPr lang="en-US" dirty="0"/>
           </a:p>
@@ -5092,32 +4657,17 @@
             <a:pPr lvl="1"/>
             <a:r>
               <a:rPr lang="en-US" dirty="0"/>
-              <a:t>Issue HTTP </a:t>
-            </a:r>
-            <a:r>
-              <a:rPr dirty="0"/>
-              <a:t>GET</a:t>
-            </a:r>
-            <a:r>
-              <a:rPr lang="en-US" dirty="0"/>
-              <a:t> requests for one</a:t>
-            </a:r>
-            <a:r>
-              <a:rPr dirty="0"/>
-              <a:t> segment one at a time</a:t>
-            </a:r>
-          </a:p>
-          <a:p>
-            <a:r>
-              <a:rPr dirty="0"/>
-              <a:t>Each segment is an opportunity to request a different quality level</a:t>
-            </a:r>
-          </a:p>
-          <a:p>
-            <a:pPr lvl="1"/>
-            <a:r>
-              <a:rPr dirty="0"/>
-              <a:t>Buffer draining → request lower quality</a:t>
+              <a:t>B</a:t>
+            </a:r>
+            <a:r>
+              <a:rPr dirty="0"/>
+              <a:t>oth client and server sides</a:t>
+            </a:r>
+          </a:p>
+          <a:p>
+            <a:r>
+              <a:rPr dirty="0"/>
+              <a:t>Store-and-forward</a:t>
             </a:r>
             <a:endParaRPr lang="en-US" dirty="0"/>
           </a:p>
@@ -5125,50 +4675,193 @@
             <a:pPr lvl="1"/>
             <a:r>
               <a:rPr lang="en-US" dirty="0"/>
-              <a:t>B</a:t>
-            </a:r>
-            <a:r>
-              <a:rPr dirty="0"/>
-              <a:t>uffer filling → try higher</a:t>
-            </a:r>
-            <a:r>
-              <a:rPr lang="en-US" dirty="0"/>
-              <a:t> quality</a:t>
+              <a:t>E</a:t>
+            </a:r>
+            <a:r>
+              <a:rPr dirty="0"/>
+              <a:t>ach MTA buffers to disk</a:t>
+            </a:r>
+            <a:endParaRPr lang="en-US" dirty="0"/>
+          </a:p>
+          <a:p>
+            <a:pPr lvl="1"/>
+            <a:r>
+              <a:rPr lang="en-US" dirty="0"/>
+              <a:t>R</a:t>
+            </a:r>
+            <a:r>
+              <a:rPr dirty="0"/>
+              <a:t>etries for days if needed</a:t>
+            </a:r>
+            <a:endParaRPr lang="en-US" dirty="0"/>
+          </a:p>
+          <a:p>
+            <a:pPr lvl="1"/>
+            <a:r>
+              <a:rPr lang="en-US" dirty="0"/>
+              <a:t>Hides organization internals</a:t>
             </a:r>
             <a:endParaRPr dirty="0"/>
           </a:p>
-        </p:txBody>
-      </p:sp>
-      <p:pic>
-        <p:nvPicPr>
-          <p:cNvPr id="4" name="Picture 3" descr="buffer.png"/>
-          <p:cNvPicPr>
-            <a:picLocks noChangeAspect="1"/>
-          </p:cNvPicPr>
+          <a:p>
+            <a:r>
+              <a:rPr lang="en-US" dirty="0"/>
+              <a:t>SMTP defines the Protocol</a:t>
+            </a:r>
+          </a:p>
+          <a:p>
+            <a:pPr lvl="1"/>
+            <a:r>
+              <a:rPr dirty="0"/>
+              <a:t>ASCII command/response dialog</a:t>
+            </a:r>
+            <a:endParaRPr lang="en-US" dirty="0"/>
+          </a:p>
+          <a:p>
+            <a:pPr lvl="1"/>
+            <a:r>
+              <a:rPr lang="en-US" dirty="0"/>
+              <a:t>Influenced HTTP’s design</a:t>
+            </a:r>
+          </a:p>
+          <a:p>
+            <a:endParaRPr dirty="0"/>
+          </a:p>
+        </p:txBody>
+      </p:sp>
+      <p:sp>
+        <p:nvSpPr>
+          <p:cNvPr id="4" name="TextBox 3"/>
+          <p:cNvSpPr txBox="1"/>
           <p:nvPr/>
-        </p:nvPicPr>
-        <p:blipFill>
-          <a:blip r:embed="rId2"/>
-          <a:stretch>
-            <a:fillRect/>
-          </a:stretch>
-        </p:blipFill>
+        </p:nvSpPr>
         <p:spPr>
           <a:xfrm>
-            <a:off x="2206159" y="4583018"/>
-            <a:ext cx="7779682" cy="1431880"/>
+            <a:off x="6172200" y="1476360"/>
+            <a:ext cx="5181480" cy="4351320"/>
           </a:xfrm>
           <a:prstGeom prst="rect">
             <a:avLst/>
           </a:prstGeom>
+          <a:noFill/>
         </p:spPr>
-      </p:pic>
+        <p:txBody>
+          <a:bodyPr wrap="none">
+            <a:spAutoFit/>
+          </a:bodyPr>
+          <a:lstStyle/>
+          <a:p>
+            <a:r>
+              <a:rPr sz="1600">
+                <a:latin typeface="Lucida Console"/>
+              </a:rPr>
+              <a:t>HELO cs.princeton.edu</a:t>
+            </a:r>
+          </a:p>
+          <a:p>
+            <a:r>
+              <a:rPr sz="1600">
+                <a:latin typeface="Lucida Console"/>
+              </a:rPr>
+              <a:t>250 Hello daemon@mail.princeton.edu</a:t>
+            </a:r>
+          </a:p>
+          <a:p>
+            <a:r>
+              <a:rPr sz="1600">
+                <a:latin typeface="Lucida Console"/>
+              </a:rPr>
+              <a:t>MAIL FROM:&lt;bob@princeton.edu&gt;</a:t>
+            </a:r>
+          </a:p>
+          <a:p>
+            <a:r>
+              <a:rPr sz="1600">
+                <a:latin typeface="Lucida Console"/>
+              </a:rPr>
+              <a:t>250 OK</a:t>
+            </a:r>
+          </a:p>
+          <a:p>
+            <a:r>
+              <a:rPr sz="1600">
+                <a:latin typeface="Lucida Console"/>
+              </a:rPr>
+              <a:t>RCPT TO:&lt;alice@systemsapproach.org&gt;</a:t>
+            </a:r>
+          </a:p>
+          <a:p>
+            <a:r>
+              <a:rPr sz="1600">
+                <a:latin typeface="Lucida Console"/>
+              </a:rPr>
+              <a:t>250 OK</a:t>
+            </a:r>
+          </a:p>
+          <a:p>
+            <a:r>
+              <a:rPr sz="1600">
+                <a:latin typeface="Lucida Console"/>
+              </a:rPr>
+              <a:t>DATA</a:t>
+            </a:r>
+          </a:p>
+          <a:p>
+            <a:r>
+              <a:rPr sz="1600">
+                <a:latin typeface="Lucida Console"/>
+              </a:rPr>
+              <a:t>354 Start mail input; end with &lt;CRLF&gt;.&lt;CRLF&gt;</a:t>
+            </a:r>
+          </a:p>
+          <a:p>
+            <a:r>
+              <a:rPr sz="1600">
+                <a:latin typeface="Lucida Console"/>
+              </a:rPr>
+              <a:t>...message body...</a:t>
+            </a:r>
+          </a:p>
+          <a:p>
+            <a:r>
+              <a:rPr sz="1600">
+                <a:latin typeface="Lucida Console"/>
+              </a:rPr>
+              <a:t>.</a:t>
+            </a:r>
+          </a:p>
+          <a:p>
+            <a:r>
+              <a:rPr sz="1600">
+                <a:latin typeface="Lucida Console"/>
+              </a:rPr>
+              <a:t>250 OK</a:t>
+            </a:r>
+          </a:p>
+          <a:p>
+            <a:r>
+              <a:rPr sz="1600">
+                <a:latin typeface="Lucida Console"/>
+              </a:rPr>
+              <a:t>QUIT</a:t>
+            </a:r>
+          </a:p>
+          <a:p>
+            <a:r>
+              <a:rPr sz="1600">
+                <a:latin typeface="Lucida Console"/>
+              </a:rPr>
+              <a:t>221 Closing connection</a:t>
+            </a:r>
+          </a:p>
+        </p:txBody>
+      </p:sp>
       <p:sp>
         <p:nvSpPr>
           <p:cNvPr id="5" name="Footer Placeholder 4">
             <a:extLst>
               <a:ext uri="{FF2B5EF4-FFF2-40B4-BE49-F238E27FC236}">
-                <a16:creationId xmlns:a16="http://schemas.microsoft.com/office/drawing/2014/main" id="{0CD6D699-E577-5B1F-18B2-709570B5EEC7}"/>
+                <a16:creationId xmlns:a16="http://schemas.microsoft.com/office/drawing/2014/main" id="{D65226F3-446E-4A79-8A38-209BD3545901}"/>
               </a:ext>
             </a:extLst>
           </p:cNvPr>
@@ -5188,35 +4881,6 @@
               <a:rPr lang="en-US"/>
               <a:t>Copyright Peterson &amp; Davie, 2026</a:t>
             </a:r>
-          </a:p>
-        </p:txBody>
-      </p:sp>
-      <p:sp>
-        <p:nvSpPr>
-          <p:cNvPr id="6" name="Slide Number Placeholder 5">
-            <a:extLst>
-              <a:ext uri="{FF2B5EF4-FFF2-40B4-BE49-F238E27FC236}">
-                <a16:creationId xmlns:a16="http://schemas.microsoft.com/office/drawing/2014/main" id="{30C515CB-9466-75E2-5C04-002D28FC611E}"/>
-              </a:ext>
-            </a:extLst>
-          </p:cNvPr>
-          <p:cNvSpPr>
-            <a:spLocks noGrp="1"/>
-          </p:cNvSpPr>
-          <p:nvPr>
-            <p:ph type="sldNum" sz="quarter" idx="12"/>
-          </p:nvPr>
-        </p:nvSpPr>
-        <p:spPr/>
-        <p:txBody>
-          <a:bodyPr/>
-          <a:lstStyle/>
-          <a:p>
-            <a:fld id="{394597B6-99AE-8F4E-8AC4-338DBFD9B0E5}" type="slidenum">
-              <a:rPr lang="en-US" smtClean="0"/>
-              <a:t>20</a:t>
-            </a:fld>
-            <a:endParaRPr lang="en-US"/>
           </a:p>
         </p:txBody>
       </p:sp>
@@ -5247,6 +4911,307 @@
       </p:grpSpPr>
       <p:sp>
         <p:nvSpPr>
+          <p:cNvPr id="2" name="Title 1">
+            <a:extLst>
+              <a:ext uri="{FF2B5EF4-FFF2-40B4-BE49-F238E27FC236}">
+                <a16:creationId xmlns:a16="http://schemas.microsoft.com/office/drawing/2014/main" id="{8AFD0928-D2E8-0C1C-E0CF-52C06E29B1C7}"/>
+              </a:ext>
+            </a:extLst>
+          </p:cNvPr>
+          <p:cNvSpPr>
+            <a:spLocks noGrp="1"/>
+          </p:cNvSpPr>
+          <p:nvPr>
+            <p:ph type="ctrTitle"/>
+          </p:nvPr>
+        </p:nvSpPr>
+        <p:spPr/>
+        <p:txBody>
+          <a:bodyPr/>
+          <a:lstStyle/>
+          <a:p>
+            <a:r>
+              <a:rPr lang="en-US" dirty="0"/>
+              <a:t>Adaptive Streaming</a:t>
+            </a:r>
+          </a:p>
+        </p:txBody>
+      </p:sp>
+      <p:sp>
+        <p:nvSpPr>
+          <p:cNvPr id="3" name="Footer Placeholder 2">
+            <a:extLst>
+              <a:ext uri="{FF2B5EF4-FFF2-40B4-BE49-F238E27FC236}">
+                <a16:creationId xmlns:a16="http://schemas.microsoft.com/office/drawing/2014/main" id="{601B563F-32C2-B11D-27C3-210E04C43D19}"/>
+              </a:ext>
+            </a:extLst>
+          </p:cNvPr>
+          <p:cNvSpPr>
+            <a:spLocks noGrp="1"/>
+          </p:cNvSpPr>
+          <p:nvPr>
+            <p:ph type="ftr" sz="quarter" idx="11"/>
+          </p:nvPr>
+        </p:nvSpPr>
+        <p:spPr/>
+        <p:txBody>
+          <a:bodyPr/>
+          <a:lstStyle/>
+          <a:p>
+            <a:r>
+              <a:rPr lang="en-US"/>
+              <a:t>Copyright Peterson &amp; Davie, 2026</a:t>
+            </a:r>
+          </a:p>
+        </p:txBody>
+      </p:sp>
+    </p:spTree>
+    <p:extLst>
+      <p:ext uri="{BB962C8B-B14F-4D97-AF65-F5344CB8AC3E}">
+        <p14:creationId xmlns:p14="http://schemas.microsoft.com/office/powerpoint/2010/main" val="23912507"/>
+      </p:ext>
+    </p:extLst>
+  </p:cSld>
+  <p:clrMapOvr>
+    <a:masterClrMapping/>
+  </p:clrMapOvr>
+</p:sld>
+</file>
+
+<file path=ppt/slides/slide22.xml><?xml version="1.0" encoding="utf-8"?>
+<p:sld xmlns:a="http://schemas.openxmlformats.org/drawingml/2006/main" xmlns:r="http://schemas.openxmlformats.org/officeDocument/2006/relationships" xmlns:p="http://schemas.openxmlformats.org/presentationml/2006/main">
+  <p:cSld>
+    <p:spTree>
+      <p:nvGrpSpPr>
+        <p:cNvPr id="1" name=""/>
+        <p:cNvGrpSpPr/>
+        <p:nvPr/>
+      </p:nvGrpSpPr>
+      <p:grpSpPr>
+        <a:xfrm>
+          <a:off x="0" y="0"/>
+          <a:ext cx="0" cy="0"/>
+          <a:chOff x="0" y="0"/>
+          <a:chExt cx="0" cy="0"/>
+        </a:xfrm>
+      </p:grpSpPr>
+      <p:sp>
+        <p:nvSpPr>
+          <p:cNvPr id="2" name="Title 1"/>
+          <p:cNvSpPr>
+            <a:spLocks noGrp="1"/>
+          </p:cNvSpPr>
+          <p:nvPr>
+            <p:ph type="title"/>
+          </p:nvPr>
+        </p:nvSpPr>
+        <p:spPr/>
+        <p:txBody>
+          <a:bodyPr/>
+          <a:lstStyle/>
+          <a:p>
+            <a:r>
+              <a:rPr lang="en-US" dirty="0"/>
+              <a:t>Overview</a:t>
+            </a:r>
+            <a:endParaRPr dirty="0"/>
+          </a:p>
+        </p:txBody>
+      </p:sp>
+      <p:sp>
+        <p:nvSpPr>
+          <p:cNvPr id="3" name="Content Placeholder 2"/>
+          <p:cNvSpPr>
+            <a:spLocks noGrp="1"/>
+          </p:cNvSpPr>
+          <p:nvPr>
+            <p:ph idx="1"/>
+          </p:nvPr>
+        </p:nvSpPr>
+        <p:spPr>
+          <a:xfrm>
+            <a:off x="838079" y="1300088"/>
+            <a:ext cx="9793198" cy="3397649"/>
+          </a:xfrm>
+        </p:spPr>
+        <p:txBody>
+          <a:bodyPr>
+            <a:normAutofit fontScale="92500"/>
+          </a:bodyPr>
+          <a:lstStyle/>
+          <a:p>
+            <a:r>
+              <a:rPr dirty="0"/>
+              <a:t>Video</a:t>
+            </a:r>
+            <a:r>
+              <a:rPr lang="en-US" dirty="0"/>
+              <a:t> </a:t>
+            </a:r>
+            <a:r>
+              <a:rPr dirty="0"/>
+              <a:t>must adapt to variable network capacity</a:t>
+            </a:r>
+          </a:p>
+          <a:p>
+            <a:r>
+              <a:rPr dirty="0"/>
+              <a:t>DASH</a:t>
+            </a:r>
+            <a:r>
+              <a:rPr lang="en-US" dirty="0"/>
+              <a:t> (Dynamic Adaptable Streaming over HTTP)</a:t>
+            </a:r>
+          </a:p>
+          <a:p>
+            <a:pPr lvl="1"/>
+            <a:r>
+              <a:rPr lang="en-US" dirty="0"/>
+              <a:t>S</a:t>
+            </a:r>
+            <a:r>
+              <a:rPr dirty="0"/>
+              <a:t>tore video as N quality levels × M time segments</a:t>
+            </a:r>
+          </a:p>
+          <a:p>
+            <a:pPr lvl="1"/>
+            <a:r>
+              <a:rPr dirty="0"/>
+              <a:t>Client downloads MPD manifest</a:t>
+            </a:r>
+            <a:endParaRPr lang="en-US" dirty="0"/>
+          </a:p>
+          <a:p>
+            <a:pPr lvl="1"/>
+            <a:r>
+              <a:rPr lang="en-US" dirty="0"/>
+              <a:t>Issue HTTP </a:t>
+            </a:r>
+            <a:r>
+              <a:rPr dirty="0"/>
+              <a:t>GET</a:t>
+            </a:r>
+            <a:r>
+              <a:rPr lang="en-US" dirty="0"/>
+              <a:t> requests for one</a:t>
+            </a:r>
+            <a:r>
+              <a:rPr dirty="0"/>
+              <a:t> segment one at a time</a:t>
+            </a:r>
+          </a:p>
+          <a:p>
+            <a:r>
+              <a:rPr dirty="0"/>
+              <a:t>Each segment is an opportunity to request a different quality level</a:t>
+            </a:r>
+          </a:p>
+          <a:p>
+            <a:pPr lvl="1"/>
+            <a:r>
+              <a:rPr dirty="0"/>
+              <a:t>Buffer draining → request lower quality</a:t>
+            </a:r>
+            <a:endParaRPr lang="en-US" dirty="0"/>
+          </a:p>
+          <a:p>
+            <a:pPr lvl="1"/>
+            <a:r>
+              <a:rPr lang="en-US" dirty="0"/>
+              <a:t>B</a:t>
+            </a:r>
+            <a:r>
+              <a:rPr dirty="0"/>
+              <a:t>uffer filling → try higher</a:t>
+            </a:r>
+            <a:r>
+              <a:rPr lang="en-US" dirty="0"/>
+              <a:t> quality</a:t>
+            </a:r>
+            <a:endParaRPr dirty="0"/>
+          </a:p>
+        </p:txBody>
+      </p:sp>
+      <p:pic>
+        <p:nvPicPr>
+          <p:cNvPr id="4" name="Picture 3" descr="buffer.png"/>
+          <p:cNvPicPr>
+            <a:picLocks noChangeAspect="1"/>
+          </p:cNvPicPr>
+          <p:nvPr/>
+        </p:nvPicPr>
+        <p:blipFill>
+          <a:blip r:embed="rId2"/>
+          <a:stretch>
+            <a:fillRect/>
+          </a:stretch>
+        </p:blipFill>
+        <p:spPr>
+          <a:xfrm>
+            <a:off x="2206159" y="4583018"/>
+            <a:ext cx="7779682" cy="1431880"/>
+          </a:xfrm>
+          <a:prstGeom prst="rect">
+            <a:avLst/>
+          </a:prstGeom>
+        </p:spPr>
+      </p:pic>
+      <p:sp>
+        <p:nvSpPr>
+          <p:cNvPr id="5" name="Footer Placeholder 4">
+            <a:extLst>
+              <a:ext uri="{FF2B5EF4-FFF2-40B4-BE49-F238E27FC236}">
+                <a16:creationId xmlns:a16="http://schemas.microsoft.com/office/drawing/2014/main" id="{0CD6D699-E577-5B1F-18B2-709570B5EEC7}"/>
+              </a:ext>
+            </a:extLst>
+          </p:cNvPr>
+          <p:cNvSpPr>
+            <a:spLocks noGrp="1"/>
+          </p:cNvSpPr>
+          <p:nvPr>
+            <p:ph type="ftr" sz="quarter" idx="11"/>
+          </p:nvPr>
+        </p:nvSpPr>
+        <p:spPr/>
+        <p:txBody>
+          <a:bodyPr/>
+          <a:lstStyle/>
+          <a:p>
+            <a:r>
+              <a:rPr lang="en-US"/>
+              <a:t>Copyright Peterson &amp; Davie, 2026</a:t>
+            </a:r>
+          </a:p>
+        </p:txBody>
+      </p:sp>
+    </p:spTree>
+  </p:cSld>
+  <p:clrMapOvr>
+    <a:masterClrMapping/>
+  </p:clrMapOvr>
+</p:sld>
+</file>
+
+<file path=ppt/slides/slide23.xml><?xml version="1.0" encoding="utf-8"?>
+<p:sld xmlns:a="http://schemas.openxmlformats.org/drawingml/2006/main" xmlns:r="http://schemas.openxmlformats.org/officeDocument/2006/relationships" xmlns:p="http://schemas.openxmlformats.org/presentationml/2006/main">
+  <p:cSld>
+    <p:spTree>
+      <p:nvGrpSpPr>
+        <p:cNvPr id="1" name=""/>
+        <p:cNvGrpSpPr/>
+        <p:nvPr/>
+      </p:nvGrpSpPr>
+      <p:grpSpPr>
+        <a:xfrm>
+          <a:off x="0" y="0"/>
+          <a:ext cx="0" cy="0"/>
+          <a:chOff x="0" y="0"/>
+          <a:chExt cx="0" cy="0"/>
+        </a:xfrm>
+      </p:grpSpPr>
+      <p:sp>
+        <p:nvSpPr>
           <p:cNvPr id="2" name="Title 1"/>
           <p:cNvSpPr>
             <a:spLocks noGrp="1"/>
@@ -5408,35 +5373,6 @@
               <a:rPr lang="en-US"/>
               <a:t>Copyright Peterson &amp; Davie, 2026</a:t>
             </a:r>
-          </a:p>
-        </p:txBody>
-      </p:sp>
-      <p:sp>
-        <p:nvSpPr>
-          <p:cNvPr id="5" name="Slide Number Placeholder 4">
-            <a:extLst>
-              <a:ext uri="{FF2B5EF4-FFF2-40B4-BE49-F238E27FC236}">
-                <a16:creationId xmlns:a16="http://schemas.microsoft.com/office/drawing/2014/main" id="{D735982A-2D33-7237-5771-E33EBC20F2D0}"/>
-              </a:ext>
-            </a:extLst>
-          </p:cNvPr>
-          <p:cNvSpPr>
-            <a:spLocks noGrp="1"/>
-          </p:cNvSpPr>
-          <p:nvPr>
-            <p:ph type="sldNum" sz="quarter" idx="12"/>
-          </p:nvPr>
-        </p:nvSpPr>
-        <p:spPr/>
-        <p:txBody>
-          <a:bodyPr/>
-          <a:lstStyle/>
-          <a:p>
-            <a:fld id="{394597B6-99AE-8F4E-8AC4-338DBFD9B0E5}" type="slidenum">
-              <a:rPr lang="en-US" smtClean="0"/>
-              <a:t>21</a:t>
-            </a:fld>
-            <a:endParaRPr lang="en-US"/>
           </a:p>
         </p:txBody>
       </p:sp>
@@ -5653,35 +5589,6 @@
           </a:p>
         </p:txBody>
       </p:sp>
-      <p:sp>
-        <p:nvSpPr>
-          <p:cNvPr id="5" name="Slide Number Placeholder 4">
-            <a:extLst>
-              <a:ext uri="{FF2B5EF4-FFF2-40B4-BE49-F238E27FC236}">
-                <a16:creationId xmlns:a16="http://schemas.microsoft.com/office/drawing/2014/main" id="{24631DBA-731B-3B11-F97F-BDCB0EC06B85}"/>
-              </a:ext>
-            </a:extLst>
-          </p:cNvPr>
-          <p:cNvSpPr>
-            <a:spLocks noGrp="1"/>
-          </p:cNvSpPr>
-          <p:nvPr>
-            <p:ph type="sldNum" sz="quarter" idx="12"/>
-          </p:nvPr>
-        </p:nvSpPr>
-        <p:spPr/>
-        <p:txBody>
-          <a:bodyPr/>
-          <a:lstStyle/>
-          <a:p>
-            <a:fld id="{394597B6-99AE-8F4E-8AC4-338DBFD9B0E5}" type="slidenum">
-              <a:rPr lang="en-US" smtClean="0"/>
-              <a:t>3</a:t>
-            </a:fld>
-            <a:endParaRPr lang="en-US"/>
-          </a:p>
-        </p:txBody>
-      </p:sp>
     </p:spTree>
   </p:cSld>
   <p:clrMapOvr>
@@ -5947,35 +5854,6 @@
       </p:sp>
       <p:sp>
         <p:nvSpPr>
-          <p:cNvPr id="6" name="Slide Number Placeholder 5">
-            <a:extLst>
-              <a:ext uri="{FF2B5EF4-FFF2-40B4-BE49-F238E27FC236}">
-                <a16:creationId xmlns:a16="http://schemas.microsoft.com/office/drawing/2014/main" id="{6EC49477-FBAE-0374-59B2-22F81F1C5B38}"/>
-              </a:ext>
-            </a:extLst>
-          </p:cNvPr>
-          <p:cNvSpPr>
-            <a:spLocks noGrp="1"/>
-          </p:cNvSpPr>
-          <p:nvPr>
-            <p:ph type="sldNum" sz="quarter" idx="12"/>
-          </p:nvPr>
-        </p:nvSpPr>
-        <p:spPr/>
-        <p:txBody>
-          <a:bodyPr/>
-          <a:lstStyle/>
-          <a:p>
-            <a:fld id="{394597B6-99AE-8F4E-8AC4-338DBFD9B0E5}" type="slidenum">
-              <a:rPr lang="en-US" smtClean="0"/>
-              <a:t>4</a:t>
-            </a:fld>
-            <a:endParaRPr lang="en-US"/>
-          </a:p>
-        </p:txBody>
-      </p:sp>
-      <p:sp>
-        <p:nvSpPr>
           <p:cNvPr id="7" name="TextBox 6">
             <a:extLst>
               <a:ext uri="{FF2B5EF4-FFF2-40B4-BE49-F238E27FC236}">
@@ -6501,35 +6379,6 @@
           </a:p>
         </p:txBody>
       </p:sp>
-      <p:sp>
-        <p:nvSpPr>
-          <p:cNvPr id="6" name="Slide Number Placeholder 5">
-            <a:extLst>
-              <a:ext uri="{FF2B5EF4-FFF2-40B4-BE49-F238E27FC236}">
-                <a16:creationId xmlns:a16="http://schemas.microsoft.com/office/drawing/2014/main" id="{A01B1F72-73A7-D869-EF8E-A8794328469F}"/>
-              </a:ext>
-            </a:extLst>
-          </p:cNvPr>
-          <p:cNvSpPr>
-            <a:spLocks noGrp="1"/>
-          </p:cNvSpPr>
-          <p:nvPr>
-            <p:ph type="sldNum" sz="quarter" idx="12"/>
-          </p:nvPr>
-        </p:nvSpPr>
-        <p:spPr/>
-        <p:txBody>
-          <a:bodyPr/>
-          <a:lstStyle/>
-          <a:p>
-            <a:fld id="{394597B6-99AE-8F4E-8AC4-338DBFD9B0E5}" type="slidenum">
-              <a:rPr lang="en-US" smtClean="0"/>
-              <a:t>5</a:t>
-            </a:fld>
-            <a:endParaRPr lang="en-US"/>
-          </a:p>
-        </p:txBody>
-      </p:sp>
     </p:spTree>
   </p:cSld>
   <p:clrMapOvr>
@@ -6763,35 +6612,6 @@
           </a:p>
         </p:txBody>
       </p:sp>
-      <p:sp>
-        <p:nvSpPr>
-          <p:cNvPr id="6" name="Slide Number Placeholder 5">
-            <a:extLst>
-              <a:ext uri="{FF2B5EF4-FFF2-40B4-BE49-F238E27FC236}">
-                <a16:creationId xmlns:a16="http://schemas.microsoft.com/office/drawing/2014/main" id="{D802F1D2-06AE-936C-8D19-929084F9148D}"/>
-              </a:ext>
-            </a:extLst>
-          </p:cNvPr>
-          <p:cNvSpPr>
-            <a:spLocks noGrp="1"/>
-          </p:cNvSpPr>
-          <p:nvPr>
-            <p:ph type="sldNum" sz="quarter" idx="12"/>
-          </p:nvPr>
-        </p:nvSpPr>
-        <p:spPr/>
-        <p:txBody>
-          <a:bodyPr/>
-          <a:lstStyle/>
-          <a:p>
-            <a:fld id="{394597B6-99AE-8F4E-8AC4-338DBFD9B0E5}" type="slidenum">
-              <a:rPr lang="en-US" smtClean="0"/>
-              <a:t>6</a:t>
-            </a:fld>
-            <a:endParaRPr lang="en-US"/>
-          </a:p>
-        </p:txBody>
-      </p:sp>
     </p:spTree>
   </p:cSld>
   <p:clrMapOvr>
@@ -7052,35 +6872,6 @@
           </a:p>
         </p:txBody>
       </p:sp>
-      <p:sp>
-        <p:nvSpPr>
-          <p:cNvPr id="6" name="Slide Number Placeholder 5">
-            <a:extLst>
-              <a:ext uri="{FF2B5EF4-FFF2-40B4-BE49-F238E27FC236}">
-                <a16:creationId xmlns:a16="http://schemas.microsoft.com/office/drawing/2014/main" id="{8C15E85F-7F7F-8EEB-46BB-5D02B514AF5E}"/>
-              </a:ext>
-            </a:extLst>
-          </p:cNvPr>
-          <p:cNvSpPr>
-            <a:spLocks noGrp="1"/>
-          </p:cNvSpPr>
-          <p:nvPr>
-            <p:ph type="sldNum" sz="quarter" idx="12"/>
-          </p:nvPr>
-        </p:nvSpPr>
-        <p:spPr/>
-        <p:txBody>
-          <a:bodyPr/>
-          <a:lstStyle/>
-          <a:p>
-            <a:fld id="{394597B6-99AE-8F4E-8AC4-338DBFD9B0E5}" type="slidenum">
-              <a:rPr lang="en-US" smtClean="0"/>
-              <a:t>7</a:t>
-            </a:fld>
-            <a:endParaRPr lang="en-US"/>
-          </a:p>
-        </p:txBody>
-      </p:sp>
     </p:spTree>
   </p:cSld>
   <p:clrMapOvr>
@@ -7108,10 +6899,167 @@
       </p:grpSpPr>
       <p:sp>
         <p:nvSpPr>
-          <p:cNvPr id="2" name="Title 1">
+          <p:cNvPr id="2" name="Title 1"/>
+          <p:cNvSpPr>
+            <a:spLocks noGrp="1"/>
+          </p:cNvSpPr>
+          <p:nvPr>
+            <p:ph type="title"/>
+          </p:nvPr>
+        </p:nvSpPr>
+        <p:spPr/>
+        <p:txBody>
+          <a:bodyPr/>
+          <a:lstStyle/>
+          <a:p>
+            <a:r>
+              <a:t>Distributed Computation</a:t>
+            </a:r>
+          </a:p>
+        </p:txBody>
+      </p:sp>
+      <p:sp>
+        <p:nvSpPr>
+          <p:cNvPr id="3" name="Content Placeholder 2"/>
+          <p:cNvSpPr>
+            <a:spLocks noGrp="1"/>
+          </p:cNvSpPr>
+          <p:nvPr>
+            <p:ph idx="1"/>
+          </p:nvPr>
+        </p:nvSpPr>
+        <p:spPr>
+          <a:xfrm>
+            <a:off x="838200" y="1139190"/>
+            <a:ext cx="10515600" cy="5392615"/>
+          </a:xfrm>
+        </p:spPr>
+        <p:txBody>
+          <a:bodyPr>
+            <a:normAutofit/>
+          </a:bodyPr>
+          <a:lstStyle/>
+          <a:p>
+            <a:r>
+              <a:rPr lang="en-US" sz="2400" dirty="0"/>
+              <a:t>Parallel programs are another kind of application that use the network</a:t>
+            </a:r>
+          </a:p>
+          <a:p>
+            <a:pPr lvl="1"/>
+            <a:r>
+              <a:rPr lang="en-US" sz="2200" dirty="0"/>
+              <a:t>Historically known as High-Performance Computing (HPC)</a:t>
+            </a:r>
+          </a:p>
+          <a:p>
+            <a:pPr lvl="2"/>
+            <a:r>
+              <a:rPr lang="en-US" dirty="0"/>
+              <a:t>e.g., weather forecasting, financial modeling, aerodynamic design, physics simulations</a:t>
+            </a:r>
+          </a:p>
+          <a:p>
+            <a:pPr lvl="1"/>
+            <a:r>
+              <a:rPr lang="en-US" sz="2200" dirty="0"/>
+              <a:t>Originally ran on purpose-built supercomputers</a:t>
+            </a:r>
+          </a:p>
+          <a:p>
+            <a:pPr lvl="1"/>
+            <a:r>
+              <a:rPr lang="en-US" sz="2200" dirty="0"/>
+              <a:t>Today they typically run in datacenters (commodity servers, datacenter fabric)</a:t>
+            </a:r>
+          </a:p>
+          <a:p>
+            <a:r>
+              <a:rPr lang="en-US" sz="2400" dirty="0"/>
+              <a:t>Modern workloads now include…</a:t>
+            </a:r>
+            <a:endParaRPr sz="2400" dirty="0"/>
+          </a:p>
+          <a:p>
+            <a:pPr lvl="1"/>
+            <a:r>
+              <a:rPr lang="en-US" sz="2200" dirty="0"/>
+              <a:t>Building search indices</a:t>
+            </a:r>
+          </a:p>
+          <a:p>
+            <a:pPr lvl="1"/>
+            <a:r>
+              <a:rPr sz="2200" dirty="0"/>
+              <a:t>AI model training</a:t>
+            </a:r>
+          </a:p>
+          <a:p>
+            <a:r>
+              <a:rPr lang="en-US" sz="2400" dirty="0"/>
+              <a:t>Key properties (with respect to networking)</a:t>
+            </a:r>
+          </a:p>
+          <a:p>
+            <a:pPr lvl="1"/>
+            <a:r>
+              <a:rPr lang="en-US" sz="2200" dirty="0"/>
+              <a:t>Involve a </a:t>
+            </a:r>
+            <a:r>
+              <a:rPr sz="2200" dirty="0"/>
+              <a:t>group of processes </a:t>
+            </a:r>
+            <a:r>
+              <a:rPr lang="en-US" sz="2200" dirty="0"/>
+              <a:t>(a </a:t>
+            </a:r>
+            <a:r>
+              <a:rPr lang="en-US" sz="2200" i="1" dirty="0"/>
+              <a:t>collective</a:t>
+            </a:r>
+            <a:r>
+              <a:rPr lang="en-US" sz="2200" dirty="0"/>
+              <a:t>) rather than just a client-server pair</a:t>
+            </a:r>
+          </a:p>
+          <a:p>
+            <a:pPr lvl="1"/>
+            <a:r>
+              <a:rPr lang="en-US" sz="2200" dirty="0"/>
+              <a:t>Programs are structured to iterate through a sequence of steps</a:t>
+            </a:r>
+          </a:p>
+          <a:p>
+            <a:pPr lvl="2"/>
+            <a:r>
+              <a:rPr lang="en-US" dirty="0"/>
+              <a:t>Scatter “chunks of data” to peers (one-to-many communication)</a:t>
+            </a:r>
+          </a:p>
+          <a:p>
+            <a:pPr lvl="2"/>
+            <a:r>
+              <a:rPr lang="en-US" dirty="0"/>
+              <a:t>Shuffle “intermediate results” between peers (many-to-many communication)</a:t>
+            </a:r>
+          </a:p>
+          <a:p>
+            <a:pPr lvl="2"/>
+            <a:r>
+              <a:rPr lang="en-US" dirty="0"/>
+              <a:t>Gather “results” back in a central location (many-to-one communication) </a:t>
+            </a:r>
+            <a:endParaRPr dirty="0"/>
+          </a:p>
+        </p:txBody>
+      </p:sp>
+      <p:sp>
+        <p:nvSpPr>
+          <p:cNvPr id="4" name="Footer Placeholder 3">
             <a:extLst>
               <a:ext uri="{FF2B5EF4-FFF2-40B4-BE49-F238E27FC236}">
-                <a16:creationId xmlns:a16="http://schemas.microsoft.com/office/drawing/2014/main" id="{36872019-9549-6622-0FE7-0C1C04BFDEAE}"/>
+                <a16:creationId xmlns:a16="http://schemas.microsoft.com/office/drawing/2014/main" id="{9A1FB449-BD9D-400E-38D7-28BF35CF5D6C}"/>
               </a:ext>
             </a:extLst>
           </p:cNvPr>
@@ -7119,7 +7067,7 @@
             <a:spLocks noGrp="1"/>
           </p:cNvSpPr>
           <p:nvPr>
-            <p:ph type="ctrTitle"/>
+            <p:ph type="ftr" sz="quarter" idx="11"/>
           </p:nvPr>
         </p:nvSpPr>
         <p:spPr/>
@@ -7128,72 +7076,13 @@
           <a:lstStyle/>
           <a:p>
             <a:r>
-              <a:rPr lang="en-US" dirty="0"/>
-              <a:t>HTTP: From App to Framework</a:t>
-            </a:r>
-          </a:p>
-        </p:txBody>
-      </p:sp>
-      <p:sp>
-        <p:nvSpPr>
-          <p:cNvPr id="3" name="Footer Placeholder 2">
-            <a:extLst>
-              <a:ext uri="{FF2B5EF4-FFF2-40B4-BE49-F238E27FC236}">
-                <a16:creationId xmlns:a16="http://schemas.microsoft.com/office/drawing/2014/main" id="{8A1567C0-0A57-6BB8-670A-C6108CA413A8}"/>
-              </a:ext>
-            </a:extLst>
-          </p:cNvPr>
-          <p:cNvSpPr>
-            <a:spLocks noGrp="1"/>
-          </p:cNvSpPr>
-          <p:nvPr>
-            <p:ph type="ftr" sz="quarter" idx="11"/>
-          </p:nvPr>
-        </p:nvSpPr>
-        <p:spPr/>
-        <p:txBody>
-          <a:bodyPr/>
-          <a:lstStyle/>
-          <a:p>
-            <a:endParaRPr lang="en-US"/>
-          </a:p>
-        </p:txBody>
-      </p:sp>
-      <p:sp>
-        <p:nvSpPr>
-          <p:cNvPr id="4" name="Slide Number Placeholder 3">
-            <a:extLst>
-              <a:ext uri="{FF2B5EF4-FFF2-40B4-BE49-F238E27FC236}">
-                <a16:creationId xmlns:a16="http://schemas.microsoft.com/office/drawing/2014/main" id="{5B95C7F8-D016-5B15-83EA-9C81719EDED2}"/>
-              </a:ext>
-            </a:extLst>
-          </p:cNvPr>
-          <p:cNvSpPr>
-            <a:spLocks noGrp="1"/>
-          </p:cNvSpPr>
-          <p:nvPr>
-            <p:ph type="sldNum" sz="quarter" idx="12"/>
-          </p:nvPr>
-        </p:nvSpPr>
-        <p:spPr/>
-        <p:txBody>
-          <a:bodyPr/>
-          <a:lstStyle/>
-          <a:p>
-            <a:fld id="{394597B6-99AE-8F4E-8AC4-338DBFD9B0E5}" type="slidenum">
-              <a:rPr lang="en-US" smtClean="0"/>
-              <a:t>8</a:t>
-            </a:fld>
-            <a:endParaRPr lang="en-US"/>
+              <a:rPr lang="en-US"/>
+              <a:t>Copyright Peterson &amp; Davie, 2026</a:t>
+            </a:r>
           </a:p>
         </p:txBody>
       </p:sp>
     </p:spTree>
-    <p:extLst>
-      <p:ext uri="{BB962C8B-B14F-4D97-AF65-F5344CB8AC3E}">
-        <p14:creationId xmlns:p14="http://schemas.microsoft.com/office/powerpoint/2010/main" val="2632201489"/>
-      </p:ext>
-    </p:extLst>
   </p:cSld>
   <p:clrMapOvr>
     <a:masterClrMapping/>
@@ -7234,10 +7123,8 @@
           <a:lstStyle/>
           <a:p>
             <a:r>
-              <a:rPr lang="en-US" dirty="0"/>
-              <a:t>Overview</a:t>
-            </a:r>
-            <a:endParaRPr dirty="0"/>
+              <a:t>Synchronization and Work Queues</a:t>
+            </a:r>
           </a:p>
         </p:txBody>
       </p:sp>
@@ -7253,8 +7140,8 @@
         </p:nvSpPr>
         <p:spPr>
           <a:xfrm>
-            <a:off x="838080" y="1476360"/>
-            <a:ext cx="5181480" cy="4351320"/>
+            <a:off x="838200" y="1548224"/>
+            <a:ext cx="10515600" cy="4770513"/>
           </a:xfrm>
         </p:spPr>
         <p:txBody>
@@ -7262,103 +7149,132 @@
           <a:lstStyle/>
           <a:p>
             <a:r>
-              <a:rPr dirty="0"/>
-              <a:t>HTTP began as the protocol of the World Wide Web</a:t>
-            </a:r>
-          </a:p>
-          <a:p>
-            <a:r>
-              <a:rPr dirty="0"/>
-              <a:t>Has evolved into </a:t>
-            </a:r>
-            <a:r>
-              <a:rPr lang="en-US" dirty="0"/>
-              <a:t>a</a:t>
-            </a:r>
-            <a:r>
-              <a:rPr dirty="0"/>
-              <a:t> framework for Internet applications</a:t>
-            </a:r>
-          </a:p>
-          <a:p>
-            <a:pPr lvl="1"/>
-            <a:r>
-              <a:rPr dirty="0"/>
-              <a:t>Mobile apps, video streaming</a:t>
-            </a:r>
-            <a:r>
-              <a:rPr lang="en-US" dirty="0"/>
-              <a:t>…</a:t>
+              <a:rPr lang="en-US" dirty="0"/>
+              <a:t>Goal is to maximize parallelism and minimize blocking</a:t>
+            </a:r>
+          </a:p>
+          <a:p>
+            <a:r>
+              <a:rPr dirty="0"/>
+              <a:t>Synchronization barrier between </a:t>
+            </a:r>
+            <a:r>
+              <a:rPr lang="en-US" dirty="0"/>
+              <a:t>steps and iterations</a:t>
             </a:r>
             <a:endParaRPr dirty="0"/>
           </a:p>
           <a:p>
-            <a:r>
-              <a:rPr lang="en-US" dirty="0"/>
-              <a:t>R</a:t>
-            </a:r>
-            <a:r>
-              <a:rPr dirty="0"/>
-              <a:t>equest/</a:t>
-            </a:r>
-            <a:r>
-              <a:rPr lang="en-US" dirty="0"/>
-              <a:t>R</a:t>
-            </a:r>
-            <a:r>
-              <a:rPr dirty="0"/>
-              <a:t>esponse </a:t>
-            </a:r>
-            <a:r>
-              <a:rPr lang="en-US" dirty="0"/>
-              <a:t>P</a:t>
-            </a:r>
-            <a:r>
-              <a:rPr dirty="0"/>
-              <a:t>rotocol</a:t>
-            </a:r>
-            <a:endParaRPr lang="en-US" dirty="0"/>
-          </a:p>
-          <a:p>
-            <a:pPr lvl="1"/>
-            <a:r>
-              <a:rPr lang="en-US" dirty="0"/>
-              <a:t>and more…</a:t>
+            <a:pPr lvl="1"/>
+            <a:r>
+              <a:rPr dirty="0"/>
+              <a:t>Next iteration can't start until </a:t>
+            </a:r>
+            <a:r>
+              <a:rPr lang="en-US" dirty="0"/>
+              <a:t>previous</a:t>
+            </a:r>
+            <a:r>
+              <a:rPr dirty="0"/>
+              <a:t> one fully completes</a:t>
+            </a:r>
+          </a:p>
+          <a:p>
+            <a:pPr lvl="1"/>
+            <a:r>
+              <a:rPr dirty="0"/>
+              <a:t>Overall </a:t>
+            </a:r>
+            <a:r>
+              <a:rPr lang="en-US" dirty="0"/>
+              <a:t>speed</a:t>
+            </a:r>
+            <a:r>
+              <a:rPr dirty="0"/>
+              <a:t> = slowest transfer, not the fastest</a:t>
+            </a:r>
+          </a:p>
+          <a:p>
+            <a:r>
+              <a:rPr lang="en-US" dirty="0"/>
+              <a:t>Avoid blocking on the network </a:t>
+            </a:r>
+          </a:p>
+          <a:p>
+            <a:pPr lvl="1"/>
+            <a:r>
+              <a:rPr lang="en-US" dirty="0"/>
+              <a:t>Communication “channel” includes a work queue and a completion queue</a:t>
+            </a:r>
+          </a:p>
+          <a:p>
+            <a:pPr lvl="1"/>
+            <a:r>
+              <a:rPr dirty="0"/>
+              <a:t>Threads </a:t>
+            </a:r>
+            <a:r>
+              <a:rPr lang="en-US" dirty="0"/>
+              <a:t>asynchronously </a:t>
+            </a:r>
+            <a:r>
+              <a:rPr dirty="0"/>
+              <a:t>insert </a:t>
+            </a:r>
+            <a:r>
+              <a:rPr lang="en-US" dirty="0"/>
+              <a:t>messages</a:t>
+            </a:r>
+            <a:r>
+              <a:rPr dirty="0"/>
+              <a:t> into a work queue</a:t>
+            </a:r>
+          </a:p>
+          <a:p>
+            <a:pPr lvl="1"/>
+            <a:r>
+              <a:rPr lang="en-US" dirty="0"/>
+              <a:t>Threads p</a:t>
+            </a:r>
+            <a:r>
+              <a:rPr dirty="0"/>
+              <a:t>oll the completion queue </a:t>
+            </a:r>
+            <a:r>
+              <a:rPr lang="en-US" dirty="0"/>
+              <a:t>for a notice about success/failure</a:t>
             </a:r>
             <a:endParaRPr dirty="0"/>
           </a:p>
-        </p:txBody>
-      </p:sp>
-      <p:pic>
-        <p:nvPicPr>
-          <p:cNvPr id="4" name="Picture 3" descr="firefox.png"/>
-          <p:cNvPicPr>
-            <a:picLocks noChangeAspect="1"/>
-          </p:cNvPicPr>
-          <p:nvPr/>
-        </p:nvPicPr>
-        <p:blipFill>
-          <a:blip r:embed="rId2"/>
-          <a:stretch>
-            <a:fillRect/>
-          </a:stretch>
-        </p:blipFill>
-        <p:spPr>
-          <a:xfrm>
-            <a:off x="6172200" y="1705105"/>
-            <a:ext cx="5181480" cy="3893829"/>
-          </a:xfrm>
-          <a:prstGeom prst="rect">
-            <a:avLst/>
-          </a:prstGeom>
-        </p:spPr>
-      </p:pic>
-      <p:sp>
-        <p:nvSpPr>
-          <p:cNvPr id="5" name="Footer Placeholder 4">
+          <a:p>
+            <a:r>
+              <a:rPr lang="en-US" dirty="0"/>
+              <a:t>Sockets do not provide the right abstraction</a:t>
+            </a:r>
+          </a:p>
+          <a:p>
+            <a:pPr lvl="1"/>
+            <a:r>
+              <a:rPr lang="en-US" dirty="0"/>
+              <a:t>And neither does TCP</a:t>
+            </a:r>
+          </a:p>
+          <a:p>
+            <a:pPr lvl="1"/>
+            <a:r>
+              <a:rPr lang="en-US" dirty="0"/>
+              <a:t>We’ll see alternatives to both in Chapter 15</a:t>
+            </a:r>
+            <a:endParaRPr dirty="0"/>
+          </a:p>
+        </p:txBody>
+      </p:sp>
+      <p:sp>
+        <p:nvSpPr>
+          <p:cNvPr id="4" name="Footer Placeholder 3">
             <a:extLst>
               <a:ext uri="{FF2B5EF4-FFF2-40B4-BE49-F238E27FC236}">
-                <a16:creationId xmlns:a16="http://schemas.microsoft.com/office/drawing/2014/main" id="{BB879E49-DB51-166E-BF20-94F8E02F9D72}"/>
+                <a16:creationId xmlns:a16="http://schemas.microsoft.com/office/drawing/2014/main" id="{6FE8717B-A671-FD6A-438B-08A660CA3749}"/>
               </a:ext>
             </a:extLst>
           </p:cNvPr>
@@ -7378,35 +7294,6 @@
               <a:rPr lang="en-US"/>
               <a:t>Copyright Peterson &amp; Davie, 2026</a:t>
             </a:r>
-          </a:p>
-        </p:txBody>
-      </p:sp>
-      <p:sp>
-        <p:nvSpPr>
-          <p:cNvPr id="6" name="Slide Number Placeholder 5">
-            <a:extLst>
-              <a:ext uri="{FF2B5EF4-FFF2-40B4-BE49-F238E27FC236}">
-                <a16:creationId xmlns:a16="http://schemas.microsoft.com/office/drawing/2014/main" id="{8AC67E9E-C05B-E40E-B7C4-E7D69C8C91F8}"/>
-              </a:ext>
-            </a:extLst>
-          </p:cNvPr>
-          <p:cNvSpPr>
-            <a:spLocks noGrp="1"/>
-          </p:cNvSpPr>
-          <p:nvPr>
-            <p:ph type="sldNum" sz="quarter" idx="12"/>
-          </p:nvPr>
-        </p:nvSpPr>
-        <p:spPr/>
-        <p:txBody>
-          <a:bodyPr/>
-          <a:lstStyle/>
-          <a:p>
-            <a:fld id="{394597B6-99AE-8F4E-8AC4-338DBFD9B0E5}" type="slidenum">
-              <a:rPr lang="en-US" smtClean="0"/>
-              <a:t>9</a:t>
-            </a:fld>
-            <a:endParaRPr lang="en-US"/>
           </a:p>
         </p:txBody>
       </p:sp>
